--- a/Project/Otus_basic.pptx
+++ b/Project/Otus_basic.pptx
@@ -8419,123 +8419,21 @@
           </a:p>
         </p:txBody>
       </p:sp>
-      <p:grpSp>
-        <p:nvGrpSpPr>
-          <p:cNvPr id="196" name="Google Shape;196;p40"/>
-          <p:cNvGrpSpPr/>
-          <p:nvPr/>
-        </p:nvGrpSpPr>
-        <p:grpSpPr>
-          <a:xfrm>
-            <a:off x="7066278" y="1520534"/>
-            <a:ext cx="4718989" cy="1665515"/>
-            <a:chOff x="4729635" y="887067"/>
-            <a:chExt cx="3375207" cy="1413530"/>
-          </a:xfrm>
-        </p:grpSpPr>
-        <p:pic>
-          <p:nvPicPr>
-            <p:cNvPr id="197" name="Google Shape;197;p40"/>
-            <p:cNvPicPr preferRelativeResize="0"/>
-            <p:nvPr/>
-          </p:nvPicPr>
-          <p:blipFill>
-            <a:blip r:embed="rId3">
-              <a:alphaModFix/>
-            </a:blip>
-            <a:stretch>
-              <a:fillRect/>
-            </a:stretch>
-          </p:blipFill>
-          <p:spPr>
-            <a:xfrm>
-              <a:off x="4729635" y="887067"/>
-              <a:ext cx="3375207" cy="1399343"/>
-            </a:xfrm>
-            <a:prstGeom prst="rect">
-              <a:avLst/>
-            </a:prstGeom>
-            <a:noFill/>
-            <a:ln>
-              <a:noFill/>
-            </a:ln>
-            <a:effectLst>
-              <a:outerShdw blurRad="200025" dist="28575" dir="4200000" algn="bl" rotWithShape="0">
-                <a:srgbClr val="000000">
-                  <a:alpha val="30000"/>
-                </a:srgbClr>
-              </a:outerShdw>
-            </a:effectLst>
-          </p:spPr>
-        </p:pic>
-        <p:sp>
-          <p:nvSpPr>
-            <p:cNvPr id="198" name="Google Shape;198;p40"/>
-            <p:cNvSpPr txBox="1"/>
-            <p:nvPr/>
-          </p:nvSpPr>
-          <p:spPr>
-            <a:xfrm>
-              <a:off x="5220710" y="959746"/>
-              <a:ext cx="2694600" cy="1340851"/>
-            </a:xfrm>
-            <a:prstGeom prst="rect">
-              <a:avLst/>
-            </a:prstGeom>
-            <a:noFill/>
-            <a:ln>
-              <a:noFill/>
-            </a:ln>
-          </p:spPr>
-          <p:txBody>
-            <a:bodyPr spcFirstLastPara="1" wrap="square" lIns="121900" tIns="121900" rIns="121900" bIns="121900" anchor="t" anchorCtr="0">
-              <a:spAutoFit/>
-            </a:bodyPr>
-            <a:lstStyle/>
-            <a:p>
-              <a:pPr>
-                <a:spcBef>
-                  <a:spcPts val="800"/>
-                </a:spcBef>
-                <a:buClr>
-                  <a:schemeClr val="dk1"/>
-                </a:buClr>
-                <a:buSzPts val="1100"/>
-              </a:pPr>
-              <a:r>
-                <a:rPr lang="ru" sz="1600">
-                  <a:solidFill>
-                    <a:schemeClr val="dk1"/>
-                  </a:solidFill>
-                  <a:latin typeface="Roboto"/>
-                  <a:ea typeface="Roboto"/>
-                  <a:cs typeface="Roboto"/>
-                  <a:sym typeface="Roboto"/>
-                </a:rPr>
-                <a:t>Перечислите технологии/ПО/подходы, которые вы использовали в проекте и почему. Какое у вас сложилось впечатление о них?</a:t>
-              </a:r>
-              <a:endParaRPr sz="1467">
-                <a:solidFill>
-                  <a:schemeClr val="dk1"/>
-                </a:solidFill>
-                <a:latin typeface="Roboto"/>
-                <a:ea typeface="Roboto"/>
-                <a:cs typeface="Roboto"/>
-                <a:sym typeface="Roboto"/>
-              </a:endParaRPr>
-            </a:p>
-          </p:txBody>
-        </p:sp>
-      </p:grpSp>
       <p:graphicFrame>
         <p:nvGraphicFramePr>
           <p:cNvPr id="199" name="Google Shape;199;p40"/>
           <p:cNvGraphicFramePr/>
-          <p:nvPr/>
+          <p:nvPr>
+            <p:extLst>
+              <p:ext uri="{D42A27DB-BD31-4B8C-83A1-F6EECF244321}">
+                <p14:modId xmlns:p14="http://schemas.microsoft.com/office/powerpoint/2010/main" val="427343608"/>
+              </p:ext>
+            </p:extLst>
+          </p:nvPr>
         </p:nvGraphicFramePr>
         <p:xfrm>
           <a:off x="1270000" y="2530367"/>
-          <a:ext cx="9652000" cy="3088440"/>
+          <a:ext cx="9652000" cy="3419339"/>
         </p:xfrm>
         <a:graphic>
           <a:graphicData uri="http://schemas.openxmlformats.org/drawingml/2006/table">
@@ -8661,7 +8559,127 @@
                         </a:spcAft>
                         <a:buNone/>
                       </a:pPr>
-                      <a:endParaRPr sz="2100">
+                      <a:r>
+                        <a:rPr lang="en-US" sz="2100" dirty="0" err="1" smtClean="0">
+                          <a:solidFill>
+                            <a:schemeClr val="dk1"/>
+                          </a:solidFill>
+                          <a:latin typeface="Roboto"/>
+                          <a:ea typeface="Roboto"/>
+                          <a:cs typeface="Roboto"/>
+                          <a:sym typeface="Roboto"/>
+                        </a:rPr>
+                        <a:t>Vlan</a:t>
+                      </a:r>
+                      <a:r>
+                        <a:rPr lang="en-US" sz="2100" dirty="0" smtClean="0">
+                          <a:solidFill>
+                            <a:schemeClr val="dk1"/>
+                          </a:solidFill>
+                          <a:latin typeface="Roboto"/>
+                          <a:ea typeface="Roboto"/>
+                          <a:cs typeface="Roboto"/>
+                          <a:sym typeface="Roboto"/>
+                        </a:rPr>
+                        <a:t>,</a:t>
+                      </a:r>
+                      <a:r>
+                        <a:rPr lang="en-US" sz="2100" baseline="0" dirty="0" smtClean="0">
+                          <a:solidFill>
+                            <a:schemeClr val="dk1"/>
+                          </a:solidFill>
+                          <a:latin typeface="Roboto"/>
+                          <a:ea typeface="Roboto"/>
+                          <a:cs typeface="Roboto"/>
+                          <a:sym typeface="Roboto"/>
+                        </a:rPr>
+                        <a:t> STP, DHCP, </a:t>
+                      </a:r>
+                      <a:r>
+                        <a:rPr lang="ru-RU" sz="2100" baseline="0" dirty="0" smtClean="0">
+                          <a:solidFill>
+                            <a:schemeClr val="dk1"/>
+                          </a:solidFill>
+                          <a:latin typeface="Roboto"/>
+                          <a:ea typeface="Roboto"/>
+                          <a:cs typeface="Roboto"/>
+                          <a:sym typeface="Roboto"/>
+                        </a:rPr>
+                        <a:t>Избыточность </a:t>
+                      </a:r>
+                      <a:r>
+                        <a:rPr lang="ru-RU" sz="2100" baseline="0" dirty="0" err="1" smtClean="0">
+                          <a:solidFill>
+                            <a:schemeClr val="dk1"/>
+                          </a:solidFill>
+                          <a:latin typeface="Roboto"/>
+                          <a:ea typeface="Roboto"/>
+                          <a:cs typeface="Roboto"/>
+                          <a:sym typeface="Roboto"/>
+                        </a:rPr>
+                        <a:t>линков</a:t>
+                      </a:r>
+                      <a:r>
+                        <a:rPr lang="en-US" sz="2100" baseline="0" dirty="0" smtClean="0">
+                          <a:solidFill>
+                            <a:schemeClr val="dk1"/>
+                          </a:solidFill>
+                          <a:latin typeface="Roboto"/>
+                          <a:ea typeface="Roboto"/>
+                          <a:cs typeface="Roboto"/>
+                          <a:sym typeface="Roboto"/>
+                        </a:rPr>
+                        <a:t> (</a:t>
+                      </a:r>
+                      <a:r>
+                        <a:rPr lang="en-US" sz="2100" baseline="0" smtClean="0">
+                          <a:solidFill>
+                            <a:schemeClr val="dk1"/>
+                          </a:solidFill>
+                          <a:latin typeface="Roboto"/>
+                          <a:ea typeface="Roboto"/>
+                          <a:cs typeface="Roboto"/>
+                          <a:sym typeface="Roboto"/>
+                        </a:rPr>
+                        <a:t>Port channel, </a:t>
+                      </a:r>
+                      <a:r>
+                        <a:rPr lang="en-US" sz="2100" baseline="0" dirty="0" smtClean="0">
+                          <a:solidFill>
+                            <a:schemeClr val="dk1"/>
+                          </a:solidFill>
+                          <a:latin typeface="Roboto"/>
+                          <a:ea typeface="Roboto"/>
+                          <a:cs typeface="Roboto"/>
+                          <a:sym typeface="Roboto"/>
+                        </a:rPr>
+                        <a:t>HSRP), </a:t>
+                      </a:r>
+                      <a:r>
+                        <a:rPr lang="ru-RU" sz="2100" baseline="0" dirty="0" err="1" smtClean="0">
+                          <a:solidFill>
+                            <a:schemeClr val="dk1"/>
+                          </a:solidFill>
+                          <a:latin typeface="Roboto"/>
+                          <a:ea typeface="Roboto"/>
+                          <a:cs typeface="Roboto"/>
+                          <a:sym typeface="Roboto"/>
+                        </a:rPr>
+                        <a:t>Тунелирование</a:t>
+                      </a:r>
+                      <a:r>
+                        <a:rPr lang="en-US" sz="2100" baseline="0" dirty="0" smtClean="0">
+                          <a:solidFill>
+                            <a:schemeClr val="dk1"/>
+                          </a:solidFill>
+                          <a:latin typeface="Roboto"/>
+                          <a:ea typeface="Roboto"/>
+                          <a:cs typeface="Roboto"/>
+                          <a:sym typeface="Roboto"/>
+                        </a:rPr>
+                        <a:t>, SSH </a:t>
+                      </a:r>
+                      <a:endParaRPr sz="2100" dirty="0">
                         <a:solidFill>
                           <a:schemeClr val="dk1"/>
                         </a:solidFill>
@@ -8827,7 +8845,31 @@
                         </a:spcAft>
                         <a:buNone/>
                       </a:pPr>
-                      <a:endParaRPr sz="2100">
+                      <a:r>
+                        <a:rPr lang="ru-RU" sz="2100" dirty="0" smtClean="0">
+                          <a:solidFill>
+                            <a:schemeClr val="dk1"/>
+                          </a:solidFill>
+                          <a:latin typeface="Roboto"/>
+                          <a:ea typeface="Roboto"/>
+                          <a:cs typeface="Roboto"/>
+                          <a:sym typeface="Roboto"/>
+                        </a:rPr>
+                        <a:t>Статическая</a:t>
+                      </a:r>
+                      <a:r>
+                        <a:rPr lang="ru-RU" sz="2100" baseline="0" dirty="0" smtClean="0">
+                          <a:solidFill>
+                            <a:schemeClr val="dk1"/>
+                          </a:solidFill>
+                          <a:latin typeface="Roboto"/>
+                          <a:ea typeface="Roboto"/>
+                          <a:cs typeface="Roboto"/>
+                          <a:sym typeface="Roboto"/>
+                        </a:rPr>
+                        <a:t> и динамическая маршрутизация</a:t>
+                      </a:r>
+                      <a:endParaRPr sz="2100" dirty="0">
                         <a:solidFill>
                           <a:schemeClr val="dk1"/>
                         </a:solidFill>
@@ -8993,15 +9035,42 @@
                         </a:spcAft>
                         <a:buNone/>
                       </a:pPr>
-                      <a:endParaRPr sz="2100">
-                        <a:solidFill>
-                          <a:schemeClr val="dk1"/>
-                        </a:solidFill>
-                        <a:latin typeface="Roboto"/>
-                        <a:ea typeface="Roboto"/>
-                        <a:cs typeface="Roboto"/>
-                        <a:sym typeface="Roboto"/>
-                      </a:endParaRPr>
+                      <a:r>
+                        <a:rPr lang="en-US" sz="2100" dirty="0" smtClean="0">
+                          <a:solidFill>
+                            <a:schemeClr val="dk1"/>
+                          </a:solidFill>
+                          <a:latin typeface="Roboto"/>
+                          <a:ea typeface="Roboto"/>
+                          <a:cs typeface="Roboto"/>
+                          <a:sym typeface="Roboto"/>
+                        </a:rPr>
+                        <a:t>ACL</a:t>
+                      </a:r>
+                      <a:r>
+                        <a:rPr lang="en-US" sz="2100" baseline="0" dirty="0" smtClean="0">
+                          <a:solidFill>
+                            <a:schemeClr val="dk1"/>
+                          </a:solidFill>
+                          <a:latin typeface="Roboto"/>
+                          <a:ea typeface="Roboto"/>
+                          <a:cs typeface="Roboto"/>
+                          <a:sym typeface="Roboto"/>
+                        </a:rPr>
+                        <a:t> </a:t>
+                      </a:r>
+                      <a:r>
+                        <a:rPr lang="ru-RU" sz="2100" baseline="0" dirty="0" smtClean="0">
+                          <a:solidFill>
+                            <a:schemeClr val="dk1"/>
+                          </a:solidFill>
+                          <a:latin typeface="Roboto"/>
+                          <a:ea typeface="Roboto"/>
+                          <a:cs typeface="Roboto"/>
+                          <a:sym typeface="Roboto"/>
+                        </a:rPr>
+                        <a:t>листы</a:t>
+                      </a:r>
                     </a:p>
                   </a:txBody>
                   <a:tcPr marL="264000" marR="121900" marT="121900" marB="121900">
@@ -9159,7 +9228,19 @@
                         </a:spcAft>
                         <a:buNone/>
                       </a:pPr>
-                      <a:endParaRPr sz="2100">
+                      <a:r>
+                        <a:rPr lang="en-US" sz="2100" dirty="0" smtClean="0">
+                          <a:solidFill>
+                            <a:schemeClr val="dk1"/>
+                          </a:solidFill>
+                          <a:latin typeface="Roboto"/>
+                          <a:ea typeface="Roboto"/>
+                          <a:cs typeface="Roboto"/>
+                          <a:sym typeface="Roboto"/>
+                        </a:rPr>
+                        <a:t>PAT</a:t>
+                      </a:r>
+                      <a:endParaRPr sz="2100" dirty="0">
                         <a:solidFill>
                           <a:schemeClr val="dk1"/>
                         </a:solidFill>
@@ -9305,7 +9386,7 @@
                         </a:spcAft>
                         <a:buNone/>
                       </a:pPr>
-                      <a:endParaRPr sz="2100">
+                      <a:endParaRPr sz="2100" dirty="0">
                         <a:solidFill>
                           <a:srgbClr val="9857F3"/>
                         </a:solidFill>

--- a/Project/Otus_basic.pptx
+++ b/Project/Otus_basic.pptx
@@ -5,7 +5,7 @@
     <p:sldMasterId id="2147483648" r:id="rId1"/>
   </p:sldMasterIdLst>
   <p:notesMasterIdLst>
-    <p:notesMasterId r:id="rId10"/>
+    <p:notesMasterId r:id="rId27"/>
   </p:notesMasterIdLst>
   <p:sldIdLst>
     <p:sldId id="257" r:id="rId2"/>
@@ -14,8 +14,25 @@
     <p:sldId id="260" r:id="rId5"/>
     <p:sldId id="261" r:id="rId6"/>
     <p:sldId id="262" r:id="rId7"/>
-    <p:sldId id="263" r:id="rId8"/>
-    <p:sldId id="264" r:id="rId9"/>
+    <p:sldId id="265" r:id="rId8"/>
+    <p:sldId id="270" r:id="rId9"/>
+    <p:sldId id="267" r:id="rId10"/>
+    <p:sldId id="268" r:id="rId11"/>
+    <p:sldId id="280" r:id="rId12"/>
+    <p:sldId id="269" r:id="rId13"/>
+    <p:sldId id="271" r:id="rId14"/>
+    <p:sldId id="272" r:id="rId15"/>
+    <p:sldId id="273" r:id="rId16"/>
+    <p:sldId id="274" r:id="rId17"/>
+    <p:sldId id="275" r:id="rId18"/>
+    <p:sldId id="276" r:id="rId19"/>
+    <p:sldId id="277" r:id="rId20"/>
+    <p:sldId id="278" r:id="rId21"/>
+    <p:sldId id="279" r:id="rId22"/>
+    <p:sldId id="281" r:id="rId23"/>
+    <p:sldId id="282" r:id="rId24"/>
+    <p:sldId id="283" r:id="rId25"/>
+    <p:sldId id="284" r:id="rId26"/>
   </p:sldIdLst>
   <p:sldSz cx="12192000" cy="6858000"/>
   <p:notesSz cx="6858000" cy="9144000"/>
@@ -114,6 +131,11 @@
       </a:defRPr>
     </a:lvl9pPr>
   </p:defaultTextStyle>
+  <p:extLst>
+    <p:ext uri="{EFAFB233-063F-42B5-8137-9DF3F51BA10A}">
+      <p15:sldGuideLst xmlns:p15="http://schemas.microsoft.com/office/powerpoint/2012/main"/>
+    </p:ext>
+  </p:extLst>
 </p:presentation>
 </file>
 
@@ -166,7 +188,7 @@
             </a:lvl1pPr>
           </a:lstStyle>
           <a:p>
-            <a:endParaRPr lang="ru-RU"/>
+            <a:endParaRPr lang="ru-RU" dirty="0"/>
           </a:p>
         </p:txBody>
       </p:sp>
@@ -199,9 +221,9 @@
           <a:p>
             <a:fld id="{DB00989E-4162-4EF0-B6CB-B1D61DD9DC95}" type="datetimeFigureOut">
               <a:rPr lang="ru-RU" smtClean="0"/>
-              <a:t>29.07.2026</a:t>
+              <a:t>27.08.2026</a:t>
             </a:fld>
-            <a:endParaRPr lang="ru-RU"/>
+            <a:endParaRPr lang="ru-RU" dirty="0"/>
           </a:p>
         </p:txBody>
       </p:sp>
@@ -234,7 +256,7 @@
           <a:bodyPr vert="horz" lIns="91440" tIns="45720" rIns="91440" bIns="45720" rtlCol="0" anchor="ctr"/>
           <a:lstStyle/>
           <a:p>
-            <a:endParaRPr lang="ru-RU"/>
+            <a:endParaRPr lang="ru-RU" dirty="0"/>
           </a:p>
         </p:txBody>
       </p:sp>
@@ -325,7 +347,7 @@
             </a:lvl1pPr>
           </a:lstStyle>
           <a:p>
-            <a:endParaRPr lang="ru-RU"/>
+            <a:endParaRPr lang="ru-RU" dirty="0"/>
           </a:p>
         </p:txBody>
       </p:sp>
@@ -360,7 +382,7 @@
               <a:rPr lang="ru-RU" smtClean="0"/>
               <a:t>‹#›</a:t>
             </a:fld>
-            <a:endParaRPr lang="ru-RU"/>
+            <a:endParaRPr lang="ru-RU" dirty="0"/>
           </a:p>
         </p:txBody>
       </p:sp>
@@ -559,7 +581,7 @@
               </a:spcAft>
               <a:buNone/>
             </a:pPr>
-            <a:endParaRPr/>
+            <a:endParaRPr dirty="0"/>
           </a:p>
         </p:txBody>
       </p:sp>
@@ -668,7 +690,7 @@
               </a:spcAft>
               <a:buNone/>
             </a:pPr>
-            <a:endParaRPr/>
+            <a:endParaRPr dirty="0"/>
           </a:p>
         </p:txBody>
       </p:sp>
@@ -777,7 +799,7 @@
               </a:spcAft>
               <a:buNone/>
             </a:pPr>
-            <a:endParaRPr/>
+            <a:endParaRPr dirty="0"/>
           </a:p>
         </p:txBody>
       </p:sp>
@@ -886,7 +908,7 @@
               </a:spcAft>
               <a:buNone/>
             </a:pPr>
-            <a:endParaRPr/>
+            <a:endParaRPr dirty="0"/>
           </a:p>
         </p:txBody>
       </p:sp>
@@ -995,7 +1017,7 @@
               </a:spcAft>
               <a:buNone/>
             </a:pPr>
-            <a:endParaRPr/>
+            <a:endParaRPr dirty="0"/>
           </a:p>
         </p:txBody>
       </p:sp>
@@ -1104,7 +1126,7 @@
               </a:spcAft>
               <a:buNone/>
             </a:pPr>
-            <a:endParaRPr/>
+            <a:endParaRPr dirty="0"/>
           </a:p>
         </p:txBody>
       </p:sp>
@@ -1122,115 +1144,6 @@
 </file>
 
 <file path=ppt/notesSlides/notesSlide7.xml><?xml version="1.0" encoding="utf-8"?>
-<p:notes xmlns:a="http://schemas.openxmlformats.org/drawingml/2006/main" xmlns:r="http://schemas.openxmlformats.org/officeDocument/2006/relationships" xmlns:p="http://schemas.openxmlformats.org/presentationml/2006/main" showMasterSp="0" showMasterPhAnim="0">
-  <p:cSld>
-    <p:spTree>
-      <p:nvGrpSpPr>
-        <p:cNvPr id="1" name="Shape 200"/>
-        <p:cNvGrpSpPr/>
-        <p:nvPr/>
-      </p:nvGrpSpPr>
-      <p:grpSpPr>
-        <a:xfrm>
-          <a:off x="0" y="0"/>
-          <a:ext cx="0" cy="0"/>
-          <a:chOff x="0" y="0"/>
-          <a:chExt cx="0" cy="0"/>
-        </a:xfrm>
-      </p:grpSpPr>
-      <p:sp>
-        <p:nvSpPr>
-          <p:cNvPr id="201" name="Google Shape;201;gdf29b9fb24_0_69:notes"/>
-          <p:cNvSpPr>
-            <a:spLocks noGrp="1" noRot="1" noChangeAspect="1"/>
-          </p:cNvSpPr>
-          <p:nvPr>
-            <p:ph type="sldImg" idx="2"/>
-          </p:nvPr>
-        </p:nvSpPr>
-        <p:spPr>
-          <a:xfrm>
-            <a:off x="381000" y="685800"/>
-            <a:ext cx="6096000" cy="3429000"/>
-          </a:xfrm>
-          <a:custGeom>
-            <a:avLst/>
-            <a:gdLst/>
-            <a:ahLst/>
-            <a:cxnLst/>
-            <a:rect l="l" t="t" r="r" b="b"/>
-            <a:pathLst>
-              <a:path w="120000" h="120000" extrusionOk="0">
-                <a:moveTo>
-                  <a:pt x="0" y="0"/>
-                </a:moveTo>
-                <a:lnTo>
-                  <a:pt x="120000" y="0"/>
-                </a:lnTo>
-                <a:lnTo>
-                  <a:pt x="120000" y="120000"/>
-                </a:lnTo>
-                <a:lnTo>
-                  <a:pt x="0" y="120000"/>
-                </a:lnTo>
-                <a:close/>
-              </a:path>
-            </a:pathLst>
-          </a:custGeom>
-        </p:spPr>
-      </p:sp>
-      <p:sp>
-        <p:nvSpPr>
-          <p:cNvPr id="202" name="Google Shape;202;gdf29b9fb24_0_69:notes"/>
-          <p:cNvSpPr txBox="1">
-            <a:spLocks noGrp="1"/>
-          </p:cNvSpPr>
-          <p:nvPr>
-            <p:ph type="body" idx="1"/>
-          </p:nvPr>
-        </p:nvSpPr>
-        <p:spPr>
-          <a:xfrm>
-            <a:off x="685800" y="4343400"/>
-            <a:ext cx="5486400" cy="4114800"/>
-          </a:xfrm>
-          <a:prstGeom prst="rect">
-            <a:avLst/>
-          </a:prstGeom>
-        </p:spPr>
-        <p:txBody>
-          <a:bodyPr spcFirstLastPara="1" wrap="square" lIns="91425" tIns="91425" rIns="91425" bIns="91425" anchor="t" anchorCtr="0">
-            <a:noAutofit/>
-          </a:bodyPr>
-          <a:lstStyle/>
-          <a:p>
-            <a:pPr marL="0" lvl="0" indent="0" algn="l" rtl="0">
-              <a:spcBef>
-                <a:spcPts val="0"/>
-              </a:spcBef>
-              <a:spcAft>
-                <a:spcPts val="0"/>
-              </a:spcAft>
-              <a:buNone/>
-            </a:pPr>
-            <a:endParaRPr/>
-          </a:p>
-        </p:txBody>
-      </p:sp>
-    </p:spTree>
-    <p:extLst>
-      <p:ext uri="{BB962C8B-B14F-4D97-AF65-F5344CB8AC3E}">
-        <p14:creationId xmlns:p14="http://schemas.microsoft.com/office/powerpoint/2010/main" val="3962899224"/>
-      </p:ext>
-    </p:extLst>
-  </p:cSld>
-  <p:clrMapOvr>
-    <a:masterClrMapping/>
-  </p:clrMapOvr>
-</p:notes>
-</file>
-
-<file path=ppt/notesSlides/notesSlide8.xml><?xml version="1.0" encoding="utf-8"?>
 <p:notes xmlns:a="http://schemas.openxmlformats.org/drawingml/2006/main" xmlns:r="http://schemas.openxmlformats.org/officeDocument/2006/relationships" xmlns:p="http://schemas.openxmlformats.org/presentationml/2006/main" showMasterSp="0" showMasterPhAnim="0">
   <p:cSld>
     <p:spTree>
@@ -1322,14 +1235,14 @@
               </a:spcAft>
               <a:buNone/>
             </a:pPr>
-            <a:endParaRPr/>
+            <a:endParaRPr dirty="0"/>
           </a:p>
         </p:txBody>
       </p:sp>
     </p:spTree>
     <p:extLst>
       <p:ext uri="{BB962C8B-B14F-4D97-AF65-F5344CB8AC3E}">
-        <p14:creationId xmlns:p14="http://schemas.microsoft.com/office/powerpoint/2010/main" val="341699332"/>
+        <p14:creationId xmlns:p14="http://schemas.microsoft.com/office/powerpoint/2010/main" val="2703587627"/>
       </p:ext>
     </p:extLst>
   </p:cSld>
@@ -1470,9 +1383,9 @@
           <a:p>
             <a:fld id="{43AFDEA8-A3CC-4A76-B93F-4E251158CF21}" type="datetimeFigureOut">
               <a:rPr lang="ru-RU" smtClean="0"/>
-              <a:t>29.07.2026</a:t>
+              <a:t>27.08.2026</a:t>
             </a:fld>
-            <a:endParaRPr lang="ru-RU"/>
+            <a:endParaRPr lang="ru-RU" dirty="0"/>
           </a:p>
         </p:txBody>
       </p:sp>
@@ -1491,7 +1404,7 @@
           <a:bodyPr/>
           <a:lstStyle/>
           <a:p>
-            <a:endParaRPr lang="ru-RU"/>
+            <a:endParaRPr lang="ru-RU" dirty="0"/>
           </a:p>
         </p:txBody>
       </p:sp>
@@ -1514,7 +1427,7 @@
               <a:rPr lang="ru-RU" smtClean="0"/>
               <a:t>‹#›</a:t>
             </a:fld>
-            <a:endParaRPr lang="ru-RU"/>
+            <a:endParaRPr lang="ru-RU" dirty="0"/>
           </a:p>
         </p:txBody>
       </p:sp>
@@ -1640,9 +1553,9 @@
           <a:p>
             <a:fld id="{43AFDEA8-A3CC-4A76-B93F-4E251158CF21}" type="datetimeFigureOut">
               <a:rPr lang="ru-RU" smtClean="0"/>
-              <a:t>29.07.2026</a:t>
+              <a:t>27.08.2026</a:t>
             </a:fld>
-            <a:endParaRPr lang="ru-RU"/>
+            <a:endParaRPr lang="ru-RU" dirty="0"/>
           </a:p>
         </p:txBody>
       </p:sp>
@@ -1661,7 +1574,7 @@
           <a:bodyPr/>
           <a:lstStyle/>
           <a:p>
-            <a:endParaRPr lang="ru-RU"/>
+            <a:endParaRPr lang="ru-RU" dirty="0"/>
           </a:p>
         </p:txBody>
       </p:sp>
@@ -1684,7 +1597,7 @@
               <a:rPr lang="ru-RU" smtClean="0"/>
               <a:t>‹#›</a:t>
             </a:fld>
-            <a:endParaRPr lang="ru-RU"/>
+            <a:endParaRPr lang="ru-RU" dirty="0"/>
           </a:p>
         </p:txBody>
       </p:sp>
@@ -1820,9 +1733,9 @@
           <a:p>
             <a:fld id="{43AFDEA8-A3CC-4A76-B93F-4E251158CF21}" type="datetimeFigureOut">
               <a:rPr lang="ru-RU" smtClean="0"/>
-              <a:t>29.07.2026</a:t>
+              <a:t>27.08.2026</a:t>
             </a:fld>
-            <a:endParaRPr lang="ru-RU"/>
+            <a:endParaRPr lang="ru-RU" dirty="0"/>
           </a:p>
         </p:txBody>
       </p:sp>
@@ -1841,7 +1754,7 @@
           <a:bodyPr/>
           <a:lstStyle/>
           <a:p>
-            <a:endParaRPr lang="ru-RU"/>
+            <a:endParaRPr lang="ru-RU" dirty="0"/>
           </a:p>
         </p:txBody>
       </p:sp>
@@ -1864,7 +1777,7 @@
               <a:rPr lang="ru-RU" smtClean="0"/>
               <a:t>‹#›</a:t>
             </a:fld>
-            <a:endParaRPr lang="ru-RU"/>
+            <a:endParaRPr lang="ru-RU" dirty="0"/>
           </a:p>
         </p:txBody>
       </p:sp>
@@ -3882,9 +3795,9 @@
           <a:p>
             <a:fld id="{43AFDEA8-A3CC-4A76-B93F-4E251158CF21}" type="datetimeFigureOut">
               <a:rPr lang="ru-RU" smtClean="0"/>
-              <a:t>29.07.2026</a:t>
+              <a:t>27.08.2026</a:t>
             </a:fld>
-            <a:endParaRPr lang="ru-RU"/>
+            <a:endParaRPr lang="ru-RU" dirty="0"/>
           </a:p>
         </p:txBody>
       </p:sp>
@@ -3903,7 +3816,7 @@
           <a:bodyPr/>
           <a:lstStyle/>
           <a:p>
-            <a:endParaRPr lang="ru-RU"/>
+            <a:endParaRPr lang="ru-RU" dirty="0"/>
           </a:p>
         </p:txBody>
       </p:sp>
@@ -3926,7 +3839,7 @@
               <a:rPr lang="ru-RU" smtClean="0"/>
               <a:t>‹#›</a:t>
             </a:fld>
-            <a:endParaRPr lang="ru-RU"/>
+            <a:endParaRPr lang="ru-RU" dirty="0"/>
           </a:p>
         </p:txBody>
       </p:sp>
@@ -4128,9 +4041,9 @@
           <a:p>
             <a:fld id="{43AFDEA8-A3CC-4A76-B93F-4E251158CF21}" type="datetimeFigureOut">
               <a:rPr lang="ru-RU" smtClean="0"/>
-              <a:t>29.07.2026</a:t>
+              <a:t>27.08.2026</a:t>
             </a:fld>
-            <a:endParaRPr lang="ru-RU"/>
+            <a:endParaRPr lang="ru-RU" dirty="0"/>
           </a:p>
         </p:txBody>
       </p:sp>
@@ -4149,7 +4062,7 @@
           <a:bodyPr/>
           <a:lstStyle/>
           <a:p>
-            <a:endParaRPr lang="ru-RU"/>
+            <a:endParaRPr lang="ru-RU" dirty="0"/>
           </a:p>
         </p:txBody>
       </p:sp>
@@ -4172,7 +4085,7 @@
               <a:rPr lang="ru-RU" smtClean="0"/>
               <a:t>‹#›</a:t>
             </a:fld>
-            <a:endParaRPr lang="ru-RU"/>
+            <a:endParaRPr lang="ru-RU" dirty="0"/>
           </a:p>
         </p:txBody>
       </p:sp>
@@ -4360,9 +4273,9 @@
           <a:p>
             <a:fld id="{43AFDEA8-A3CC-4A76-B93F-4E251158CF21}" type="datetimeFigureOut">
               <a:rPr lang="ru-RU" smtClean="0"/>
-              <a:t>29.07.2026</a:t>
+              <a:t>27.08.2026</a:t>
             </a:fld>
-            <a:endParaRPr lang="ru-RU"/>
+            <a:endParaRPr lang="ru-RU" dirty="0"/>
           </a:p>
         </p:txBody>
       </p:sp>
@@ -4381,7 +4294,7 @@
           <a:bodyPr/>
           <a:lstStyle/>
           <a:p>
-            <a:endParaRPr lang="ru-RU"/>
+            <a:endParaRPr lang="ru-RU" dirty="0"/>
           </a:p>
         </p:txBody>
       </p:sp>
@@ -4404,7 +4317,7 @@
               <a:rPr lang="ru-RU" smtClean="0"/>
               <a:t>‹#›</a:t>
             </a:fld>
-            <a:endParaRPr lang="ru-RU"/>
+            <a:endParaRPr lang="ru-RU" dirty="0"/>
           </a:p>
         </p:txBody>
       </p:sp>
@@ -4727,9 +4640,9 @@
           <a:p>
             <a:fld id="{43AFDEA8-A3CC-4A76-B93F-4E251158CF21}" type="datetimeFigureOut">
               <a:rPr lang="ru-RU" smtClean="0"/>
-              <a:t>29.07.2026</a:t>
+              <a:t>27.08.2026</a:t>
             </a:fld>
-            <a:endParaRPr lang="ru-RU"/>
+            <a:endParaRPr lang="ru-RU" dirty="0"/>
           </a:p>
         </p:txBody>
       </p:sp>
@@ -4748,7 +4661,7 @@
           <a:bodyPr/>
           <a:lstStyle/>
           <a:p>
-            <a:endParaRPr lang="ru-RU"/>
+            <a:endParaRPr lang="ru-RU" dirty="0"/>
           </a:p>
         </p:txBody>
       </p:sp>
@@ -4771,7 +4684,7 @@
               <a:rPr lang="ru-RU" smtClean="0"/>
               <a:t>‹#›</a:t>
             </a:fld>
-            <a:endParaRPr lang="ru-RU"/>
+            <a:endParaRPr lang="ru-RU" dirty="0"/>
           </a:p>
         </p:txBody>
       </p:sp>
@@ -4845,9 +4758,9 @@
           <a:p>
             <a:fld id="{43AFDEA8-A3CC-4A76-B93F-4E251158CF21}" type="datetimeFigureOut">
               <a:rPr lang="ru-RU" smtClean="0"/>
-              <a:t>29.07.2026</a:t>
+              <a:t>27.08.2026</a:t>
             </a:fld>
-            <a:endParaRPr lang="ru-RU"/>
+            <a:endParaRPr lang="ru-RU" dirty="0"/>
           </a:p>
         </p:txBody>
       </p:sp>
@@ -4866,7 +4779,7 @@
           <a:bodyPr/>
           <a:lstStyle/>
           <a:p>
-            <a:endParaRPr lang="ru-RU"/>
+            <a:endParaRPr lang="ru-RU" dirty="0"/>
           </a:p>
         </p:txBody>
       </p:sp>
@@ -4889,7 +4802,7 @@
               <a:rPr lang="ru-RU" smtClean="0"/>
               <a:t>‹#›</a:t>
             </a:fld>
-            <a:endParaRPr lang="ru-RU"/>
+            <a:endParaRPr lang="ru-RU" dirty="0"/>
           </a:p>
         </p:txBody>
       </p:sp>
@@ -4940,9 +4853,9 @@
           <a:p>
             <a:fld id="{43AFDEA8-A3CC-4A76-B93F-4E251158CF21}" type="datetimeFigureOut">
               <a:rPr lang="ru-RU" smtClean="0"/>
-              <a:t>29.07.2026</a:t>
+              <a:t>27.08.2026</a:t>
             </a:fld>
-            <a:endParaRPr lang="ru-RU"/>
+            <a:endParaRPr lang="ru-RU" dirty="0"/>
           </a:p>
         </p:txBody>
       </p:sp>
@@ -4961,7 +4874,7 @@
           <a:bodyPr/>
           <a:lstStyle/>
           <a:p>
-            <a:endParaRPr lang="ru-RU"/>
+            <a:endParaRPr lang="ru-RU" dirty="0"/>
           </a:p>
         </p:txBody>
       </p:sp>
@@ -4984,7 +4897,7 @@
               <a:rPr lang="ru-RU" smtClean="0"/>
               <a:t>‹#›</a:t>
             </a:fld>
-            <a:endParaRPr lang="ru-RU"/>
+            <a:endParaRPr lang="ru-RU" dirty="0"/>
           </a:p>
         </p:txBody>
       </p:sp>
@@ -5217,9 +5130,9 @@
           <a:p>
             <a:fld id="{43AFDEA8-A3CC-4A76-B93F-4E251158CF21}" type="datetimeFigureOut">
               <a:rPr lang="ru-RU" smtClean="0"/>
-              <a:t>29.07.2026</a:t>
+              <a:t>27.08.2026</a:t>
             </a:fld>
-            <a:endParaRPr lang="ru-RU"/>
+            <a:endParaRPr lang="ru-RU" dirty="0"/>
           </a:p>
         </p:txBody>
       </p:sp>
@@ -5238,7 +5151,7 @@
           <a:bodyPr/>
           <a:lstStyle/>
           <a:p>
-            <a:endParaRPr lang="ru-RU"/>
+            <a:endParaRPr lang="ru-RU" dirty="0"/>
           </a:p>
         </p:txBody>
       </p:sp>
@@ -5261,7 +5174,7 @@
               <a:rPr lang="ru-RU" smtClean="0"/>
               <a:t>‹#›</a:t>
             </a:fld>
-            <a:endParaRPr lang="ru-RU"/>
+            <a:endParaRPr lang="ru-RU" dirty="0"/>
           </a:p>
         </p:txBody>
       </p:sp>
@@ -5384,7 +5297,7 @@
             </a:lvl9pPr>
           </a:lstStyle>
           <a:p>
-            <a:endParaRPr lang="ru-RU"/>
+            <a:endParaRPr lang="ru-RU" dirty="0"/>
           </a:p>
         </p:txBody>
       </p:sp>
@@ -5470,9 +5383,9 @@
           <a:p>
             <a:fld id="{43AFDEA8-A3CC-4A76-B93F-4E251158CF21}" type="datetimeFigureOut">
               <a:rPr lang="ru-RU" smtClean="0"/>
-              <a:t>29.07.2026</a:t>
+              <a:t>27.08.2026</a:t>
             </a:fld>
-            <a:endParaRPr lang="ru-RU"/>
+            <a:endParaRPr lang="ru-RU" dirty="0"/>
           </a:p>
         </p:txBody>
       </p:sp>
@@ -5491,7 +5404,7 @@
           <a:bodyPr/>
           <a:lstStyle/>
           <a:p>
-            <a:endParaRPr lang="ru-RU"/>
+            <a:endParaRPr lang="ru-RU" dirty="0"/>
           </a:p>
         </p:txBody>
       </p:sp>
@@ -5514,7 +5427,7 @@
               <a:rPr lang="ru-RU" smtClean="0"/>
               <a:t>‹#›</a:t>
             </a:fld>
-            <a:endParaRPr lang="ru-RU"/>
+            <a:endParaRPr lang="ru-RU" dirty="0"/>
           </a:p>
         </p:txBody>
       </p:sp>
@@ -5683,9 +5596,9 @@
           <a:p>
             <a:fld id="{43AFDEA8-A3CC-4A76-B93F-4E251158CF21}" type="datetimeFigureOut">
               <a:rPr lang="ru-RU" smtClean="0"/>
-              <a:t>29.07.2026</a:t>
+              <a:t>27.08.2026</a:t>
             </a:fld>
-            <a:endParaRPr lang="ru-RU"/>
+            <a:endParaRPr lang="ru-RU" dirty="0"/>
           </a:p>
         </p:txBody>
       </p:sp>
@@ -5722,7 +5635,7 @@
             </a:lvl1pPr>
           </a:lstStyle>
           <a:p>
-            <a:endParaRPr lang="ru-RU"/>
+            <a:endParaRPr lang="ru-RU" dirty="0"/>
           </a:p>
         </p:txBody>
       </p:sp>
@@ -5763,7 +5676,7 @@
               <a:rPr lang="ru-RU" smtClean="0"/>
               <a:t>‹#›</a:t>
             </a:fld>
-            <a:endParaRPr lang="ru-RU"/>
+            <a:endParaRPr lang="ru-RU" dirty="0"/>
           </a:p>
         </p:txBody>
       </p:sp>
@@ -6266,7 +6179,7 @@
           <a:lstStyle/>
           <a:p>
             <a:pPr algn="ctr"/>
-            <a:endParaRPr sz="2400">
+            <a:endParaRPr sz="2400" dirty="0">
               <a:latin typeface="Roboto"/>
               <a:ea typeface="Roboto"/>
               <a:cs typeface="Roboto"/>
@@ -6365,6 +6278,2811 @@
   <p:clrMapOvr>
     <a:masterClrMapping/>
   </p:clrMapOvr>
+  <p:timing>
+    <p:tnLst>
+      <p:par>
+        <p:cTn id="1" dur="indefinite" restart="never" nodeType="tmRoot"/>
+      </p:par>
+    </p:tnLst>
+  </p:timing>
+</p:sld>
+</file>
+
+<file path=ppt/slides/slide10.xml><?xml version="1.0" encoding="utf-8"?>
+<p:sld xmlns:a="http://schemas.openxmlformats.org/drawingml/2006/main" xmlns:r="http://schemas.openxmlformats.org/officeDocument/2006/relationships" xmlns:p="http://schemas.openxmlformats.org/presentationml/2006/main">
+  <p:cSld>
+    <p:spTree>
+      <p:nvGrpSpPr>
+        <p:cNvPr id="1" name=""/>
+        <p:cNvGrpSpPr/>
+        <p:nvPr/>
+      </p:nvGrpSpPr>
+      <p:grpSpPr>
+        <a:xfrm>
+          <a:off x="0" y="0"/>
+          <a:ext cx="0" cy="0"/>
+          <a:chOff x="0" y="0"/>
+          <a:chExt cx="0" cy="0"/>
+        </a:xfrm>
+      </p:grpSpPr>
+      <p:sp>
+        <p:nvSpPr>
+          <p:cNvPr id="2" name="Заголовок 1"/>
+          <p:cNvSpPr>
+            <a:spLocks noGrp="1"/>
+          </p:cNvSpPr>
+          <p:nvPr>
+            <p:ph type="title"/>
+          </p:nvPr>
+        </p:nvSpPr>
+        <p:spPr/>
+        <p:txBody>
+          <a:bodyPr/>
+          <a:lstStyle/>
+          <a:p>
+            <a:r>
+              <a:rPr lang="en-US" sz="2800" b="1" dirty="0" err="1">
+                <a:latin typeface="Roboto" panose="020B0604020202020204"/>
+              </a:rPr>
+              <a:t>Vlan</a:t>
+            </a:r>
+            <a:r>
+              <a:rPr lang="ru-RU" sz="2800" dirty="0">
+                <a:latin typeface="Roboto" panose="020B0604020202020204"/>
+              </a:rPr>
+              <a:t> </a:t>
+            </a:r>
+            <a:r>
+              <a:rPr lang="ru-RU" sz="2800" dirty="0" smtClean="0">
+                <a:latin typeface="Roboto" panose="020B0604020202020204"/>
+              </a:rPr>
+              <a:t>–</a:t>
+            </a:r>
+            <a:r>
+              <a:rPr lang="en-US" sz="2800" dirty="0" smtClean="0">
+                <a:latin typeface="Roboto" panose="020B0604020202020204"/>
+              </a:rPr>
+              <a:t> </a:t>
+            </a:r>
+            <a:r>
+              <a:rPr lang="ru-RU" sz="2800" dirty="0" smtClean="0">
+                <a:latin typeface="Roboto" panose="020B0604020202020204"/>
+              </a:rPr>
+              <a:t>реализация «</a:t>
+            </a:r>
+            <a:r>
+              <a:rPr lang="ru-RU" sz="2800" b="1" dirty="0" smtClean="0">
+                <a:latin typeface="Roboto" panose="020B0604020202020204"/>
+              </a:rPr>
+              <a:t>Роутер на палочке</a:t>
+            </a:r>
+            <a:r>
+              <a:rPr lang="ru-RU" sz="2800" dirty="0" smtClean="0">
+                <a:latin typeface="Roboto" panose="020B0604020202020204"/>
+              </a:rPr>
+              <a:t>»</a:t>
+            </a:r>
+            <a:endParaRPr lang="ru-RU" sz="2800" dirty="0"/>
+          </a:p>
+        </p:txBody>
+      </p:sp>
+      <p:sp>
+        <p:nvSpPr>
+          <p:cNvPr id="3" name="Текст 2"/>
+          <p:cNvSpPr>
+            <a:spLocks noGrp="1"/>
+          </p:cNvSpPr>
+          <p:nvPr>
+            <p:ph type="body" idx="1"/>
+          </p:nvPr>
+        </p:nvSpPr>
+        <p:spPr/>
+        <p:txBody>
+          <a:bodyPr>
+            <a:normAutofit/>
+          </a:bodyPr>
+          <a:lstStyle/>
+          <a:p>
+            <a:pPr marL="177796" indent="0">
+              <a:lnSpc>
+                <a:spcPct val="113000"/>
+              </a:lnSpc>
+              <a:spcBef>
+                <a:spcPts val="0"/>
+              </a:spcBef>
+              <a:buSzPts val="3100"/>
+              <a:buNone/>
+            </a:pPr>
+            <a:r>
+              <a:rPr lang="ru-RU" sz="2100" b="1" dirty="0">
+                <a:solidFill>
+                  <a:srgbClr val="3F299A"/>
+                </a:solidFill>
+                <a:latin typeface="Roboto"/>
+                <a:ea typeface="Roboto"/>
+                <a:cs typeface="Roboto"/>
+              </a:rPr>
+              <a:t>1. </a:t>
+            </a:r>
+            <a:r>
+              <a:rPr lang="ru-RU" sz="1400" dirty="0" smtClean="0">
+                <a:latin typeface="Roboto" panose="020B0604020202020204"/>
+                <a:ea typeface="+mj-ea"/>
+                <a:cs typeface="+mj-cs"/>
+              </a:rPr>
+              <a:t>Реализация взаимодействия сетей между собой</a:t>
+            </a:r>
+            <a:endParaRPr lang="ru-RU" sz="1400" dirty="0">
+              <a:latin typeface="Roboto" panose="020B0604020202020204"/>
+              <a:ea typeface="+mj-ea"/>
+              <a:cs typeface="+mj-cs"/>
+            </a:endParaRPr>
+          </a:p>
+          <a:p>
+            <a:pPr marL="177796" indent="0">
+              <a:lnSpc>
+                <a:spcPct val="114000"/>
+              </a:lnSpc>
+              <a:spcBef>
+                <a:spcPts val="0"/>
+              </a:spcBef>
+              <a:buSzPts val="3100"/>
+              <a:buNone/>
+            </a:pPr>
+            <a:r>
+              <a:rPr lang="ru-RU" sz="2100" b="1" dirty="0">
+                <a:solidFill>
+                  <a:srgbClr val="3F299A"/>
+                </a:solidFill>
+                <a:latin typeface="Roboto"/>
+                <a:ea typeface="Roboto"/>
+                <a:cs typeface="Roboto"/>
+              </a:rPr>
+              <a:t>2. </a:t>
+            </a:r>
+            <a:r>
+              <a:rPr lang="ru-RU" sz="1400" dirty="0" err="1" smtClean="0">
+                <a:latin typeface="Roboto" panose="020B0604020202020204"/>
+                <a:ea typeface="+mj-ea"/>
+                <a:cs typeface="+mj-cs"/>
+              </a:rPr>
+              <a:t>Энкапсуляция</a:t>
+            </a:r>
+            <a:r>
+              <a:rPr lang="ru-RU" sz="1400" dirty="0" smtClean="0">
+                <a:latin typeface="Roboto" panose="020B0604020202020204"/>
+                <a:ea typeface="+mj-ea"/>
+                <a:cs typeface="+mj-cs"/>
+              </a:rPr>
+              <a:t> (номер </a:t>
+            </a:r>
+            <a:r>
+              <a:rPr lang="en-US" sz="1400" dirty="0" err="1" smtClean="0">
+                <a:latin typeface="Roboto" panose="020B0604020202020204"/>
+                <a:ea typeface="+mj-ea"/>
+                <a:cs typeface="+mj-cs"/>
+              </a:rPr>
+              <a:t>vlan</a:t>
+            </a:r>
+            <a:r>
+              <a:rPr lang="ru-RU" sz="1400" dirty="0" smtClean="0">
+                <a:latin typeface="Roboto" panose="020B0604020202020204"/>
+                <a:ea typeface="+mj-ea"/>
+                <a:cs typeface="+mj-cs"/>
+              </a:rPr>
+              <a:t>)</a:t>
+            </a:r>
+            <a:endParaRPr lang="ru-RU" sz="1400" dirty="0">
+              <a:latin typeface="Roboto" panose="020B0604020202020204"/>
+              <a:ea typeface="+mj-ea"/>
+              <a:cs typeface="+mj-cs"/>
+            </a:endParaRPr>
+          </a:p>
+          <a:p>
+            <a:pPr marL="177796" indent="0">
+              <a:lnSpc>
+                <a:spcPct val="114000"/>
+              </a:lnSpc>
+              <a:spcBef>
+                <a:spcPts val="0"/>
+              </a:spcBef>
+              <a:buSzPts val="3100"/>
+              <a:buNone/>
+            </a:pPr>
+            <a:r>
+              <a:rPr lang="ru-RU" sz="2100" b="1" dirty="0">
+                <a:solidFill>
+                  <a:srgbClr val="3F299A"/>
+                </a:solidFill>
+                <a:latin typeface="Roboto"/>
+                <a:ea typeface="Roboto"/>
+                <a:cs typeface="Roboto"/>
+              </a:rPr>
+              <a:t>3. </a:t>
+            </a:r>
+            <a:r>
+              <a:rPr lang="en-US" sz="1400" dirty="0" smtClean="0">
+                <a:latin typeface="Roboto" panose="020B0604020202020204"/>
+                <a:ea typeface="+mj-ea"/>
+                <a:cs typeface="+mj-cs"/>
+              </a:rPr>
+              <a:t>Native </a:t>
+            </a:r>
+            <a:r>
+              <a:rPr lang="en-US" sz="1400" dirty="0" err="1" smtClean="0">
+                <a:latin typeface="Roboto" panose="020B0604020202020204"/>
+                <a:ea typeface="+mj-ea"/>
+                <a:cs typeface="+mj-cs"/>
+              </a:rPr>
+              <a:t>vlan</a:t>
+            </a:r>
+            <a:r>
+              <a:rPr lang="en-US" sz="1400" dirty="0" smtClean="0">
+                <a:latin typeface="Roboto" panose="020B0604020202020204"/>
+                <a:ea typeface="+mj-ea"/>
+                <a:cs typeface="+mj-cs"/>
+              </a:rPr>
+              <a:t> 1000</a:t>
+            </a:r>
+            <a:endParaRPr lang="ru-RU" sz="1400" dirty="0">
+              <a:latin typeface="Roboto" panose="020B0604020202020204"/>
+              <a:ea typeface="+mj-ea"/>
+              <a:cs typeface="+mj-cs"/>
+            </a:endParaRPr>
+          </a:p>
+        </p:txBody>
+      </p:sp>
+      <p:pic>
+        <p:nvPicPr>
+          <p:cNvPr id="4" name="Рисунок 3"/>
+          <p:cNvPicPr>
+            <a:picLocks noChangeAspect="1"/>
+          </p:cNvPicPr>
+          <p:nvPr/>
+        </p:nvPicPr>
+        <p:blipFill>
+          <a:blip r:embed="rId2"/>
+          <a:stretch>
+            <a:fillRect/>
+          </a:stretch>
+        </p:blipFill>
+        <p:spPr>
+          <a:xfrm>
+            <a:off x="5974080" y="1901959"/>
+            <a:ext cx="5660979" cy="3248025"/>
+          </a:xfrm>
+          <a:prstGeom prst="rect">
+            <a:avLst/>
+          </a:prstGeom>
+        </p:spPr>
+      </p:pic>
+    </p:spTree>
+    <p:extLst>
+      <p:ext uri="{BB962C8B-B14F-4D97-AF65-F5344CB8AC3E}">
+        <p14:creationId xmlns:p14="http://schemas.microsoft.com/office/powerpoint/2010/main" val="2524403448"/>
+      </p:ext>
+    </p:extLst>
+  </p:cSld>
+  <p:clrMapOvr>
+    <a:masterClrMapping/>
+  </p:clrMapOvr>
+  <p:timing>
+    <p:tnLst>
+      <p:par>
+        <p:cTn id="1" dur="indefinite" restart="never" nodeType="tmRoot"/>
+      </p:par>
+    </p:tnLst>
+  </p:timing>
+</p:sld>
+</file>
+
+<file path=ppt/slides/slide11.xml><?xml version="1.0" encoding="utf-8"?>
+<p:sld xmlns:a="http://schemas.openxmlformats.org/drawingml/2006/main" xmlns:r="http://schemas.openxmlformats.org/officeDocument/2006/relationships" xmlns:p="http://schemas.openxmlformats.org/presentationml/2006/main">
+  <p:cSld>
+    <p:spTree>
+      <p:nvGrpSpPr>
+        <p:cNvPr id="1" name=""/>
+        <p:cNvGrpSpPr/>
+        <p:nvPr/>
+      </p:nvGrpSpPr>
+      <p:grpSpPr>
+        <a:xfrm>
+          <a:off x="0" y="0"/>
+          <a:ext cx="0" cy="0"/>
+          <a:chOff x="0" y="0"/>
+          <a:chExt cx="0" cy="0"/>
+        </a:xfrm>
+      </p:grpSpPr>
+      <p:sp>
+        <p:nvSpPr>
+          <p:cNvPr id="2" name="Заголовок 1"/>
+          <p:cNvSpPr>
+            <a:spLocks noGrp="1"/>
+          </p:cNvSpPr>
+          <p:nvPr>
+            <p:ph type="title"/>
+          </p:nvPr>
+        </p:nvSpPr>
+        <p:spPr/>
+        <p:txBody>
+          <a:bodyPr/>
+          <a:lstStyle/>
+          <a:p>
+            <a:r>
+              <a:rPr lang="en-US" sz="2800" b="1" dirty="0" smtClean="0">
+                <a:latin typeface="Roboto" panose="020B0604020202020204"/>
+              </a:rPr>
+              <a:t>STP</a:t>
+            </a:r>
+            <a:r>
+              <a:rPr lang="ru-RU" sz="2800" b="1" dirty="0" smtClean="0">
+                <a:latin typeface="Roboto" panose="020B0604020202020204"/>
+              </a:rPr>
+              <a:t> </a:t>
+            </a:r>
+            <a:r>
+              <a:rPr lang="ru-RU" sz="2800" dirty="0" smtClean="0">
+                <a:latin typeface="Roboto" panose="020B0604020202020204"/>
+              </a:rPr>
+              <a:t>– протокол связующего дерева</a:t>
+            </a:r>
+            <a:endParaRPr lang="ru-RU" sz="2800" dirty="0"/>
+          </a:p>
+        </p:txBody>
+      </p:sp>
+      <p:sp>
+        <p:nvSpPr>
+          <p:cNvPr id="3" name="Текст 2"/>
+          <p:cNvSpPr>
+            <a:spLocks noGrp="1"/>
+          </p:cNvSpPr>
+          <p:nvPr>
+            <p:ph type="body" idx="1"/>
+          </p:nvPr>
+        </p:nvSpPr>
+        <p:spPr/>
+        <p:txBody>
+          <a:bodyPr>
+            <a:normAutofit/>
+          </a:bodyPr>
+          <a:lstStyle/>
+          <a:p>
+            <a:pPr marL="177796" indent="0">
+              <a:lnSpc>
+                <a:spcPct val="113000"/>
+              </a:lnSpc>
+              <a:spcBef>
+                <a:spcPts val="0"/>
+              </a:spcBef>
+              <a:buSzPts val="3100"/>
+              <a:buNone/>
+            </a:pPr>
+            <a:r>
+              <a:rPr lang="ru-RU" sz="2100" b="1" dirty="0">
+                <a:solidFill>
+                  <a:srgbClr val="3F299A"/>
+                </a:solidFill>
+                <a:latin typeface="Roboto"/>
+                <a:ea typeface="Roboto"/>
+                <a:cs typeface="Roboto"/>
+              </a:rPr>
+              <a:t>1. </a:t>
+            </a:r>
+            <a:r>
+              <a:rPr lang="ru-RU" sz="1400" dirty="0">
+                <a:latin typeface="Roboto" panose="020B0604020202020204"/>
+                <a:ea typeface="+mj-ea"/>
+                <a:cs typeface="+mj-cs"/>
+              </a:rPr>
+              <a:t>Защита от петель</a:t>
+            </a:r>
+          </a:p>
+          <a:p>
+            <a:pPr marL="177796" indent="0">
+              <a:lnSpc>
+                <a:spcPct val="114000"/>
+              </a:lnSpc>
+              <a:spcBef>
+                <a:spcPts val="0"/>
+              </a:spcBef>
+              <a:buSzPts val="3100"/>
+              <a:buNone/>
+            </a:pPr>
+            <a:r>
+              <a:rPr lang="ru-RU" sz="2100" b="1" dirty="0">
+                <a:solidFill>
+                  <a:srgbClr val="3F299A"/>
+                </a:solidFill>
+                <a:latin typeface="Roboto"/>
+                <a:ea typeface="Roboto"/>
+                <a:cs typeface="Roboto"/>
+              </a:rPr>
+              <a:t>2. </a:t>
+            </a:r>
+            <a:r>
+              <a:rPr lang="ru-RU" sz="1400" dirty="0">
+                <a:latin typeface="Roboto" panose="020B0604020202020204"/>
+                <a:ea typeface="+mj-ea"/>
+                <a:cs typeface="+mj-cs"/>
+              </a:rPr>
+              <a:t>Резервирование путей (каналов) между устройствами</a:t>
+            </a:r>
+          </a:p>
+          <a:p>
+            <a:pPr marL="177796" indent="0">
+              <a:lnSpc>
+                <a:spcPct val="114000"/>
+              </a:lnSpc>
+              <a:spcBef>
+                <a:spcPts val="0"/>
+              </a:spcBef>
+              <a:buSzPts val="3100"/>
+              <a:buNone/>
+            </a:pPr>
+            <a:r>
+              <a:rPr lang="ru-RU" sz="2100" b="1" dirty="0">
+                <a:solidFill>
+                  <a:srgbClr val="3F299A"/>
+                </a:solidFill>
+                <a:latin typeface="Roboto"/>
+                <a:ea typeface="Roboto"/>
+                <a:cs typeface="Roboto"/>
+              </a:rPr>
+              <a:t>3. </a:t>
+            </a:r>
+            <a:r>
+              <a:rPr lang="ru-RU" sz="1400" dirty="0" smtClean="0">
+                <a:latin typeface="Roboto" panose="020B0604020202020204"/>
+                <a:ea typeface="+mj-ea"/>
+                <a:cs typeface="+mj-cs"/>
+              </a:rPr>
+              <a:t>Отказоустойчивость</a:t>
+            </a:r>
+            <a:endParaRPr lang="ru-RU" sz="1400" dirty="0">
+              <a:latin typeface="Roboto" panose="020B0604020202020204"/>
+              <a:ea typeface="+mj-ea"/>
+              <a:cs typeface="+mj-cs"/>
+            </a:endParaRPr>
+          </a:p>
+        </p:txBody>
+      </p:sp>
+    </p:spTree>
+    <p:extLst>
+      <p:ext uri="{BB962C8B-B14F-4D97-AF65-F5344CB8AC3E}">
+        <p14:creationId xmlns:p14="http://schemas.microsoft.com/office/powerpoint/2010/main" val="1748062138"/>
+      </p:ext>
+    </p:extLst>
+  </p:cSld>
+  <p:clrMapOvr>
+    <a:masterClrMapping/>
+  </p:clrMapOvr>
+  <p:timing>
+    <p:tnLst>
+      <p:par>
+        <p:cTn id="1" dur="indefinite" restart="never" nodeType="tmRoot"/>
+      </p:par>
+    </p:tnLst>
+  </p:timing>
+</p:sld>
+</file>
+
+<file path=ppt/slides/slide12.xml><?xml version="1.0" encoding="utf-8"?>
+<p:sld xmlns:a="http://schemas.openxmlformats.org/drawingml/2006/main" xmlns:r="http://schemas.openxmlformats.org/officeDocument/2006/relationships" xmlns:p="http://schemas.openxmlformats.org/presentationml/2006/main">
+  <p:cSld>
+    <p:spTree>
+      <p:nvGrpSpPr>
+        <p:cNvPr id="1" name=""/>
+        <p:cNvGrpSpPr/>
+        <p:nvPr/>
+      </p:nvGrpSpPr>
+      <p:grpSpPr>
+        <a:xfrm>
+          <a:off x="0" y="0"/>
+          <a:ext cx="0" cy="0"/>
+          <a:chOff x="0" y="0"/>
+          <a:chExt cx="0" cy="0"/>
+        </a:xfrm>
+      </p:grpSpPr>
+      <p:sp>
+        <p:nvSpPr>
+          <p:cNvPr id="2" name="Заголовок 1"/>
+          <p:cNvSpPr>
+            <a:spLocks noGrp="1"/>
+          </p:cNvSpPr>
+          <p:nvPr>
+            <p:ph type="title"/>
+          </p:nvPr>
+        </p:nvSpPr>
+        <p:spPr/>
+        <p:txBody>
+          <a:bodyPr/>
+          <a:lstStyle/>
+          <a:p>
+            <a:r>
+              <a:rPr lang="en-US" sz="2800" b="1" dirty="0" smtClean="0">
+                <a:latin typeface="Roboto" panose="020B0604020202020204"/>
+              </a:rPr>
+              <a:t>STP</a:t>
+            </a:r>
+            <a:r>
+              <a:rPr lang="ru-RU" sz="2800" dirty="0" smtClean="0">
+                <a:latin typeface="Roboto" panose="020B0604020202020204"/>
+              </a:rPr>
+              <a:t> реализация</a:t>
+            </a:r>
+            <a:endParaRPr lang="ru-RU" sz="2800" dirty="0"/>
+          </a:p>
+        </p:txBody>
+      </p:sp>
+      <p:pic>
+        <p:nvPicPr>
+          <p:cNvPr id="4" name="Рисунок 3"/>
+          <p:cNvPicPr>
+            <a:picLocks noChangeAspect="1"/>
+          </p:cNvPicPr>
+          <p:nvPr/>
+        </p:nvPicPr>
+        <p:blipFill>
+          <a:blip r:embed="rId2"/>
+          <a:stretch>
+            <a:fillRect/>
+          </a:stretch>
+        </p:blipFill>
+        <p:spPr>
+          <a:xfrm>
+            <a:off x="5355771" y="1901959"/>
+            <a:ext cx="5947956" cy="4555200"/>
+          </a:xfrm>
+          <a:prstGeom prst="rect">
+            <a:avLst/>
+          </a:prstGeom>
+        </p:spPr>
+      </p:pic>
+      <p:sp>
+        <p:nvSpPr>
+          <p:cNvPr id="3" name="Текст 2"/>
+          <p:cNvSpPr>
+            <a:spLocks noGrp="1"/>
+          </p:cNvSpPr>
+          <p:nvPr>
+            <p:ph type="body" idx="1"/>
+          </p:nvPr>
+        </p:nvSpPr>
+        <p:spPr/>
+        <p:txBody>
+          <a:bodyPr>
+            <a:normAutofit/>
+          </a:bodyPr>
+          <a:lstStyle/>
+          <a:p>
+            <a:pPr marL="177796" indent="0">
+              <a:lnSpc>
+                <a:spcPct val="90000"/>
+              </a:lnSpc>
+              <a:spcBef>
+                <a:spcPts val="0"/>
+              </a:spcBef>
+              <a:buSzPts val="3100"/>
+              <a:buNone/>
+            </a:pPr>
+            <a:r>
+              <a:rPr lang="ru-RU" sz="1400" dirty="0" smtClean="0">
+                <a:latin typeface="Roboto" panose="020B0604020202020204"/>
+                <a:ea typeface="+mj-ea"/>
+                <a:cs typeface="+mj-cs"/>
+              </a:rPr>
+              <a:t>1.  </a:t>
+            </a:r>
+            <a:r>
+              <a:rPr lang="en-US" sz="1400" dirty="0" smtClean="0">
+                <a:latin typeface="Roboto" panose="020B0604020202020204"/>
+                <a:ea typeface="+mj-ea"/>
+                <a:cs typeface="+mj-cs"/>
+              </a:rPr>
+              <a:t>AS – </a:t>
+            </a:r>
+            <a:r>
+              <a:rPr lang="ru-RU" sz="1400" dirty="0" smtClean="0">
+                <a:latin typeface="Roboto" panose="020B0604020202020204"/>
+                <a:ea typeface="+mj-ea"/>
+                <a:cs typeface="+mj-cs"/>
+              </a:rPr>
+              <a:t>коммутатор – корень для </a:t>
+            </a:r>
+            <a:r>
+              <a:rPr lang="en-US" sz="1400" dirty="0" smtClean="0">
+                <a:latin typeface="Roboto" panose="020B0604020202020204"/>
+                <a:ea typeface="+mj-ea"/>
+                <a:cs typeface="+mj-cs"/>
+              </a:rPr>
+              <a:t>Vlan</a:t>
+            </a:r>
+            <a:r>
+              <a:rPr lang="en-US" sz="1400" dirty="0" smtClean="0">
+                <a:latin typeface="Roboto" panose="020B0604020202020204"/>
+                <a:ea typeface="+mj-ea"/>
+                <a:cs typeface="+mj-cs"/>
+              </a:rPr>
+              <a:t> 11</a:t>
+            </a:r>
+            <a:r>
+              <a:rPr lang="ru-RU" sz="1400" dirty="0" smtClean="0">
+                <a:latin typeface="Roboto" panose="020B0604020202020204"/>
+                <a:ea typeface="+mj-ea"/>
+                <a:cs typeface="+mj-cs"/>
+              </a:rPr>
+              <a:t>.</a:t>
+            </a:r>
+          </a:p>
+          <a:p>
+            <a:pPr marL="177796" indent="0">
+              <a:lnSpc>
+                <a:spcPct val="90000"/>
+              </a:lnSpc>
+              <a:spcBef>
+                <a:spcPts val="0"/>
+              </a:spcBef>
+              <a:buSzPts val="3100"/>
+              <a:buNone/>
+            </a:pPr>
+            <a:endParaRPr lang="ru-RU" sz="1400" dirty="0">
+              <a:latin typeface="Roboto" panose="020B0604020202020204"/>
+              <a:ea typeface="+mj-ea"/>
+              <a:cs typeface="+mj-cs"/>
+            </a:endParaRPr>
+          </a:p>
+          <a:p>
+            <a:pPr marL="177796" indent="0">
+              <a:lnSpc>
+                <a:spcPct val="90000"/>
+              </a:lnSpc>
+              <a:spcBef>
+                <a:spcPts val="0"/>
+              </a:spcBef>
+              <a:buSzPts val="3100"/>
+              <a:buNone/>
+            </a:pPr>
+            <a:r>
+              <a:rPr lang="ru-RU" sz="1400" dirty="0" smtClean="0">
+                <a:latin typeface="Roboto" panose="020B0604020202020204"/>
+                <a:ea typeface="+mj-ea"/>
+                <a:cs typeface="+mj-cs"/>
+              </a:rPr>
+              <a:t>2. </a:t>
+            </a:r>
+            <a:r>
+              <a:rPr lang="en-US" sz="1400" dirty="0" smtClean="0">
+                <a:latin typeface="Roboto" panose="020B0604020202020204"/>
+                <a:ea typeface="+mj-ea"/>
+                <a:cs typeface="+mj-cs"/>
+              </a:rPr>
+              <a:t>MS – </a:t>
+            </a:r>
+            <a:r>
+              <a:rPr lang="ru-RU" sz="1400" dirty="0" smtClean="0">
+                <a:latin typeface="Roboto" panose="020B0604020202020204"/>
+                <a:ea typeface="+mj-ea"/>
+                <a:cs typeface="+mj-cs"/>
+              </a:rPr>
+              <a:t>правый коммутатор в сегменте (</a:t>
+            </a:r>
+            <a:r>
+              <a:rPr lang="en-US" sz="1400" dirty="0" smtClean="0">
+                <a:latin typeface="Roboto" panose="020B0604020202020204"/>
+                <a:ea typeface="+mj-ea"/>
+                <a:cs typeface="+mj-cs"/>
+              </a:rPr>
+              <a:t>root vlan12</a:t>
+            </a:r>
+            <a:r>
+              <a:rPr lang="ru-RU" sz="1400" dirty="0" smtClean="0">
+                <a:latin typeface="Roboto" panose="020B0604020202020204"/>
+                <a:ea typeface="+mj-ea"/>
+                <a:cs typeface="+mj-cs"/>
+              </a:rPr>
+              <a:t>)</a:t>
+            </a:r>
+            <a:endParaRPr lang="en-US" sz="1400" dirty="0" smtClean="0">
+              <a:latin typeface="Roboto" panose="020B0604020202020204"/>
+              <a:ea typeface="+mj-ea"/>
+              <a:cs typeface="+mj-cs"/>
+            </a:endParaRPr>
+          </a:p>
+          <a:p>
+            <a:pPr marL="177796" indent="0">
+              <a:lnSpc>
+                <a:spcPct val="90000"/>
+              </a:lnSpc>
+              <a:spcBef>
+                <a:spcPts val="0"/>
+              </a:spcBef>
+              <a:buSzPts val="3100"/>
+              <a:buNone/>
+            </a:pPr>
+            <a:endParaRPr lang="en-US" sz="1400" dirty="0" smtClean="0">
+              <a:latin typeface="Roboto" panose="020B0604020202020204"/>
+              <a:ea typeface="+mj-ea"/>
+              <a:cs typeface="+mj-cs"/>
+            </a:endParaRPr>
+          </a:p>
+          <a:p>
+            <a:pPr marL="177796" indent="0">
+              <a:lnSpc>
+                <a:spcPct val="90000"/>
+              </a:lnSpc>
+              <a:spcBef>
+                <a:spcPts val="0"/>
+              </a:spcBef>
+              <a:buSzPts val="3100"/>
+              <a:buNone/>
+            </a:pPr>
+            <a:r>
+              <a:rPr lang="en-US" sz="1400" dirty="0" smtClean="0">
+                <a:latin typeface="Roboto" panose="020B0604020202020204"/>
+                <a:ea typeface="+mj-ea"/>
+                <a:cs typeface="+mj-cs"/>
+              </a:rPr>
+              <a:t>3. </a:t>
+            </a:r>
+            <a:r>
+              <a:rPr lang="ru-RU" sz="1400" dirty="0" smtClean="0">
+                <a:latin typeface="Roboto" panose="020B0604020202020204"/>
+                <a:ea typeface="+mj-ea"/>
+                <a:cs typeface="+mj-cs"/>
+              </a:rPr>
+              <a:t>Используется </a:t>
+            </a:r>
+            <a:r>
+              <a:rPr lang="en-US" sz="1400" dirty="0" smtClean="0">
+                <a:latin typeface="Roboto" panose="020B0604020202020204"/>
+                <a:ea typeface="+mj-ea"/>
+                <a:cs typeface="+mj-cs"/>
+              </a:rPr>
+              <a:t>Rstp</a:t>
+            </a:r>
+            <a:r>
+              <a:rPr lang="en-US" sz="1400" dirty="0" smtClean="0">
+                <a:latin typeface="Roboto" panose="020B0604020202020204"/>
+                <a:ea typeface="+mj-ea"/>
+                <a:cs typeface="+mj-cs"/>
+              </a:rPr>
+              <a:t> –</a:t>
+            </a:r>
+            <a:r>
+              <a:rPr lang="ru-RU" sz="1400" dirty="0" smtClean="0">
+                <a:latin typeface="Roboto" panose="020B0604020202020204"/>
+                <a:ea typeface="+mj-ea"/>
+                <a:cs typeface="+mj-cs"/>
+              </a:rPr>
+              <a:t> из соображений скорости</a:t>
+            </a:r>
+            <a:endParaRPr lang="en-US" sz="1400" dirty="0" smtClean="0">
+              <a:latin typeface="Roboto" panose="020B0604020202020204"/>
+              <a:ea typeface="+mj-ea"/>
+              <a:cs typeface="+mj-cs"/>
+            </a:endParaRPr>
+          </a:p>
+          <a:p>
+            <a:pPr marL="177796" indent="0">
+              <a:lnSpc>
+                <a:spcPct val="90000"/>
+              </a:lnSpc>
+              <a:spcBef>
+                <a:spcPts val="0"/>
+              </a:spcBef>
+              <a:buSzPts val="3100"/>
+              <a:buNone/>
+            </a:pPr>
+            <a:endParaRPr lang="en-US" sz="1400" dirty="0">
+              <a:latin typeface="Roboto" panose="020B0604020202020204"/>
+              <a:ea typeface="+mj-ea"/>
+              <a:cs typeface="+mj-cs"/>
+            </a:endParaRPr>
+          </a:p>
+          <a:p>
+            <a:pPr marL="177796" indent="0">
+              <a:lnSpc>
+                <a:spcPct val="90000"/>
+              </a:lnSpc>
+              <a:spcBef>
+                <a:spcPts val="0"/>
+              </a:spcBef>
+              <a:buSzPts val="3100"/>
+              <a:buNone/>
+            </a:pPr>
+            <a:r>
+              <a:rPr lang="en-US" sz="1400" dirty="0" smtClean="0">
+                <a:latin typeface="Roboto" panose="020B0604020202020204"/>
+                <a:ea typeface="+mj-ea"/>
+                <a:cs typeface="+mj-cs"/>
+              </a:rPr>
+              <a:t>4. </a:t>
+            </a:r>
+            <a:r>
+              <a:rPr lang="ru-RU" sz="1400" dirty="0" smtClean="0">
+                <a:latin typeface="Roboto" panose="020B0604020202020204"/>
+                <a:ea typeface="+mj-ea"/>
+                <a:cs typeface="+mj-cs"/>
+              </a:rPr>
+              <a:t>Приоритете выставлен с помощью: </a:t>
+            </a:r>
+          </a:p>
+          <a:p>
+            <a:pPr marL="177796" indent="0">
+              <a:lnSpc>
+                <a:spcPct val="90000"/>
+              </a:lnSpc>
+              <a:spcBef>
+                <a:spcPts val="0"/>
+              </a:spcBef>
+              <a:buSzPts val="3100"/>
+              <a:buNone/>
+            </a:pPr>
+            <a:endParaRPr lang="ru-RU" sz="1400" dirty="0">
+              <a:ea typeface="+mj-ea"/>
+              <a:cs typeface="+mj-cs"/>
+            </a:endParaRPr>
+          </a:p>
+          <a:p>
+            <a:pPr marL="177796" indent="0">
+              <a:lnSpc>
+                <a:spcPct val="90000"/>
+              </a:lnSpc>
+              <a:spcBef>
+                <a:spcPts val="0"/>
+              </a:spcBef>
+              <a:buSzPts val="3100"/>
+              <a:buNone/>
+            </a:pPr>
+            <a:r>
+              <a:rPr lang="nl-NL" sz="1400" b="1" dirty="0" smtClean="0">
+                <a:latin typeface="Roboto" panose="020B0604020202020204"/>
+              </a:rPr>
+              <a:t>spanning-tree </a:t>
+            </a:r>
+            <a:r>
+              <a:rPr lang="nl-NL" sz="1400" b="1" i="1" dirty="0">
+                <a:latin typeface="Roboto" panose="020B0604020202020204"/>
+              </a:rPr>
+              <a:t>vlan </a:t>
+            </a:r>
+            <a:r>
+              <a:rPr lang="ru-RU" sz="1400" b="1" i="1" dirty="0"/>
+              <a:t>№</a:t>
+            </a:r>
+            <a:r>
+              <a:rPr lang="nl-NL" sz="1400" b="1" dirty="0" smtClean="0">
+                <a:latin typeface="Roboto" panose="020B0604020202020204"/>
+              </a:rPr>
+              <a:t> </a:t>
+            </a:r>
+            <a:r>
+              <a:rPr lang="nl-NL" sz="1400" b="1" dirty="0">
+                <a:latin typeface="Roboto" panose="020B0604020202020204"/>
+              </a:rPr>
+              <a:t>root primary</a:t>
+            </a:r>
+          </a:p>
+          <a:p>
+            <a:pPr marL="177796" indent="0">
+              <a:lnSpc>
+                <a:spcPct val="90000"/>
+              </a:lnSpc>
+              <a:spcBef>
+                <a:spcPts val="0"/>
+              </a:spcBef>
+              <a:buSzPts val="3100"/>
+              <a:buNone/>
+            </a:pPr>
+            <a:endParaRPr lang="en-US" sz="1400" dirty="0" smtClean="0">
+              <a:latin typeface="Roboto" panose="020B0604020202020204"/>
+              <a:ea typeface="+mj-ea"/>
+              <a:cs typeface="+mj-cs"/>
+            </a:endParaRPr>
+          </a:p>
+          <a:p>
+            <a:pPr marL="177796" indent="0">
+              <a:lnSpc>
+                <a:spcPct val="90000"/>
+              </a:lnSpc>
+              <a:spcBef>
+                <a:spcPts val="0"/>
+              </a:spcBef>
+              <a:buSzPts val="3100"/>
+              <a:buNone/>
+            </a:pPr>
+            <a:endParaRPr lang="ru-RU" sz="1400" dirty="0">
+              <a:latin typeface="Roboto" panose="020B0604020202020204"/>
+              <a:ea typeface="+mj-ea"/>
+              <a:cs typeface="+mj-cs"/>
+            </a:endParaRPr>
+          </a:p>
+        </p:txBody>
+      </p:sp>
+    </p:spTree>
+    <p:extLst>
+      <p:ext uri="{BB962C8B-B14F-4D97-AF65-F5344CB8AC3E}">
+        <p14:creationId xmlns:p14="http://schemas.microsoft.com/office/powerpoint/2010/main" val="2059534299"/>
+      </p:ext>
+    </p:extLst>
+  </p:cSld>
+  <p:clrMapOvr>
+    <a:masterClrMapping/>
+  </p:clrMapOvr>
+  <p:timing>
+    <p:tnLst>
+      <p:par>
+        <p:cTn id="1" dur="indefinite" restart="never" nodeType="tmRoot"/>
+      </p:par>
+    </p:tnLst>
+  </p:timing>
+</p:sld>
+</file>
+
+<file path=ppt/slides/slide13.xml><?xml version="1.0" encoding="utf-8"?>
+<p:sld xmlns:a="http://schemas.openxmlformats.org/drawingml/2006/main" xmlns:r="http://schemas.openxmlformats.org/officeDocument/2006/relationships" xmlns:p="http://schemas.openxmlformats.org/presentationml/2006/main">
+  <p:cSld>
+    <p:spTree>
+      <p:nvGrpSpPr>
+        <p:cNvPr id="1" name=""/>
+        <p:cNvGrpSpPr/>
+        <p:nvPr/>
+      </p:nvGrpSpPr>
+      <p:grpSpPr>
+        <a:xfrm>
+          <a:off x="0" y="0"/>
+          <a:ext cx="0" cy="0"/>
+          <a:chOff x="0" y="0"/>
+          <a:chExt cx="0" cy="0"/>
+        </a:xfrm>
+      </p:grpSpPr>
+      <p:sp>
+        <p:nvSpPr>
+          <p:cNvPr id="2" name="Заголовок 1"/>
+          <p:cNvSpPr>
+            <a:spLocks noGrp="1"/>
+          </p:cNvSpPr>
+          <p:nvPr>
+            <p:ph type="title"/>
+          </p:nvPr>
+        </p:nvSpPr>
+        <p:spPr/>
+        <p:txBody>
+          <a:bodyPr/>
+          <a:lstStyle/>
+          <a:p>
+            <a:r>
+              <a:rPr lang="ru-RU" sz="2800" b="1" dirty="0" smtClean="0">
+                <a:latin typeface="Roboto" panose="020B0604020202020204"/>
+              </a:rPr>
+              <a:t>Избыточность </a:t>
+            </a:r>
+            <a:r>
+              <a:rPr lang="ru-RU" sz="2800" b="1" dirty="0" smtClean="0">
+                <a:latin typeface="Roboto" panose="020B0604020202020204"/>
+              </a:rPr>
+              <a:t>линков</a:t>
+            </a:r>
+            <a:r>
+              <a:rPr lang="en-US" sz="2800" b="1" dirty="0" smtClean="0">
+                <a:latin typeface="Roboto" panose="020B0604020202020204"/>
+              </a:rPr>
+              <a:t> </a:t>
+            </a:r>
+            <a:endParaRPr lang="ru-RU" sz="2800" b="1" dirty="0"/>
+          </a:p>
+        </p:txBody>
+      </p:sp>
+      <p:sp>
+        <p:nvSpPr>
+          <p:cNvPr id="3" name="Текст 2"/>
+          <p:cNvSpPr>
+            <a:spLocks noGrp="1"/>
+          </p:cNvSpPr>
+          <p:nvPr>
+            <p:ph type="body" idx="1"/>
+          </p:nvPr>
+        </p:nvSpPr>
+        <p:spPr/>
+        <p:txBody>
+          <a:bodyPr>
+            <a:normAutofit/>
+          </a:bodyPr>
+          <a:lstStyle/>
+          <a:p>
+            <a:pPr marL="177796" indent="0">
+              <a:lnSpc>
+                <a:spcPct val="113000"/>
+              </a:lnSpc>
+              <a:spcBef>
+                <a:spcPts val="0"/>
+              </a:spcBef>
+              <a:buSzPts val="3100"/>
+              <a:buNone/>
+            </a:pPr>
+            <a:r>
+              <a:rPr lang="ru-RU" sz="2100" b="1" dirty="0">
+                <a:solidFill>
+                  <a:srgbClr val="3F299A"/>
+                </a:solidFill>
+                <a:latin typeface="Roboto"/>
+                <a:ea typeface="Roboto"/>
+                <a:cs typeface="Roboto"/>
+              </a:rPr>
+              <a:t>1. </a:t>
+            </a:r>
+            <a:r>
+              <a:rPr lang="ru-RU" sz="1400" dirty="0" smtClean="0">
+                <a:latin typeface="Roboto" panose="020B0604020202020204"/>
+                <a:ea typeface="+mj-ea"/>
+                <a:cs typeface="+mj-cs"/>
+              </a:rPr>
+              <a:t>Отказоустойчивость</a:t>
+            </a:r>
+            <a:endParaRPr lang="ru-RU" sz="1400" dirty="0">
+              <a:latin typeface="Roboto" panose="020B0604020202020204"/>
+              <a:ea typeface="+mj-ea"/>
+              <a:cs typeface="+mj-cs"/>
+            </a:endParaRPr>
+          </a:p>
+          <a:p>
+            <a:pPr marL="177796" indent="0">
+              <a:lnSpc>
+                <a:spcPct val="114000"/>
+              </a:lnSpc>
+              <a:spcBef>
+                <a:spcPts val="0"/>
+              </a:spcBef>
+              <a:buSzPts val="3100"/>
+              <a:buNone/>
+            </a:pPr>
+            <a:r>
+              <a:rPr lang="ru-RU" sz="2100" b="1" dirty="0">
+                <a:solidFill>
+                  <a:srgbClr val="3F299A"/>
+                </a:solidFill>
+                <a:latin typeface="Roboto"/>
+                <a:ea typeface="Roboto"/>
+                <a:cs typeface="Roboto"/>
+              </a:rPr>
+              <a:t>2. </a:t>
+            </a:r>
+            <a:r>
+              <a:rPr lang="ru-RU" sz="1400" dirty="0" smtClean="0">
+                <a:latin typeface="Roboto" panose="020B0604020202020204"/>
+                <a:ea typeface="+mj-ea"/>
+                <a:cs typeface="+mj-cs"/>
+              </a:rPr>
+              <a:t>Увеличение пропускной способности (в случае </a:t>
+            </a:r>
+            <a:r>
+              <a:rPr lang="en-US" sz="1400" dirty="0" smtClean="0">
+                <a:latin typeface="Roboto" panose="020B0604020202020204"/>
+                <a:ea typeface="+mj-ea"/>
+                <a:cs typeface="+mj-cs"/>
+              </a:rPr>
+              <a:t>PortChannel</a:t>
+            </a:r>
+            <a:r>
+              <a:rPr lang="ru-RU" sz="1400" dirty="0" smtClean="0">
+                <a:latin typeface="Roboto" panose="020B0604020202020204"/>
+                <a:ea typeface="+mj-ea"/>
+                <a:cs typeface="+mj-cs"/>
+              </a:rPr>
+              <a:t>)</a:t>
+            </a:r>
+            <a:endParaRPr lang="ru-RU" sz="1400" dirty="0">
+              <a:latin typeface="Roboto" panose="020B0604020202020204"/>
+              <a:ea typeface="+mj-ea"/>
+              <a:cs typeface="+mj-cs"/>
+            </a:endParaRPr>
+          </a:p>
+          <a:p>
+            <a:pPr marL="177796" indent="0">
+              <a:lnSpc>
+                <a:spcPct val="114000"/>
+              </a:lnSpc>
+              <a:spcBef>
+                <a:spcPts val="0"/>
+              </a:spcBef>
+              <a:buSzPts val="3100"/>
+              <a:buNone/>
+            </a:pPr>
+            <a:r>
+              <a:rPr lang="ru-RU" sz="2100" b="1" dirty="0">
+                <a:solidFill>
+                  <a:srgbClr val="3F299A"/>
+                </a:solidFill>
+                <a:latin typeface="Roboto"/>
+                <a:ea typeface="Roboto"/>
+                <a:cs typeface="Roboto"/>
+              </a:rPr>
+              <a:t>3. </a:t>
+            </a:r>
+            <a:r>
+              <a:rPr lang="ru-RU" sz="1400" dirty="0" smtClean="0">
+                <a:latin typeface="Roboto" panose="020B0604020202020204"/>
+                <a:ea typeface="+mj-ea"/>
+                <a:cs typeface="+mj-cs"/>
+              </a:rPr>
+              <a:t>Распределение нагрузки</a:t>
+            </a:r>
+            <a:r>
+              <a:rPr lang="en-US" sz="1400" dirty="0" smtClean="0">
+                <a:latin typeface="Roboto" panose="020B0604020202020204"/>
+                <a:ea typeface="+mj-ea"/>
+                <a:cs typeface="+mj-cs"/>
+              </a:rPr>
+              <a:t>(</a:t>
+            </a:r>
+            <a:r>
+              <a:rPr lang="ru-RU" sz="1400" dirty="0" smtClean="0">
+                <a:latin typeface="Roboto" panose="020B0604020202020204"/>
+                <a:ea typeface="+mj-ea"/>
+                <a:cs typeface="+mj-cs"/>
+              </a:rPr>
+              <a:t>в частности </a:t>
+            </a:r>
+            <a:r>
+              <a:rPr lang="en-US" sz="1400" dirty="0" smtClean="0">
+                <a:latin typeface="Roboto" panose="020B0604020202020204"/>
+                <a:ea typeface="+mj-ea"/>
+                <a:cs typeface="+mj-cs"/>
+              </a:rPr>
+              <a:t>HSRP)</a:t>
+            </a:r>
+            <a:endParaRPr lang="ru-RU" sz="1400" dirty="0">
+              <a:latin typeface="Roboto" panose="020B0604020202020204"/>
+              <a:ea typeface="+mj-ea"/>
+              <a:cs typeface="+mj-cs"/>
+            </a:endParaRPr>
+          </a:p>
+          <a:p>
+            <a:pPr marL="177796" indent="0">
+              <a:lnSpc>
+                <a:spcPct val="114000"/>
+              </a:lnSpc>
+              <a:spcBef>
+                <a:spcPts val="0"/>
+              </a:spcBef>
+              <a:buSzPts val="3100"/>
+              <a:buNone/>
+            </a:pPr>
+            <a:endParaRPr lang="ru-RU" sz="1400" dirty="0" smtClean="0">
+              <a:latin typeface="Roboto" panose="020B0604020202020204"/>
+              <a:ea typeface="+mj-ea"/>
+              <a:cs typeface="+mj-cs"/>
+            </a:endParaRPr>
+          </a:p>
+        </p:txBody>
+      </p:sp>
+    </p:spTree>
+    <p:extLst>
+      <p:ext uri="{BB962C8B-B14F-4D97-AF65-F5344CB8AC3E}">
+        <p14:creationId xmlns:p14="http://schemas.microsoft.com/office/powerpoint/2010/main" val="3237772446"/>
+      </p:ext>
+    </p:extLst>
+  </p:cSld>
+  <p:clrMapOvr>
+    <a:masterClrMapping/>
+  </p:clrMapOvr>
+  <p:timing>
+    <p:tnLst>
+      <p:par>
+        <p:cTn id="1" dur="indefinite" restart="never" nodeType="tmRoot"/>
+      </p:par>
+    </p:tnLst>
+  </p:timing>
+</p:sld>
+</file>
+
+<file path=ppt/slides/slide14.xml><?xml version="1.0" encoding="utf-8"?>
+<p:sld xmlns:a="http://schemas.openxmlformats.org/drawingml/2006/main" xmlns:r="http://schemas.openxmlformats.org/officeDocument/2006/relationships" xmlns:p="http://schemas.openxmlformats.org/presentationml/2006/main">
+  <p:cSld>
+    <p:spTree>
+      <p:nvGrpSpPr>
+        <p:cNvPr id="1" name=""/>
+        <p:cNvGrpSpPr/>
+        <p:nvPr/>
+      </p:nvGrpSpPr>
+      <p:grpSpPr>
+        <a:xfrm>
+          <a:off x="0" y="0"/>
+          <a:ext cx="0" cy="0"/>
+          <a:chOff x="0" y="0"/>
+          <a:chExt cx="0" cy="0"/>
+        </a:xfrm>
+      </p:grpSpPr>
+      <p:sp>
+        <p:nvSpPr>
+          <p:cNvPr id="2" name="Заголовок 1"/>
+          <p:cNvSpPr>
+            <a:spLocks noGrp="1"/>
+          </p:cNvSpPr>
+          <p:nvPr>
+            <p:ph type="title"/>
+          </p:nvPr>
+        </p:nvSpPr>
+        <p:spPr/>
+        <p:txBody>
+          <a:bodyPr/>
+          <a:lstStyle/>
+          <a:p>
+            <a:r>
+              <a:rPr lang="ru-RU" sz="2800" b="1" dirty="0" smtClean="0">
+                <a:latin typeface="Roboto" panose="020B0604020202020204"/>
+              </a:rPr>
+              <a:t>Избыточность </a:t>
+            </a:r>
+            <a:r>
+              <a:rPr lang="ru-RU" sz="2800" b="1" dirty="0" smtClean="0">
+                <a:latin typeface="Roboto" panose="020B0604020202020204"/>
+              </a:rPr>
+              <a:t>линков</a:t>
+            </a:r>
+            <a:r>
+              <a:rPr lang="ru-RU" sz="2800" b="1" dirty="0" smtClean="0">
+                <a:latin typeface="Roboto" panose="020B0604020202020204"/>
+              </a:rPr>
+              <a:t> </a:t>
+            </a:r>
+            <a:r>
+              <a:rPr lang="ru-RU" sz="2800" dirty="0" smtClean="0">
+                <a:latin typeface="Roboto" panose="020B0604020202020204"/>
+              </a:rPr>
+              <a:t>– реализация </a:t>
+            </a:r>
+            <a:r>
+              <a:rPr lang="en-US" sz="2800" b="1" dirty="0" smtClean="0">
+                <a:latin typeface="Roboto" panose="020B0604020202020204"/>
+              </a:rPr>
+              <a:t>PortChannel</a:t>
+            </a:r>
+            <a:r>
+              <a:rPr lang="en-US" sz="2800" dirty="0" smtClean="0">
+                <a:latin typeface="Roboto" panose="020B0604020202020204"/>
+              </a:rPr>
+              <a:t> </a:t>
+            </a:r>
+            <a:endParaRPr lang="ru-RU" sz="2800" dirty="0"/>
+          </a:p>
+        </p:txBody>
+      </p:sp>
+      <p:sp>
+        <p:nvSpPr>
+          <p:cNvPr id="3" name="Текст 2"/>
+          <p:cNvSpPr>
+            <a:spLocks noGrp="1"/>
+          </p:cNvSpPr>
+          <p:nvPr>
+            <p:ph type="body" idx="1"/>
+          </p:nvPr>
+        </p:nvSpPr>
+        <p:spPr/>
+        <p:txBody>
+          <a:bodyPr>
+            <a:normAutofit/>
+          </a:bodyPr>
+          <a:lstStyle/>
+          <a:p>
+            <a:pPr marL="177796" indent="0">
+              <a:lnSpc>
+                <a:spcPct val="113000"/>
+              </a:lnSpc>
+              <a:spcBef>
+                <a:spcPts val="0"/>
+              </a:spcBef>
+              <a:buSzPts val="3100"/>
+              <a:buNone/>
+            </a:pPr>
+            <a:r>
+              <a:rPr lang="ru-RU" sz="2100" b="1" dirty="0">
+                <a:solidFill>
+                  <a:srgbClr val="3F299A"/>
+                </a:solidFill>
+                <a:latin typeface="Roboto"/>
+                <a:ea typeface="Roboto"/>
+                <a:cs typeface="Roboto"/>
+              </a:rPr>
+              <a:t>1. </a:t>
+            </a:r>
+            <a:r>
+              <a:rPr lang="en-US" sz="1400" dirty="0" smtClean="0">
+                <a:latin typeface="Roboto" panose="020B0604020202020204"/>
+                <a:ea typeface="+mj-ea"/>
+                <a:cs typeface="+mj-cs"/>
+              </a:rPr>
+              <a:t>LACP – </a:t>
+            </a:r>
+            <a:r>
+              <a:rPr lang="ru-RU" sz="1400" dirty="0" smtClean="0">
+                <a:latin typeface="Roboto" panose="020B0604020202020204"/>
+                <a:ea typeface="+mj-ea"/>
+                <a:cs typeface="+mj-cs"/>
+              </a:rPr>
+              <a:t>из-за универсальности</a:t>
+            </a:r>
+            <a:endParaRPr lang="ru-RU" sz="1400" dirty="0">
+              <a:latin typeface="Roboto" panose="020B0604020202020204"/>
+              <a:ea typeface="+mj-ea"/>
+              <a:cs typeface="+mj-cs"/>
+            </a:endParaRPr>
+          </a:p>
+          <a:p>
+            <a:pPr marL="177796" indent="0">
+              <a:lnSpc>
+                <a:spcPct val="114000"/>
+              </a:lnSpc>
+              <a:spcBef>
+                <a:spcPts val="0"/>
+              </a:spcBef>
+              <a:buSzPts val="3100"/>
+              <a:buNone/>
+            </a:pPr>
+            <a:r>
+              <a:rPr lang="ru-RU" sz="2100" b="1" dirty="0">
+                <a:solidFill>
+                  <a:srgbClr val="3F299A"/>
+                </a:solidFill>
+                <a:latin typeface="Roboto"/>
+                <a:ea typeface="Roboto"/>
+                <a:cs typeface="Roboto"/>
+              </a:rPr>
+              <a:t>2. </a:t>
+            </a:r>
+            <a:r>
+              <a:rPr lang="en-US" sz="1400" dirty="0" smtClean="0">
+                <a:latin typeface="Roboto" panose="020B0604020202020204"/>
+                <a:ea typeface="+mj-ea"/>
+                <a:cs typeface="+mj-cs"/>
+              </a:rPr>
+              <a:t>C </a:t>
+            </a:r>
+            <a:r>
+              <a:rPr lang="ru-RU" sz="1400" dirty="0" smtClean="0">
+                <a:latin typeface="Roboto" panose="020B0604020202020204"/>
+                <a:ea typeface="+mj-ea"/>
+                <a:cs typeface="+mj-cs"/>
+              </a:rPr>
+              <a:t>обеих сторон </a:t>
+            </a:r>
+            <a:r>
+              <a:rPr lang="en-US" sz="1400" dirty="0" smtClean="0">
+                <a:latin typeface="Roboto" panose="020B0604020202020204"/>
+                <a:ea typeface="+mj-ea"/>
+                <a:cs typeface="+mj-cs"/>
+              </a:rPr>
+              <a:t>active</a:t>
+            </a:r>
+            <a:endParaRPr lang="ru-RU" sz="1400" dirty="0">
+              <a:latin typeface="Roboto" panose="020B0604020202020204"/>
+              <a:ea typeface="+mj-ea"/>
+              <a:cs typeface="+mj-cs"/>
+            </a:endParaRPr>
+          </a:p>
+          <a:p>
+            <a:pPr marL="177796" indent="0">
+              <a:lnSpc>
+                <a:spcPct val="114000"/>
+              </a:lnSpc>
+              <a:spcBef>
+                <a:spcPts val="0"/>
+              </a:spcBef>
+              <a:buSzPts val="3100"/>
+              <a:buNone/>
+            </a:pPr>
+            <a:r>
+              <a:rPr lang="ru-RU" sz="2100" b="1" dirty="0">
+                <a:solidFill>
+                  <a:srgbClr val="3F299A"/>
+                </a:solidFill>
+                <a:latin typeface="Roboto"/>
+                <a:ea typeface="Roboto"/>
+                <a:cs typeface="Roboto"/>
+              </a:rPr>
+              <a:t>3. </a:t>
+            </a:r>
+            <a:r>
+              <a:rPr lang="ru-RU" sz="1400" dirty="0" smtClean="0">
+                <a:latin typeface="Roboto" panose="020B0604020202020204"/>
+                <a:ea typeface="+mj-ea"/>
+                <a:cs typeface="+mj-cs"/>
+              </a:rPr>
+              <a:t>Порты одинаковые </a:t>
+            </a:r>
+            <a:endParaRPr lang="ru-RU" sz="1400" dirty="0">
+              <a:latin typeface="Roboto" panose="020B0604020202020204"/>
+              <a:ea typeface="+mj-ea"/>
+              <a:cs typeface="+mj-cs"/>
+            </a:endParaRPr>
+          </a:p>
+          <a:p>
+            <a:pPr marL="177796" indent="0">
+              <a:lnSpc>
+                <a:spcPct val="114000"/>
+              </a:lnSpc>
+              <a:spcBef>
+                <a:spcPts val="0"/>
+              </a:spcBef>
+              <a:buSzPts val="3100"/>
+              <a:buNone/>
+            </a:pPr>
+            <a:endParaRPr lang="ru-RU" sz="1400" dirty="0" smtClean="0">
+              <a:latin typeface="Roboto" panose="020B0604020202020204"/>
+              <a:ea typeface="+mj-ea"/>
+              <a:cs typeface="+mj-cs"/>
+            </a:endParaRPr>
+          </a:p>
+        </p:txBody>
+      </p:sp>
+      <p:pic>
+        <p:nvPicPr>
+          <p:cNvPr id="4" name="Рисунок 3"/>
+          <p:cNvPicPr>
+            <a:picLocks noChangeAspect="1"/>
+          </p:cNvPicPr>
+          <p:nvPr/>
+        </p:nvPicPr>
+        <p:blipFill>
+          <a:blip r:embed="rId2"/>
+          <a:stretch>
+            <a:fillRect/>
+          </a:stretch>
+        </p:blipFill>
+        <p:spPr>
+          <a:xfrm>
+            <a:off x="5277394" y="1901959"/>
+            <a:ext cx="6254659" cy="4257250"/>
+          </a:xfrm>
+          <a:prstGeom prst="rect">
+            <a:avLst/>
+          </a:prstGeom>
+        </p:spPr>
+      </p:pic>
+    </p:spTree>
+    <p:extLst>
+      <p:ext uri="{BB962C8B-B14F-4D97-AF65-F5344CB8AC3E}">
+        <p14:creationId xmlns:p14="http://schemas.microsoft.com/office/powerpoint/2010/main" val="3911785242"/>
+      </p:ext>
+    </p:extLst>
+  </p:cSld>
+  <p:clrMapOvr>
+    <a:masterClrMapping/>
+  </p:clrMapOvr>
+  <p:timing>
+    <p:tnLst>
+      <p:par>
+        <p:cTn id="1" dur="indefinite" restart="never" nodeType="tmRoot"/>
+      </p:par>
+    </p:tnLst>
+  </p:timing>
+</p:sld>
+</file>
+
+<file path=ppt/slides/slide15.xml><?xml version="1.0" encoding="utf-8"?>
+<p:sld xmlns:a="http://schemas.openxmlformats.org/drawingml/2006/main" xmlns:r="http://schemas.openxmlformats.org/officeDocument/2006/relationships" xmlns:p="http://schemas.openxmlformats.org/presentationml/2006/main">
+  <p:cSld>
+    <p:spTree>
+      <p:nvGrpSpPr>
+        <p:cNvPr id="1" name=""/>
+        <p:cNvGrpSpPr/>
+        <p:nvPr/>
+      </p:nvGrpSpPr>
+      <p:grpSpPr>
+        <a:xfrm>
+          <a:off x="0" y="0"/>
+          <a:ext cx="0" cy="0"/>
+          <a:chOff x="0" y="0"/>
+          <a:chExt cx="0" cy="0"/>
+        </a:xfrm>
+      </p:grpSpPr>
+      <p:sp>
+        <p:nvSpPr>
+          <p:cNvPr id="2" name="Заголовок 1"/>
+          <p:cNvSpPr>
+            <a:spLocks noGrp="1"/>
+          </p:cNvSpPr>
+          <p:nvPr>
+            <p:ph type="title"/>
+          </p:nvPr>
+        </p:nvSpPr>
+        <p:spPr/>
+        <p:txBody>
+          <a:bodyPr/>
+          <a:lstStyle/>
+          <a:p>
+            <a:r>
+              <a:rPr lang="ru-RU" sz="2800" b="1" dirty="0" smtClean="0">
+                <a:latin typeface="Roboto" panose="020B0604020202020204"/>
+              </a:rPr>
+              <a:t>Избыточность </a:t>
+            </a:r>
+            <a:r>
+              <a:rPr lang="ru-RU" sz="2800" b="1" dirty="0" smtClean="0">
+                <a:latin typeface="Roboto" panose="020B0604020202020204"/>
+              </a:rPr>
+              <a:t>линков</a:t>
+            </a:r>
+            <a:r>
+              <a:rPr lang="ru-RU" sz="2800" b="1" dirty="0" smtClean="0">
+                <a:latin typeface="Roboto" panose="020B0604020202020204"/>
+              </a:rPr>
+              <a:t> </a:t>
+            </a:r>
+            <a:r>
+              <a:rPr lang="ru-RU" sz="2800" dirty="0" smtClean="0">
+                <a:latin typeface="Roboto" panose="020B0604020202020204"/>
+              </a:rPr>
+              <a:t>– реализация </a:t>
+            </a:r>
+            <a:r>
+              <a:rPr lang="en-US" sz="2800" b="1" dirty="0" smtClean="0">
+                <a:latin typeface="Roboto" panose="020B0604020202020204"/>
+              </a:rPr>
+              <a:t>HSRP</a:t>
+            </a:r>
+            <a:endParaRPr lang="ru-RU" sz="2800" b="1" dirty="0"/>
+          </a:p>
+        </p:txBody>
+      </p:sp>
+      <p:sp>
+        <p:nvSpPr>
+          <p:cNvPr id="3" name="Текст 2"/>
+          <p:cNvSpPr>
+            <a:spLocks noGrp="1"/>
+          </p:cNvSpPr>
+          <p:nvPr>
+            <p:ph type="body" idx="1"/>
+          </p:nvPr>
+        </p:nvSpPr>
+        <p:spPr/>
+        <p:txBody>
+          <a:bodyPr>
+            <a:normAutofit/>
+          </a:bodyPr>
+          <a:lstStyle/>
+          <a:p>
+            <a:pPr marL="177796" indent="0">
+              <a:lnSpc>
+                <a:spcPct val="113000"/>
+              </a:lnSpc>
+              <a:spcBef>
+                <a:spcPts val="0"/>
+              </a:spcBef>
+              <a:buSzPts val="3100"/>
+              <a:buNone/>
+            </a:pPr>
+            <a:r>
+              <a:rPr lang="ru-RU" sz="2100" b="1" dirty="0">
+                <a:solidFill>
+                  <a:srgbClr val="3F299A"/>
+                </a:solidFill>
+                <a:latin typeface="Roboto"/>
+                <a:ea typeface="Roboto"/>
+                <a:cs typeface="Roboto"/>
+              </a:rPr>
+              <a:t>1. </a:t>
+            </a:r>
+            <a:r>
+              <a:rPr lang="en-US" sz="1400" dirty="0" smtClean="0">
+                <a:latin typeface="Roboto" panose="020B0604020202020204"/>
+                <a:ea typeface="+mj-ea"/>
+                <a:cs typeface="+mj-cs"/>
+              </a:rPr>
+              <a:t>Version2 </a:t>
+            </a:r>
+            <a:r>
+              <a:rPr lang="ru-RU" sz="1400" dirty="0" smtClean="0">
+                <a:latin typeface="Roboto" panose="020B0604020202020204"/>
+                <a:ea typeface="+mj-ea"/>
+                <a:cs typeface="+mj-cs"/>
+              </a:rPr>
+              <a:t>как более стабильная</a:t>
+            </a:r>
+            <a:endParaRPr lang="ru-RU" sz="1400" dirty="0">
+              <a:latin typeface="Roboto" panose="020B0604020202020204"/>
+              <a:ea typeface="+mj-ea"/>
+              <a:cs typeface="+mj-cs"/>
+            </a:endParaRPr>
+          </a:p>
+          <a:p>
+            <a:pPr marL="177796" indent="0">
+              <a:lnSpc>
+                <a:spcPct val="114000"/>
+              </a:lnSpc>
+              <a:spcBef>
+                <a:spcPts val="0"/>
+              </a:spcBef>
+              <a:buSzPts val="3100"/>
+              <a:buNone/>
+            </a:pPr>
+            <a:r>
+              <a:rPr lang="ru-RU" sz="2100" b="1" dirty="0">
+                <a:solidFill>
+                  <a:srgbClr val="3F299A"/>
+                </a:solidFill>
+                <a:latin typeface="Roboto"/>
+                <a:ea typeface="Roboto"/>
+                <a:cs typeface="Roboto"/>
+              </a:rPr>
+              <a:t>2. </a:t>
+            </a:r>
+            <a:r>
+              <a:rPr lang="en-US" sz="1400" dirty="0" smtClean="0">
+                <a:latin typeface="Roboto" panose="020B0604020202020204"/>
+                <a:ea typeface="+mj-ea"/>
+                <a:cs typeface="+mj-cs"/>
+              </a:rPr>
+              <a:t>vlan</a:t>
+            </a:r>
+            <a:r>
+              <a:rPr lang="ru-RU" sz="1400" dirty="0" smtClean="0">
+                <a:latin typeface="Roboto" panose="020B0604020202020204"/>
+              </a:rPr>
+              <a:t>11</a:t>
+            </a:r>
+            <a:r>
+              <a:rPr lang="en-US" sz="1400" dirty="0" smtClean="0">
+                <a:latin typeface="Roboto" panose="020B0604020202020204"/>
+                <a:ea typeface="+mj-ea"/>
+                <a:cs typeface="+mj-cs"/>
+              </a:rPr>
+              <a:t> </a:t>
+            </a:r>
+            <a:r>
+              <a:rPr lang="ru-RU" sz="1400" dirty="0" smtClean="0">
+                <a:latin typeface="Roboto" panose="020B0604020202020204"/>
+                <a:ea typeface="+mj-ea"/>
+                <a:cs typeface="+mj-cs"/>
+              </a:rPr>
+              <a:t>приоритет левый маршрутизатор</a:t>
+            </a:r>
+            <a:endParaRPr lang="ru-RU" sz="1400" dirty="0">
+              <a:latin typeface="Roboto" panose="020B0604020202020204"/>
+              <a:ea typeface="+mj-ea"/>
+              <a:cs typeface="+mj-cs"/>
+            </a:endParaRPr>
+          </a:p>
+          <a:p>
+            <a:pPr marL="177796" indent="0">
+              <a:lnSpc>
+                <a:spcPct val="114000"/>
+              </a:lnSpc>
+              <a:spcBef>
+                <a:spcPts val="0"/>
+              </a:spcBef>
+              <a:buSzPts val="3100"/>
+              <a:buNone/>
+            </a:pPr>
+            <a:r>
+              <a:rPr lang="ru-RU" sz="2100" b="1" dirty="0">
+                <a:solidFill>
+                  <a:srgbClr val="3F299A"/>
+                </a:solidFill>
+                <a:latin typeface="Roboto"/>
+                <a:ea typeface="Roboto"/>
+                <a:cs typeface="Roboto"/>
+              </a:rPr>
+              <a:t>3. </a:t>
+            </a:r>
+            <a:r>
+              <a:rPr lang="en-US" sz="1400" dirty="0" smtClean="0">
+                <a:latin typeface="Roboto" panose="020B0604020202020204"/>
+              </a:rPr>
+              <a:t>vlan</a:t>
+            </a:r>
+            <a:r>
+              <a:rPr lang="ru-RU" sz="1400" dirty="0" smtClean="0">
+                <a:latin typeface="Roboto" panose="020B0604020202020204"/>
+              </a:rPr>
+              <a:t>12</a:t>
+            </a:r>
+            <a:r>
+              <a:rPr lang="en-US" sz="1400" dirty="0" smtClean="0">
+                <a:latin typeface="Roboto" panose="020B0604020202020204"/>
+              </a:rPr>
+              <a:t> </a:t>
+            </a:r>
+            <a:r>
+              <a:rPr lang="ru-RU" sz="1400" dirty="0">
+                <a:latin typeface="Roboto" panose="020B0604020202020204"/>
+              </a:rPr>
+              <a:t>приоритет </a:t>
+            </a:r>
+            <a:r>
+              <a:rPr lang="ru-RU" sz="1400" dirty="0" smtClean="0">
+                <a:latin typeface="Roboto" panose="020B0604020202020204"/>
+              </a:rPr>
+              <a:t>правый </a:t>
+            </a:r>
+            <a:r>
+              <a:rPr lang="ru-RU" sz="1400" dirty="0">
+                <a:latin typeface="Roboto" panose="020B0604020202020204"/>
+              </a:rPr>
+              <a:t>маршрутизатор</a:t>
+            </a:r>
+          </a:p>
+          <a:p>
+            <a:pPr marL="177796" indent="0">
+              <a:lnSpc>
+                <a:spcPct val="114000"/>
+              </a:lnSpc>
+              <a:spcBef>
+                <a:spcPts val="0"/>
+              </a:spcBef>
+              <a:buSzPts val="3100"/>
+              <a:buNone/>
+            </a:pPr>
+            <a:endParaRPr lang="ru-RU" sz="1400" dirty="0" smtClean="0">
+              <a:latin typeface="Roboto" panose="020B0604020202020204"/>
+              <a:ea typeface="+mj-ea"/>
+              <a:cs typeface="+mj-cs"/>
+            </a:endParaRPr>
+          </a:p>
+        </p:txBody>
+      </p:sp>
+      <p:pic>
+        <p:nvPicPr>
+          <p:cNvPr id="5" name="Рисунок 4"/>
+          <p:cNvPicPr>
+            <a:picLocks noChangeAspect="1"/>
+          </p:cNvPicPr>
+          <p:nvPr/>
+        </p:nvPicPr>
+        <p:blipFill>
+          <a:blip r:embed="rId2"/>
+          <a:stretch>
+            <a:fillRect/>
+          </a:stretch>
+        </p:blipFill>
+        <p:spPr>
+          <a:xfrm>
+            <a:off x="4972594" y="1901959"/>
+            <a:ext cx="6546805" cy="4284528"/>
+          </a:xfrm>
+          <a:prstGeom prst="rect">
+            <a:avLst/>
+          </a:prstGeom>
+        </p:spPr>
+      </p:pic>
+    </p:spTree>
+    <p:extLst>
+      <p:ext uri="{BB962C8B-B14F-4D97-AF65-F5344CB8AC3E}">
+        <p14:creationId xmlns:p14="http://schemas.microsoft.com/office/powerpoint/2010/main" val="1365792979"/>
+      </p:ext>
+    </p:extLst>
+  </p:cSld>
+  <p:clrMapOvr>
+    <a:masterClrMapping/>
+  </p:clrMapOvr>
+  <p:timing>
+    <p:tnLst>
+      <p:par>
+        <p:cTn id="1" dur="indefinite" restart="never" nodeType="tmRoot"/>
+      </p:par>
+    </p:tnLst>
+  </p:timing>
+</p:sld>
+</file>
+
+<file path=ppt/slides/slide16.xml><?xml version="1.0" encoding="utf-8"?>
+<p:sld xmlns:a="http://schemas.openxmlformats.org/drawingml/2006/main" xmlns:r="http://schemas.openxmlformats.org/officeDocument/2006/relationships" xmlns:p="http://schemas.openxmlformats.org/presentationml/2006/main">
+  <p:cSld>
+    <p:spTree>
+      <p:nvGrpSpPr>
+        <p:cNvPr id="1" name=""/>
+        <p:cNvGrpSpPr/>
+        <p:nvPr/>
+      </p:nvGrpSpPr>
+      <p:grpSpPr>
+        <a:xfrm>
+          <a:off x="0" y="0"/>
+          <a:ext cx="0" cy="0"/>
+          <a:chOff x="0" y="0"/>
+          <a:chExt cx="0" cy="0"/>
+        </a:xfrm>
+      </p:grpSpPr>
+      <p:sp>
+        <p:nvSpPr>
+          <p:cNvPr id="2" name="Заголовок 1"/>
+          <p:cNvSpPr>
+            <a:spLocks noGrp="1"/>
+          </p:cNvSpPr>
+          <p:nvPr>
+            <p:ph type="title"/>
+          </p:nvPr>
+        </p:nvSpPr>
+        <p:spPr/>
+        <p:txBody>
+          <a:bodyPr/>
+          <a:lstStyle/>
+          <a:p>
+            <a:r>
+              <a:rPr lang="en-US" sz="2800" b="1" dirty="0" smtClean="0">
+                <a:latin typeface="Roboto" panose="020B0604020202020204"/>
+              </a:rPr>
+              <a:t>DHCP</a:t>
+            </a:r>
+            <a:r>
+              <a:rPr lang="en-US" sz="2800" dirty="0" smtClean="0">
+                <a:latin typeface="Roboto" panose="020B0604020202020204"/>
+              </a:rPr>
+              <a:t> – </a:t>
+            </a:r>
+            <a:r>
+              <a:rPr lang="ru-RU" sz="2800" dirty="0" smtClean="0">
+                <a:latin typeface="Roboto" panose="020B0604020202020204"/>
+              </a:rPr>
+              <a:t>протокол динамической конфигурации узла</a:t>
+            </a:r>
+            <a:endParaRPr lang="ru-RU" sz="2800" dirty="0"/>
+          </a:p>
+        </p:txBody>
+      </p:sp>
+      <p:sp>
+        <p:nvSpPr>
+          <p:cNvPr id="3" name="Текст 2"/>
+          <p:cNvSpPr>
+            <a:spLocks noGrp="1"/>
+          </p:cNvSpPr>
+          <p:nvPr>
+            <p:ph type="body" idx="1"/>
+          </p:nvPr>
+        </p:nvSpPr>
+        <p:spPr/>
+        <p:txBody>
+          <a:bodyPr>
+            <a:normAutofit/>
+          </a:bodyPr>
+          <a:lstStyle/>
+          <a:p>
+            <a:pPr marL="177796" indent="0">
+              <a:lnSpc>
+                <a:spcPct val="113000"/>
+              </a:lnSpc>
+              <a:spcBef>
+                <a:spcPts val="0"/>
+              </a:spcBef>
+              <a:buSzPts val="3100"/>
+              <a:buNone/>
+            </a:pPr>
+            <a:r>
+              <a:rPr lang="ru-RU" sz="2100" b="1" dirty="0">
+                <a:solidFill>
+                  <a:srgbClr val="3F299A"/>
+                </a:solidFill>
+                <a:latin typeface="Roboto"/>
+                <a:ea typeface="Roboto"/>
+                <a:cs typeface="Roboto"/>
+              </a:rPr>
+              <a:t>1. </a:t>
+            </a:r>
+            <a:r>
+              <a:rPr lang="ru-RU" sz="1400" dirty="0" smtClean="0">
+                <a:latin typeface="Roboto" panose="020B0604020202020204"/>
+                <a:ea typeface="+mj-ea"/>
+                <a:cs typeface="+mj-cs"/>
+              </a:rPr>
+              <a:t>Автоматическая настройка параметров конфигурации сети</a:t>
+            </a:r>
+            <a:endParaRPr lang="ru-RU" sz="1400" dirty="0">
+              <a:latin typeface="Roboto" panose="020B0604020202020204"/>
+              <a:ea typeface="+mj-ea"/>
+              <a:cs typeface="+mj-cs"/>
+            </a:endParaRPr>
+          </a:p>
+          <a:p>
+            <a:pPr marL="177796" indent="0">
+              <a:lnSpc>
+                <a:spcPct val="114000"/>
+              </a:lnSpc>
+              <a:spcBef>
+                <a:spcPts val="0"/>
+              </a:spcBef>
+              <a:buSzPts val="3100"/>
+              <a:buNone/>
+            </a:pPr>
+            <a:r>
+              <a:rPr lang="ru-RU" sz="2100" b="1" dirty="0">
+                <a:solidFill>
+                  <a:srgbClr val="3F299A"/>
+                </a:solidFill>
+                <a:latin typeface="Roboto"/>
+                <a:ea typeface="Roboto"/>
+                <a:cs typeface="Roboto"/>
+              </a:rPr>
+              <a:t>2. </a:t>
+            </a:r>
+            <a:r>
+              <a:rPr lang="ru-RU" sz="1400" dirty="0">
+                <a:latin typeface="Roboto" panose="020B0604020202020204"/>
+              </a:rPr>
+              <a:t>Автоматическая настройка </a:t>
+            </a:r>
+            <a:r>
+              <a:rPr lang="en-US" sz="1400" dirty="0" smtClean="0">
+                <a:latin typeface="Roboto" panose="020B0604020202020204"/>
+              </a:rPr>
+              <a:t>ip</a:t>
+            </a:r>
+            <a:r>
+              <a:rPr lang="en-US" sz="1400" dirty="0" smtClean="0">
+                <a:latin typeface="Roboto" panose="020B0604020202020204"/>
+              </a:rPr>
+              <a:t> </a:t>
+            </a:r>
+            <a:r>
+              <a:rPr lang="ru-RU" sz="1400" dirty="0" smtClean="0">
+                <a:latin typeface="Roboto" panose="020B0604020202020204"/>
+              </a:rPr>
+              <a:t>адресации для клиентов</a:t>
+            </a:r>
+          </a:p>
+          <a:p>
+            <a:pPr marL="177796" indent="0">
+              <a:lnSpc>
+                <a:spcPct val="114000"/>
+              </a:lnSpc>
+              <a:spcBef>
+                <a:spcPts val="0"/>
+              </a:spcBef>
+              <a:buSzPts val="3100"/>
+              <a:buNone/>
+            </a:pPr>
+            <a:r>
+              <a:rPr lang="ru-RU" sz="2100" b="1" dirty="0" smtClean="0">
+                <a:solidFill>
+                  <a:srgbClr val="3F299A"/>
+                </a:solidFill>
+                <a:latin typeface="Roboto"/>
+                <a:ea typeface="Roboto"/>
+                <a:cs typeface="Roboto"/>
+              </a:rPr>
+              <a:t>3</a:t>
+            </a:r>
+            <a:r>
+              <a:rPr lang="ru-RU" sz="2100" b="1" dirty="0">
+                <a:solidFill>
+                  <a:srgbClr val="3F299A"/>
+                </a:solidFill>
+                <a:latin typeface="Roboto"/>
+                <a:ea typeface="Roboto"/>
+                <a:cs typeface="Roboto"/>
+              </a:rPr>
+              <a:t>. </a:t>
+            </a:r>
+            <a:r>
+              <a:rPr lang="ru-RU" sz="1400" dirty="0" smtClean="0">
+                <a:latin typeface="Roboto" panose="020B0604020202020204"/>
+                <a:ea typeface="+mj-ea"/>
+                <a:cs typeface="+mj-cs"/>
+              </a:rPr>
+              <a:t>Резервирование </a:t>
+            </a:r>
+            <a:r>
+              <a:rPr lang="en-US" sz="1400" dirty="0" smtClean="0">
+                <a:latin typeface="Roboto" panose="020B0604020202020204"/>
+                <a:ea typeface="+mj-ea"/>
+                <a:cs typeface="+mj-cs"/>
+              </a:rPr>
+              <a:t>ip</a:t>
+            </a:r>
+            <a:r>
+              <a:rPr lang="en-US" sz="1400" dirty="0" smtClean="0">
+                <a:latin typeface="Roboto" panose="020B0604020202020204"/>
+                <a:ea typeface="+mj-ea"/>
+                <a:cs typeface="+mj-cs"/>
+              </a:rPr>
+              <a:t> </a:t>
+            </a:r>
+            <a:r>
+              <a:rPr lang="ru-RU" sz="1400" dirty="0" smtClean="0">
+                <a:latin typeface="Roboto" panose="020B0604020202020204"/>
+                <a:ea typeface="+mj-ea"/>
+                <a:cs typeface="+mj-cs"/>
+              </a:rPr>
+              <a:t>адресов</a:t>
+            </a:r>
+            <a:endParaRPr lang="ru-RU" sz="1400" dirty="0">
+              <a:latin typeface="Roboto" panose="020B0604020202020204"/>
+              <a:ea typeface="+mj-ea"/>
+              <a:cs typeface="+mj-cs"/>
+            </a:endParaRPr>
+          </a:p>
+          <a:p>
+            <a:pPr marL="177796" indent="0">
+              <a:lnSpc>
+                <a:spcPct val="114000"/>
+              </a:lnSpc>
+              <a:spcBef>
+                <a:spcPts val="0"/>
+              </a:spcBef>
+              <a:buSzPts val="3100"/>
+              <a:buNone/>
+            </a:pPr>
+            <a:endParaRPr lang="ru-RU" sz="1400" dirty="0" smtClean="0">
+              <a:latin typeface="Roboto" panose="020B0604020202020204"/>
+              <a:ea typeface="+mj-ea"/>
+              <a:cs typeface="+mj-cs"/>
+            </a:endParaRPr>
+          </a:p>
+        </p:txBody>
+      </p:sp>
+    </p:spTree>
+    <p:extLst>
+      <p:ext uri="{BB962C8B-B14F-4D97-AF65-F5344CB8AC3E}">
+        <p14:creationId xmlns:p14="http://schemas.microsoft.com/office/powerpoint/2010/main" val="2567719732"/>
+      </p:ext>
+    </p:extLst>
+  </p:cSld>
+  <p:clrMapOvr>
+    <a:masterClrMapping/>
+  </p:clrMapOvr>
+  <p:timing>
+    <p:tnLst>
+      <p:par>
+        <p:cTn id="1" dur="indefinite" restart="never" nodeType="tmRoot"/>
+      </p:par>
+    </p:tnLst>
+  </p:timing>
+</p:sld>
+</file>
+
+<file path=ppt/slides/slide17.xml><?xml version="1.0" encoding="utf-8"?>
+<p:sld xmlns:a="http://schemas.openxmlformats.org/drawingml/2006/main" xmlns:r="http://schemas.openxmlformats.org/officeDocument/2006/relationships" xmlns:p="http://schemas.openxmlformats.org/presentationml/2006/main">
+  <p:cSld>
+    <p:spTree>
+      <p:nvGrpSpPr>
+        <p:cNvPr id="1" name=""/>
+        <p:cNvGrpSpPr/>
+        <p:nvPr/>
+      </p:nvGrpSpPr>
+      <p:grpSpPr>
+        <a:xfrm>
+          <a:off x="0" y="0"/>
+          <a:ext cx="0" cy="0"/>
+          <a:chOff x="0" y="0"/>
+          <a:chExt cx="0" cy="0"/>
+        </a:xfrm>
+      </p:grpSpPr>
+      <p:sp>
+        <p:nvSpPr>
+          <p:cNvPr id="2" name="Заголовок 1"/>
+          <p:cNvSpPr>
+            <a:spLocks noGrp="1"/>
+          </p:cNvSpPr>
+          <p:nvPr>
+            <p:ph type="title"/>
+          </p:nvPr>
+        </p:nvSpPr>
+        <p:spPr/>
+        <p:txBody>
+          <a:bodyPr/>
+          <a:lstStyle/>
+          <a:p>
+            <a:r>
+              <a:rPr lang="en-US" sz="2800" b="1" dirty="0" smtClean="0">
+                <a:latin typeface="Roboto" panose="020B0604020202020204"/>
+              </a:rPr>
+              <a:t>DHCP</a:t>
+            </a:r>
+            <a:r>
+              <a:rPr lang="en-US" sz="2800" dirty="0" smtClean="0">
+                <a:latin typeface="Roboto" panose="020B0604020202020204"/>
+              </a:rPr>
+              <a:t> – </a:t>
+            </a:r>
+            <a:r>
+              <a:rPr lang="ru-RU" sz="2800" dirty="0" smtClean="0">
+                <a:latin typeface="Roboto" panose="020B0604020202020204"/>
+              </a:rPr>
+              <a:t>реализация</a:t>
+            </a:r>
+            <a:endParaRPr lang="ru-RU" sz="2800" dirty="0"/>
+          </a:p>
+        </p:txBody>
+      </p:sp>
+      <p:sp>
+        <p:nvSpPr>
+          <p:cNvPr id="3" name="Текст 2"/>
+          <p:cNvSpPr>
+            <a:spLocks noGrp="1"/>
+          </p:cNvSpPr>
+          <p:nvPr>
+            <p:ph type="body" idx="1"/>
+          </p:nvPr>
+        </p:nvSpPr>
+        <p:spPr/>
+        <p:txBody>
+          <a:bodyPr>
+            <a:normAutofit/>
+          </a:bodyPr>
+          <a:lstStyle/>
+          <a:p>
+            <a:pPr marL="177796" indent="0">
+              <a:lnSpc>
+                <a:spcPct val="113000"/>
+              </a:lnSpc>
+              <a:spcBef>
+                <a:spcPts val="0"/>
+              </a:spcBef>
+              <a:buSzPts val="3100"/>
+              <a:buNone/>
+            </a:pPr>
+            <a:r>
+              <a:rPr lang="ru-RU" sz="2100" b="1" dirty="0">
+                <a:solidFill>
+                  <a:srgbClr val="3F299A"/>
+                </a:solidFill>
+                <a:latin typeface="Roboto"/>
+                <a:ea typeface="Roboto"/>
+                <a:cs typeface="Roboto"/>
+              </a:rPr>
+              <a:t>1. </a:t>
+            </a:r>
+            <a:r>
+              <a:rPr lang="ru-RU" sz="1400" dirty="0" smtClean="0">
+                <a:latin typeface="Roboto" panose="020B0604020202020204"/>
+                <a:ea typeface="+mj-ea"/>
+                <a:cs typeface="+mj-cs"/>
+              </a:rPr>
+              <a:t>Области на разных маршрутизаторах</a:t>
+            </a:r>
+          </a:p>
+          <a:p>
+            <a:pPr marL="177796" indent="0">
+              <a:lnSpc>
+                <a:spcPct val="114000"/>
+              </a:lnSpc>
+              <a:spcBef>
+                <a:spcPts val="0"/>
+              </a:spcBef>
+              <a:buSzPts val="3100"/>
+              <a:buNone/>
+            </a:pPr>
+            <a:r>
+              <a:rPr lang="ru-RU" sz="2100" b="1" dirty="0" smtClean="0">
+                <a:solidFill>
+                  <a:srgbClr val="3F299A"/>
+                </a:solidFill>
+                <a:latin typeface="Roboto"/>
+                <a:ea typeface="Roboto"/>
+                <a:cs typeface="Roboto"/>
+              </a:rPr>
+              <a:t>2. </a:t>
+            </a:r>
+            <a:r>
+              <a:rPr lang="ru-RU" sz="1400" dirty="0" smtClean="0">
+                <a:latin typeface="Roboto" panose="020B0604020202020204"/>
+              </a:rPr>
+              <a:t>Резервирование(</a:t>
+            </a:r>
+            <a:r>
+              <a:rPr lang="en-US" sz="1400" dirty="0" smtClean="0">
+                <a:latin typeface="Roboto" panose="020B0604020202020204"/>
+              </a:rPr>
+              <a:t>ip</a:t>
+            </a:r>
+            <a:r>
+              <a:rPr lang="ru-RU" sz="1400" dirty="0" smtClean="0">
+                <a:latin typeface="Roboto" panose="020B0604020202020204"/>
+              </a:rPr>
+              <a:t>) на каждом</a:t>
+            </a:r>
+            <a:r>
+              <a:rPr lang="en-US" sz="1400" dirty="0">
+                <a:latin typeface="Roboto" panose="020B0604020202020204"/>
+              </a:rPr>
+              <a:t>,</a:t>
+            </a:r>
+            <a:r>
+              <a:rPr lang="ru-RU" sz="1400" dirty="0" smtClean="0">
+                <a:latin typeface="Roboto" panose="020B0604020202020204"/>
+              </a:rPr>
+              <a:t> на случай </a:t>
+            </a:r>
+          </a:p>
+          <a:p>
+            <a:pPr marL="177796" indent="0">
+              <a:lnSpc>
+                <a:spcPct val="114000"/>
+              </a:lnSpc>
+              <a:spcBef>
+                <a:spcPts val="0"/>
+              </a:spcBef>
+              <a:buSzPts val="3100"/>
+              <a:buNone/>
+            </a:pPr>
+            <a:r>
+              <a:rPr lang="ru-RU" sz="1400" dirty="0" smtClean="0">
+                <a:latin typeface="Roboto" panose="020B0604020202020204"/>
+              </a:rPr>
+              <a:t>выхода из строя одного и необходимости </a:t>
+            </a:r>
+          </a:p>
+          <a:p>
+            <a:pPr marL="177796" indent="0">
+              <a:lnSpc>
+                <a:spcPct val="114000"/>
+              </a:lnSpc>
+              <a:spcBef>
+                <a:spcPts val="0"/>
+              </a:spcBef>
+              <a:buSzPts val="3100"/>
+              <a:buNone/>
+            </a:pPr>
+            <a:r>
+              <a:rPr lang="ru-RU" sz="1400" dirty="0" smtClean="0">
+                <a:latin typeface="Roboto" panose="020B0604020202020204"/>
+              </a:rPr>
+              <a:t>настройки области с нерабочего устройства</a:t>
+            </a:r>
+          </a:p>
+          <a:p>
+            <a:pPr marL="177796" indent="0">
+              <a:lnSpc>
+                <a:spcPct val="114000"/>
+              </a:lnSpc>
+              <a:spcBef>
+                <a:spcPts val="0"/>
+              </a:spcBef>
+              <a:buSzPts val="3100"/>
+              <a:buNone/>
+            </a:pPr>
+            <a:endParaRPr lang="ru-RU" sz="1400" dirty="0" smtClean="0">
+              <a:latin typeface="Roboto" panose="020B0604020202020204"/>
+              <a:ea typeface="+mj-ea"/>
+              <a:cs typeface="+mj-cs"/>
+            </a:endParaRPr>
+          </a:p>
+        </p:txBody>
+      </p:sp>
+      <p:pic>
+        <p:nvPicPr>
+          <p:cNvPr id="4" name="Рисунок 3"/>
+          <p:cNvPicPr>
+            <a:picLocks noChangeAspect="1"/>
+          </p:cNvPicPr>
+          <p:nvPr/>
+        </p:nvPicPr>
+        <p:blipFill>
+          <a:blip r:embed="rId2"/>
+          <a:stretch>
+            <a:fillRect/>
+          </a:stretch>
+        </p:blipFill>
+        <p:spPr>
+          <a:xfrm>
+            <a:off x="4781006" y="1901959"/>
+            <a:ext cx="6702062" cy="3238500"/>
+          </a:xfrm>
+          <a:prstGeom prst="rect">
+            <a:avLst/>
+          </a:prstGeom>
+        </p:spPr>
+      </p:pic>
+    </p:spTree>
+    <p:extLst>
+      <p:ext uri="{BB962C8B-B14F-4D97-AF65-F5344CB8AC3E}">
+        <p14:creationId xmlns:p14="http://schemas.microsoft.com/office/powerpoint/2010/main" val="3886403062"/>
+      </p:ext>
+    </p:extLst>
+  </p:cSld>
+  <p:clrMapOvr>
+    <a:masterClrMapping/>
+  </p:clrMapOvr>
+  <p:timing>
+    <p:tnLst>
+      <p:par>
+        <p:cTn id="1" dur="indefinite" restart="never" nodeType="tmRoot"/>
+      </p:par>
+    </p:tnLst>
+  </p:timing>
+</p:sld>
+</file>
+
+<file path=ppt/slides/slide18.xml><?xml version="1.0" encoding="utf-8"?>
+<p:sld xmlns:a="http://schemas.openxmlformats.org/drawingml/2006/main" xmlns:r="http://schemas.openxmlformats.org/officeDocument/2006/relationships" xmlns:p="http://schemas.openxmlformats.org/presentationml/2006/main">
+  <p:cSld>
+    <p:spTree>
+      <p:nvGrpSpPr>
+        <p:cNvPr id="1" name=""/>
+        <p:cNvGrpSpPr/>
+        <p:nvPr/>
+      </p:nvGrpSpPr>
+      <p:grpSpPr>
+        <a:xfrm>
+          <a:off x="0" y="0"/>
+          <a:ext cx="0" cy="0"/>
+          <a:chOff x="0" y="0"/>
+          <a:chExt cx="0" cy="0"/>
+        </a:xfrm>
+      </p:grpSpPr>
+      <p:sp>
+        <p:nvSpPr>
+          <p:cNvPr id="2" name="Заголовок 1"/>
+          <p:cNvSpPr>
+            <a:spLocks noGrp="1"/>
+          </p:cNvSpPr>
+          <p:nvPr>
+            <p:ph type="title"/>
+          </p:nvPr>
+        </p:nvSpPr>
+        <p:spPr/>
+        <p:txBody>
+          <a:bodyPr/>
+          <a:lstStyle/>
+          <a:p>
+            <a:r>
+              <a:rPr lang="ru-RU" sz="2800" b="1" dirty="0">
+                <a:latin typeface="Roboto" panose="020B0604020202020204"/>
+              </a:rPr>
+              <a:t>Маршрутизация</a:t>
+            </a:r>
+            <a:endParaRPr lang="ru-RU" sz="2800" b="1" dirty="0">
+              <a:latin typeface="Roboto" panose="020B0604020202020204"/>
+            </a:endParaRPr>
+          </a:p>
+        </p:txBody>
+      </p:sp>
+      <p:sp>
+        <p:nvSpPr>
+          <p:cNvPr id="3" name="Текст 2"/>
+          <p:cNvSpPr>
+            <a:spLocks noGrp="1"/>
+          </p:cNvSpPr>
+          <p:nvPr>
+            <p:ph type="body" idx="1"/>
+          </p:nvPr>
+        </p:nvSpPr>
+        <p:spPr/>
+        <p:txBody>
+          <a:bodyPr>
+            <a:normAutofit/>
+          </a:bodyPr>
+          <a:lstStyle/>
+          <a:p>
+            <a:pPr marL="177796" indent="0">
+              <a:lnSpc>
+                <a:spcPct val="113000"/>
+              </a:lnSpc>
+              <a:spcBef>
+                <a:spcPts val="0"/>
+              </a:spcBef>
+              <a:buSzPts val="3100"/>
+              <a:buNone/>
+            </a:pPr>
+            <a:r>
+              <a:rPr lang="ru-RU" sz="2100" b="1" dirty="0">
+                <a:solidFill>
+                  <a:srgbClr val="3F299A"/>
+                </a:solidFill>
+                <a:latin typeface="Roboto"/>
+                <a:ea typeface="Roboto"/>
+                <a:cs typeface="Roboto"/>
+              </a:rPr>
+              <a:t>1. </a:t>
+            </a:r>
+            <a:r>
+              <a:rPr lang="ru-RU" sz="1400" dirty="0" smtClean="0">
+                <a:latin typeface="Roboto" panose="020B0604020202020204"/>
+                <a:ea typeface="+mj-ea"/>
+                <a:cs typeface="+mj-cs"/>
+              </a:rPr>
+              <a:t>Статическая маршрутизация для «задания пути вручную»</a:t>
+            </a:r>
+            <a:endParaRPr lang="ru-RU" sz="1400" dirty="0">
+              <a:latin typeface="Roboto" panose="020B0604020202020204"/>
+              <a:ea typeface="+mj-ea"/>
+              <a:cs typeface="+mj-cs"/>
+            </a:endParaRPr>
+          </a:p>
+          <a:p>
+            <a:pPr marL="177796" indent="0">
+              <a:lnSpc>
+                <a:spcPct val="114000"/>
+              </a:lnSpc>
+              <a:spcBef>
+                <a:spcPts val="0"/>
+              </a:spcBef>
+              <a:buSzPts val="3100"/>
+              <a:buNone/>
+            </a:pPr>
+            <a:r>
+              <a:rPr lang="ru-RU" sz="2100" b="1" dirty="0">
+                <a:solidFill>
+                  <a:srgbClr val="3F299A"/>
+                </a:solidFill>
+                <a:latin typeface="Roboto"/>
+                <a:ea typeface="Roboto"/>
+                <a:cs typeface="Roboto"/>
+              </a:rPr>
+              <a:t>2. </a:t>
+            </a:r>
+            <a:r>
+              <a:rPr lang="ru-RU" sz="1400" dirty="0" smtClean="0">
+                <a:latin typeface="Roboto" panose="020B0604020202020204"/>
+              </a:rPr>
+              <a:t>Динамическая маршрутизация – </a:t>
+            </a:r>
+            <a:r>
+              <a:rPr lang="ru-RU" sz="1400" dirty="0">
+                <a:latin typeface="Roboto" panose="020B0604020202020204"/>
+              </a:rPr>
+              <a:t>авто</a:t>
+            </a:r>
+            <a:r>
+              <a:rPr lang="ru-RU" sz="1400" dirty="0" smtClean="0">
+                <a:latin typeface="Roboto" panose="020B0604020202020204"/>
+              </a:rPr>
+              <a:t> распространение маршрутов с маршрутизаторов</a:t>
+            </a:r>
+          </a:p>
+          <a:p>
+            <a:pPr marL="177796" indent="0">
+              <a:lnSpc>
+                <a:spcPct val="114000"/>
+              </a:lnSpc>
+              <a:spcBef>
+                <a:spcPts val="0"/>
+              </a:spcBef>
+              <a:buSzPts val="3100"/>
+              <a:buNone/>
+            </a:pPr>
+            <a:r>
+              <a:rPr lang="ru-RU" sz="2100" b="1" dirty="0" smtClean="0">
+                <a:solidFill>
+                  <a:srgbClr val="3F299A"/>
+                </a:solidFill>
+                <a:latin typeface="Roboto"/>
+                <a:ea typeface="Roboto"/>
+                <a:cs typeface="Roboto"/>
+              </a:rPr>
+              <a:t>3</a:t>
+            </a:r>
+            <a:r>
+              <a:rPr lang="ru-RU" sz="2100" b="1" dirty="0">
+                <a:solidFill>
+                  <a:srgbClr val="3F299A"/>
+                </a:solidFill>
+                <a:latin typeface="Roboto"/>
+                <a:ea typeface="Roboto"/>
+                <a:cs typeface="Roboto"/>
+              </a:rPr>
+              <a:t>. </a:t>
+            </a:r>
+            <a:r>
+              <a:rPr lang="ru-RU" sz="1400" dirty="0" smtClean="0">
+                <a:latin typeface="Roboto" panose="020B0604020202020204"/>
+                <a:ea typeface="+mj-ea"/>
+                <a:cs typeface="+mj-cs"/>
+              </a:rPr>
+              <a:t>Маршрутизация – определение пути для передачи трафика на 3 уровне</a:t>
+            </a:r>
+            <a:endParaRPr lang="ru-RU" sz="1400" dirty="0">
+              <a:latin typeface="Roboto" panose="020B0604020202020204"/>
+              <a:ea typeface="+mj-ea"/>
+              <a:cs typeface="+mj-cs"/>
+            </a:endParaRPr>
+          </a:p>
+          <a:p>
+            <a:pPr marL="177796" indent="0">
+              <a:lnSpc>
+                <a:spcPct val="114000"/>
+              </a:lnSpc>
+              <a:spcBef>
+                <a:spcPts val="0"/>
+              </a:spcBef>
+              <a:buSzPts val="3100"/>
+              <a:buNone/>
+            </a:pPr>
+            <a:endParaRPr lang="ru-RU" sz="1400" dirty="0" smtClean="0">
+              <a:latin typeface="Roboto" panose="020B0604020202020204"/>
+              <a:ea typeface="+mj-ea"/>
+              <a:cs typeface="+mj-cs"/>
+            </a:endParaRPr>
+          </a:p>
+        </p:txBody>
+      </p:sp>
+    </p:spTree>
+    <p:extLst>
+      <p:ext uri="{BB962C8B-B14F-4D97-AF65-F5344CB8AC3E}">
+        <p14:creationId xmlns:p14="http://schemas.microsoft.com/office/powerpoint/2010/main" val="1369160449"/>
+      </p:ext>
+    </p:extLst>
+  </p:cSld>
+  <p:clrMapOvr>
+    <a:masterClrMapping/>
+  </p:clrMapOvr>
+  <p:timing>
+    <p:tnLst>
+      <p:par>
+        <p:cTn id="1" dur="indefinite" restart="never" nodeType="tmRoot"/>
+      </p:par>
+    </p:tnLst>
+  </p:timing>
+</p:sld>
+</file>
+
+<file path=ppt/slides/slide19.xml><?xml version="1.0" encoding="utf-8"?>
+<p:sld xmlns:a="http://schemas.openxmlformats.org/drawingml/2006/main" xmlns:r="http://schemas.openxmlformats.org/officeDocument/2006/relationships" xmlns:p="http://schemas.openxmlformats.org/presentationml/2006/main">
+  <p:cSld>
+    <p:spTree>
+      <p:nvGrpSpPr>
+        <p:cNvPr id="1" name=""/>
+        <p:cNvGrpSpPr/>
+        <p:nvPr/>
+      </p:nvGrpSpPr>
+      <p:grpSpPr>
+        <a:xfrm>
+          <a:off x="0" y="0"/>
+          <a:ext cx="0" cy="0"/>
+          <a:chOff x="0" y="0"/>
+          <a:chExt cx="0" cy="0"/>
+        </a:xfrm>
+      </p:grpSpPr>
+      <p:sp>
+        <p:nvSpPr>
+          <p:cNvPr id="2" name="Заголовок 1"/>
+          <p:cNvSpPr>
+            <a:spLocks noGrp="1"/>
+          </p:cNvSpPr>
+          <p:nvPr>
+            <p:ph type="title"/>
+          </p:nvPr>
+        </p:nvSpPr>
+        <p:spPr/>
+        <p:txBody>
+          <a:bodyPr/>
+          <a:lstStyle/>
+          <a:p>
+            <a:r>
+              <a:rPr lang="ru-RU" sz="2800" b="1" dirty="0">
+                <a:latin typeface="Roboto" panose="020B0604020202020204"/>
+              </a:rPr>
+              <a:t>Маршрутизация - реализация</a:t>
+            </a:r>
+            <a:endParaRPr lang="ru-RU" sz="2800" b="1" dirty="0">
+              <a:latin typeface="Roboto" panose="020B0604020202020204"/>
+            </a:endParaRPr>
+          </a:p>
+        </p:txBody>
+      </p:sp>
+      <p:sp>
+        <p:nvSpPr>
+          <p:cNvPr id="3" name="Текст 2"/>
+          <p:cNvSpPr>
+            <a:spLocks noGrp="1"/>
+          </p:cNvSpPr>
+          <p:nvPr>
+            <p:ph type="body" idx="1"/>
+          </p:nvPr>
+        </p:nvSpPr>
+        <p:spPr/>
+        <p:txBody>
+          <a:bodyPr>
+            <a:normAutofit/>
+          </a:bodyPr>
+          <a:lstStyle/>
+          <a:p>
+            <a:pPr marL="177796" indent="0">
+              <a:lnSpc>
+                <a:spcPct val="113000"/>
+              </a:lnSpc>
+              <a:spcBef>
+                <a:spcPts val="0"/>
+              </a:spcBef>
+              <a:buSzPts val="3100"/>
+              <a:buNone/>
+            </a:pPr>
+            <a:r>
+              <a:rPr lang="ru-RU" sz="2100" b="1" dirty="0" smtClean="0">
+                <a:solidFill>
+                  <a:srgbClr val="3F299A"/>
+                </a:solidFill>
+                <a:latin typeface="Roboto"/>
+                <a:ea typeface="Roboto"/>
+                <a:cs typeface="Roboto"/>
+              </a:rPr>
+              <a:t>1. </a:t>
+            </a:r>
+            <a:r>
+              <a:rPr lang="ru-RU" sz="1400" dirty="0" smtClean="0">
+                <a:latin typeface="Roboto" panose="020B0604020202020204"/>
+                <a:ea typeface="+mj-ea"/>
+                <a:cs typeface="+mj-cs"/>
+              </a:rPr>
+              <a:t>Маршрут по умолчанию на следующий роутер</a:t>
+            </a:r>
+          </a:p>
+          <a:p>
+            <a:pPr marL="177796" indent="0">
+              <a:lnSpc>
+                <a:spcPct val="114000"/>
+              </a:lnSpc>
+              <a:spcBef>
+                <a:spcPts val="0"/>
+              </a:spcBef>
+              <a:buSzPts val="3100"/>
+              <a:buNone/>
+            </a:pPr>
+            <a:r>
+              <a:rPr lang="ru-RU" sz="2100" b="1" dirty="0" smtClean="0">
+                <a:solidFill>
+                  <a:srgbClr val="3F299A"/>
+                </a:solidFill>
+                <a:latin typeface="Roboto"/>
+                <a:ea typeface="Roboto"/>
+                <a:cs typeface="Roboto"/>
+              </a:rPr>
+              <a:t>2. </a:t>
+            </a:r>
+            <a:r>
+              <a:rPr lang="ru-RU" sz="1400" dirty="0" smtClean="0">
+                <a:latin typeface="Roboto" panose="020B0604020202020204"/>
+              </a:rPr>
+              <a:t>Область 56 (с уникальным </a:t>
+            </a:r>
+            <a:r>
+              <a:rPr lang="en-US" sz="1400" dirty="0" smtClean="0">
+                <a:latin typeface="Roboto" panose="020B0604020202020204"/>
+              </a:rPr>
+              <a:t>router-id</a:t>
+            </a:r>
+            <a:r>
+              <a:rPr lang="ru-RU" sz="1400" dirty="0" smtClean="0">
+                <a:latin typeface="Roboto" panose="020B0604020202020204"/>
+              </a:rPr>
+              <a:t>)</a:t>
+            </a:r>
+          </a:p>
+          <a:p>
+            <a:pPr marL="177796" indent="0">
+              <a:lnSpc>
+                <a:spcPct val="114000"/>
+              </a:lnSpc>
+              <a:spcBef>
+                <a:spcPts val="0"/>
+              </a:spcBef>
+              <a:buSzPts val="3100"/>
+              <a:buNone/>
+            </a:pPr>
+            <a:r>
+              <a:rPr lang="ru-RU" sz="2100" b="1" dirty="0" smtClean="0">
+                <a:solidFill>
+                  <a:srgbClr val="3F299A"/>
+                </a:solidFill>
+                <a:latin typeface="Roboto"/>
+                <a:ea typeface="Roboto"/>
+                <a:cs typeface="Roboto"/>
+              </a:rPr>
+              <a:t>3. </a:t>
+            </a:r>
+            <a:r>
+              <a:rPr lang="ru-RU" sz="1400" dirty="0" smtClean="0">
+                <a:latin typeface="Roboto" panose="020B0604020202020204"/>
+                <a:ea typeface="+mj-ea"/>
+                <a:cs typeface="+mj-cs"/>
+              </a:rPr>
+              <a:t>Порт (с «</a:t>
+            </a:r>
+            <a:r>
+              <a:rPr lang="en-US" sz="1400" dirty="0" err="1" smtClean="0">
+                <a:latin typeface="Roboto" panose="020B0604020202020204"/>
+                <a:ea typeface="+mj-ea"/>
+                <a:cs typeface="+mj-cs"/>
+              </a:rPr>
+              <a:t>ip</a:t>
+            </a:r>
+            <a:r>
+              <a:rPr lang="ru-RU" sz="1400" dirty="0" smtClean="0">
+                <a:latin typeface="Roboto" panose="020B0604020202020204"/>
+                <a:ea typeface="+mj-ea"/>
+                <a:cs typeface="+mj-cs"/>
+              </a:rPr>
+              <a:t> сетью») добавленный в 56 </a:t>
+            </a:r>
+            <a:r>
+              <a:rPr lang="en-US" sz="1400" dirty="0" smtClean="0">
+                <a:latin typeface="Roboto" panose="020B0604020202020204"/>
+                <a:ea typeface="+mj-ea"/>
+                <a:cs typeface="+mj-cs"/>
+              </a:rPr>
+              <a:t>ospf</a:t>
+            </a:r>
+            <a:r>
+              <a:rPr lang="ru-RU" sz="1400" dirty="0" smtClean="0">
+                <a:latin typeface="Roboto" panose="020B0604020202020204"/>
+                <a:ea typeface="+mj-ea"/>
+                <a:cs typeface="+mj-cs"/>
+              </a:rPr>
+              <a:t> зону 0</a:t>
+            </a:r>
+          </a:p>
+          <a:p>
+            <a:pPr marL="177796" indent="0">
+              <a:lnSpc>
+                <a:spcPct val="114000"/>
+              </a:lnSpc>
+              <a:spcBef>
+                <a:spcPts val="0"/>
+              </a:spcBef>
+              <a:buSzPts val="3100"/>
+              <a:buNone/>
+            </a:pPr>
+            <a:endParaRPr lang="ru-RU" sz="1400" dirty="0" smtClean="0">
+              <a:latin typeface="Roboto" panose="020B0604020202020204"/>
+              <a:ea typeface="+mj-ea"/>
+              <a:cs typeface="+mj-cs"/>
+            </a:endParaRPr>
+          </a:p>
+        </p:txBody>
+      </p:sp>
+      <p:pic>
+        <p:nvPicPr>
+          <p:cNvPr id="4" name="Рисунок 3"/>
+          <p:cNvPicPr>
+            <a:picLocks noChangeAspect="1"/>
+          </p:cNvPicPr>
+          <p:nvPr/>
+        </p:nvPicPr>
+        <p:blipFill>
+          <a:blip r:embed="rId2"/>
+          <a:stretch>
+            <a:fillRect/>
+          </a:stretch>
+        </p:blipFill>
+        <p:spPr>
+          <a:xfrm>
+            <a:off x="937721" y="3100252"/>
+            <a:ext cx="4476750" cy="3268424"/>
+          </a:xfrm>
+          <a:prstGeom prst="rect">
+            <a:avLst/>
+          </a:prstGeom>
+        </p:spPr>
+      </p:pic>
+      <p:pic>
+        <p:nvPicPr>
+          <p:cNvPr id="5" name="Рисунок 4"/>
+          <p:cNvPicPr>
+            <a:picLocks noChangeAspect="1"/>
+          </p:cNvPicPr>
+          <p:nvPr/>
+        </p:nvPicPr>
+        <p:blipFill>
+          <a:blip r:embed="rId3"/>
+          <a:stretch>
+            <a:fillRect/>
+          </a:stretch>
+        </p:blipFill>
+        <p:spPr>
+          <a:xfrm>
+            <a:off x="5684792" y="2109739"/>
+            <a:ext cx="5734050" cy="3381375"/>
+          </a:xfrm>
+          <a:prstGeom prst="rect">
+            <a:avLst/>
+          </a:prstGeom>
+        </p:spPr>
+      </p:pic>
+    </p:spTree>
+    <p:extLst>
+      <p:ext uri="{BB962C8B-B14F-4D97-AF65-F5344CB8AC3E}">
+        <p14:creationId xmlns:p14="http://schemas.microsoft.com/office/powerpoint/2010/main" val="806665881"/>
+      </p:ext>
+    </p:extLst>
+  </p:cSld>
+  <p:clrMapOvr>
+    <a:masterClrMapping/>
+  </p:clrMapOvr>
+  <p:timing>
+    <p:tnLst>
+      <p:par>
+        <p:cTn id="1" dur="indefinite" restart="never" nodeType="tmRoot"/>
+      </p:par>
+    </p:tnLst>
+  </p:timing>
 </p:sld>
 </file>
 
@@ -6397,8 +9115,8 @@
         </p:nvSpPr>
         <p:spPr>
           <a:xfrm>
-            <a:off x="992167" y="1970277"/>
-            <a:ext cx="10580400" cy="1723380"/>
+            <a:off x="992167" y="2321078"/>
+            <a:ext cx="10580400" cy="1021778"/>
           </a:xfrm>
           <a:prstGeom prst="rect">
             <a:avLst/>
@@ -6417,7 +9135,7 @@
               <a:buSzPts val="1100"/>
             </a:pPr>
             <a:r>
-              <a:rPr lang="ru" sz="5333">
+              <a:rPr lang="ru" sz="2800" dirty="0">
                 <a:solidFill>
                   <a:schemeClr val="dk1"/>
                 </a:solidFill>
@@ -6426,7 +9144,7 @@
               </a:rPr>
               <a:t>Меня хорошо видно</a:t>
             </a:r>
-            <a:endParaRPr sz="5333">
+            <a:endParaRPr sz="2800" dirty="0">
               <a:solidFill>
                 <a:schemeClr val="dk1"/>
               </a:solidFill>
@@ -6436,7 +9154,7 @@
           </a:p>
           <a:p>
             <a:r>
-              <a:rPr lang="ru" sz="5333">
+              <a:rPr lang="ru" sz="2800" dirty="0">
                 <a:solidFill>
                   <a:schemeClr val="dk1"/>
                 </a:solidFill>
@@ -6445,7 +9163,7 @@
               </a:rPr>
               <a:t>&amp; слышно?</a:t>
             </a:r>
-            <a:endParaRPr sz="5333">
+            <a:endParaRPr sz="2800" dirty="0">
               <a:solidFill>
                 <a:schemeClr val="dk1"/>
               </a:solidFill>
@@ -6521,6 +9239,2357 @@
   <p:clrMapOvr>
     <a:masterClrMapping/>
   </p:clrMapOvr>
+  <p:timing>
+    <p:tnLst>
+      <p:par>
+        <p:cTn id="1" dur="indefinite" restart="never" nodeType="tmRoot"/>
+      </p:par>
+    </p:tnLst>
+  </p:timing>
+</p:sld>
+</file>
+
+<file path=ppt/slides/slide20.xml><?xml version="1.0" encoding="utf-8"?>
+<p:sld xmlns:a="http://schemas.openxmlformats.org/drawingml/2006/main" xmlns:r="http://schemas.openxmlformats.org/officeDocument/2006/relationships" xmlns:p="http://schemas.openxmlformats.org/presentationml/2006/main">
+  <p:cSld>
+    <p:spTree>
+      <p:nvGrpSpPr>
+        <p:cNvPr id="1" name=""/>
+        <p:cNvGrpSpPr/>
+        <p:nvPr/>
+      </p:nvGrpSpPr>
+      <p:grpSpPr>
+        <a:xfrm>
+          <a:off x="0" y="0"/>
+          <a:ext cx="0" cy="0"/>
+          <a:chOff x="0" y="0"/>
+          <a:chExt cx="0" cy="0"/>
+        </a:xfrm>
+      </p:grpSpPr>
+      <p:sp>
+        <p:nvSpPr>
+          <p:cNvPr id="2" name="Заголовок 1"/>
+          <p:cNvSpPr>
+            <a:spLocks noGrp="1"/>
+          </p:cNvSpPr>
+          <p:nvPr>
+            <p:ph type="title"/>
+          </p:nvPr>
+        </p:nvSpPr>
+        <p:spPr/>
+        <p:txBody>
+          <a:bodyPr/>
+          <a:lstStyle/>
+          <a:p>
+            <a:r>
+              <a:rPr lang="en-US" sz="2800" b="1" dirty="0">
+                <a:latin typeface="Roboto" panose="020B0604020202020204"/>
+              </a:rPr>
+              <a:t>ACL – </a:t>
+            </a:r>
+            <a:r>
+              <a:rPr lang="ru-RU" sz="2800" b="1" dirty="0">
+                <a:latin typeface="Roboto" panose="020B0604020202020204"/>
+              </a:rPr>
+              <a:t>листы контроля доступа</a:t>
+            </a:r>
+            <a:endParaRPr lang="ru-RU" sz="2800" b="1" dirty="0">
+              <a:latin typeface="Roboto" panose="020B0604020202020204"/>
+            </a:endParaRPr>
+          </a:p>
+        </p:txBody>
+      </p:sp>
+      <p:sp>
+        <p:nvSpPr>
+          <p:cNvPr id="3" name="Текст 2"/>
+          <p:cNvSpPr>
+            <a:spLocks noGrp="1"/>
+          </p:cNvSpPr>
+          <p:nvPr>
+            <p:ph type="body" idx="1"/>
+          </p:nvPr>
+        </p:nvSpPr>
+        <p:spPr/>
+        <p:txBody>
+          <a:bodyPr>
+            <a:normAutofit/>
+          </a:bodyPr>
+          <a:lstStyle/>
+          <a:p>
+            <a:pPr marL="177796" indent="0">
+              <a:lnSpc>
+                <a:spcPct val="113000"/>
+              </a:lnSpc>
+              <a:spcBef>
+                <a:spcPts val="0"/>
+              </a:spcBef>
+              <a:buSzPts val="3100"/>
+              <a:buNone/>
+            </a:pPr>
+            <a:r>
+              <a:rPr lang="ru-RU" sz="2100" b="1" dirty="0">
+                <a:solidFill>
+                  <a:srgbClr val="3F299A"/>
+                </a:solidFill>
+                <a:latin typeface="Roboto"/>
+                <a:ea typeface="Roboto"/>
+                <a:cs typeface="Roboto"/>
+              </a:rPr>
+              <a:t>1. </a:t>
+            </a:r>
+            <a:r>
+              <a:rPr lang="ru-RU" sz="1400" dirty="0" smtClean="0">
+                <a:latin typeface="Roboto" panose="020B0604020202020204"/>
+                <a:ea typeface="+mj-ea"/>
+                <a:cs typeface="+mj-cs"/>
+              </a:rPr>
+              <a:t>Разграничение доступа</a:t>
+            </a:r>
+            <a:endParaRPr lang="ru-RU" sz="1400" dirty="0">
+              <a:latin typeface="Roboto" panose="020B0604020202020204"/>
+              <a:ea typeface="+mj-ea"/>
+              <a:cs typeface="+mj-cs"/>
+            </a:endParaRPr>
+          </a:p>
+          <a:p>
+            <a:pPr marL="177796" indent="0">
+              <a:lnSpc>
+                <a:spcPct val="114000"/>
+              </a:lnSpc>
+              <a:spcBef>
+                <a:spcPts val="0"/>
+              </a:spcBef>
+              <a:buSzPts val="3100"/>
+              <a:buNone/>
+            </a:pPr>
+            <a:r>
+              <a:rPr lang="ru-RU" sz="2100" b="1" dirty="0">
+                <a:solidFill>
+                  <a:srgbClr val="3F299A"/>
+                </a:solidFill>
+                <a:latin typeface="Roboto"/>
+                <a:ea typeface="Roboto"/>
+                <a:cs typeface="Roboto"/>
+              </a:rPr>
+              <a:t>2. </a:t>
+            </a:r>
+            <a:r>
+              <a:rPr lang="ru-RU" sz="1400" dirty="0" smtClean="0">
+                <a:latin typeface="Roboto" panose="020B0604020202020204"/>
+              </a:rPr>
+              <a:t>Безопасность</a:t>
+            </a:r>
+          </a:p>
+          <a:p>
+            <a:pPr marL="177796" indent="0">
+              <a:lnSpc>
+                <a:spcPct val="114000"/>
+              </a:lnSpc>
+              <a:spcBef>
+                <a:spcPts val="0"/>
+              </a:spcBef>
+              <a:buSzPts val="3100"/>
+              <a:buNone/>
+            </a:pPr>
+            <a:r>
+              <a:rPr lang="ru-RU" sz="2100" b="1" dirty="0" smtClean="0">
+                <a:solidFill>
+                  <a:srgbClr val="3F299A"/>
+                </a:solidFill>
+                <a:latin typeface="Roboto"/>
+                <a:ea typeface="Roboto"/>
+                <a:cs typeface="Roboto"/>
+              </a:rPr>
+              <a:t>3</a:t>
+            </a:r>
+            <a:r>
+              <a:rPr lang="ru-RU" sz="2100" b="1" dirty="0">
+                <a:solidFill>
+                  <a:srgbClr val="3F299A"/>
+                </a:solidFill>
+                <a:latin typeface="Roboto"/>
+                <a:ea typeface="Roboto"/>
+                <a:cs typeface="Roboto"/>
+              </a:rPr>
+              <a:t>. </a:t>
+            </a:r>
+            <a:r>
+              <a:rPr lang="ru-RU" sz="1400" dirty="0" smtClean="0">
+                <a:latin typeface="Roboto" panose="020B0604020202020204"/>
+                <a:ea typeface="+mj-ea"/>
+                <a:cs typeface="+mj-cs"/>
+              </a:rPr>
+              <a:t>Фильтрация трафика</a:t>
+            </a:r>
+          </a:p>
+          <a:p>
+            <a:pPr marL="177796" indent="0">
+              <a:lnSpc>
+                <a:spcPct val="114000"/>
+              </a:lnSpc>
+              <a:spcBef>
+                <a:spcPts val="0"/>
+              </a:spcBef>
+              <a:buSzPts val="3100"/>
+              <a:buNone/>
+            </a:pPr>
+            <a:r>
+              <a:rPr lang="ru-RU" sz="2100" b="1" dirty="0">
+                <a:solidFill>
+                  <a:srgbClr val="3F299A"/>
+                </a:solidFill>
+                <a:latin typeface="Roboto"/>
+                <a:ea typeface="Roboto"/>
+                <a:cs typeface="Roboto"/>
+              </a:rPr>
+              <a:t>4</a:t>
+            </a:r>
+            <a:r>
+              <a:rPr lang="ru-RU" sz="2100" b="1" dirty="0" smtClean="0">
+                <a:solidFill>
+                  <a:srgbClr val="3F299A"/>
+                </a:solidFill>
+                <a:latin typeface="Roboto"/>
+                <a:ea typeface="Roboto"/>
+                <a:cs typeface="Roboto"/>
+              </a:rPr>
+              <a:t>. </a:t>
+            </a:r>
+            <a:r>
+              <a:rPr lang="ru-RU" sz="1400" dirty="0" err="1" smtClean="0">
+                <a:latin typeface="Roboto" panose="020B0604020202020204"/>
+                <a:ea typeface="+mj-ea"/>
+                <a:cs typeface="+mj-cs"/>
+              </a:rPr>
+              <a:t>Приоритизация</a:t>
+            </a:r>
+            <a:r>
+              <a:rPr lang="ru-RU" sz="1400" dirty="0" smtClean="0">
+                <a:latin typeface="Roboto" panose="020B0604020202020204"/>
+                <a:ea typeface="+mj-ea"/>
+                <a:cs typeface="+mj-cs"/>
+              </a:rPr>
+              <a:t> трафика ( + ограничение трафика)</a:t>
+            </a:r>
+            <a:endParaRPr lang="ru-RU" sz="1400" dirty="0">
+              <a:latin typeface="Roboto" panose="020B0604020202020204"/>
+              <a:ea typeface="+mj-ea"/>
+              <a:cs typeface="+mj-cs"/>
+            </a:endParaRPr>
+          </a:p>
+          <a:p>
+            <a:pPr marL="177796" indent="0">
+              <a:lnSpc>
+                <a:spcPct val="114000"/>
+              </a:lnSpc>
+              <a:spcBef>
+                <a:spcPts val="0"/>
+              </a:spcBef>
+              <a:buSzPts val="3100"/>
+              <a:buNone/>
+            </a:pPr>
+            <a:endParaRPr lang="ru-RU" sz="1400" dirty="0" smtClean="0">
+              <a:latin typeface="Roboto" panose="020B0604020202020204"/>
+              <a:ea typeface="+mj-ea"/>
+              <a:cs typeface="+mj-cs"/>
+            </a:endParaRPr>
+          </a:p>
+        </p:txBody>
+      </p:sp>
+    </p:spTree>
+    <p:extLst>
+      <p:ext uri="{BB962C8B-B14F-4D97-AF65-F5344CB8AC3E}">
+        <p14:creationId xmlns:p14="http://schemas.microsoft.com/office/powerpoint/2010/main" val="293723317"/>
+      </p:ext>
+    </p:extLst>
+  </p:cSld>
+  <p:clrMapOvr>
+    <a:masterClrMapping/>
+  </p:clrMapOvr>
+  <p:timing>
+    <p:tnLst>
+      <p:par>
+        <p:cTn id="1" dur="indefinite" restart="never" nodeType="tmRoot"/>
+      </p:par>
+    </p:tnLst>
+  </p:timing>
+</p:sld>
+</file>
+
+<file path=ppt/slides/slide21.xml><?xml version="1.0" encoding="utf-8"?>
+<p:sld xmlns:a="http://schemas.openxmlformats.org/drawingml/2006/main" xmlns:r="http://schemas.openxmlformats.org/officeDocument/2006/relationships" xmlns:p="http://schemas.openxmlformats.org/presentationml/2006/main">
+  <p:cSld>
+    <p:spTree>
+      <p:nvGrpSpPr>
+        <p:cNvPr id="1" name=""/>
+        <p:cNvGrpSpPr/>
+        <p:nvPr/>
+      </p:nvGrpSpPr>
+      <p:grpSpPr>
+        <a:xfrm>
+          <a:off x="0" y="0"/>
+          <a:ext cx="0" cy="0"/>
+          <a:chOff x="0" y="0"/>
+          <a:chExt cx="0" cy="0"/>
+        </a:xfrm>
+      </p:grpSpPr>
+      <p:sp>
+        <p:nvSpPr>
+          <p:cNvPr id="2" name="Заголовок 1"/>
+          <p:cNvSpPr>
+            <a:spLocks noGrp="1"/>
+          </p:cNvSpPr>
+          <p:nvPr>
+            <p:ph type="title"/>
+          </p:nvPr>
+        </p:nvSpPr>
+        <p:spPr/>
+        <p:txBody>
+          <a:bodyPr/>
+          <a:lstStyle/>
+          <a:p>
+            <a:r>
+              <a:rPr lang="en-US" sz="2800" b="1" dirty="0">
+                <a:latin typeface="Roboto" panose="020B0604020202020204"/>
+              </a:rPr>
+              <a:t>ACL – </a:t>
+            </a:r>
+            <a:r>
+              <a:rPr lang="ru-RU" sz="2800" b="1" dirty="0">
+                <a:latin typeface="Roboto" panose="020B0604020202020204"/>
+              </a:rPr>
+              <a:t>реализация</a:t>
+            </a:r>
+            <a:endParaRPr lang="ru-RU" sz="2800" b="1" dirty="0">
+              <a:latin typeface="Roboto" panose="020B0604020202020204"/>
+            </a:endParaRPr>
+          </a:p>
+        </p:txBody>
+      </p:sp>
+      <p:sp>
+        <p:nvSpPr>
+          <p:cNvPr id="3" name="Текст 2"/>
+          <p:cNvSpPr>
+            <a:spLocks noGrp="1"/>
+          </p:cNvSpPr>
+          <p:nvPr>
+            <p:ph type="body" idx="1"/>
+          </p:nvPr>
+        </p:nvSpPr>
+        <p:spPr/>
+        <p:txBody>
+          <a:bodyPr>
+            <a:normAutofit/>
+          </a:bodyPr>
+          <a:lstStyle/>
+          <a:p>
+            <a:pPr marL="177796" indent="0">
+              <a:lnSpc>
+                <a:spcPct val="113000"/>
+              </a:lnSpc>
+              <a:spcBef>
+                <a:spcPts val="0"/>
+              </a:spcBef>
+              <a:buSzPts val="3100"/>
+              <a:buNone/>
+            </a:pPr>
+            <a:r>
+              <a:rPr lang="ru-RU" sz="2100" b="1" dirty="0">
+                <a:solidFill>
+                  <a:srgbClr val="3F299A"/>
+                </a:solidFill>
+                <a:latin typeface="Roboto"/>
+                <a:ea typeface="Roboto"/>
+                <a:cs typeface="Roboto"/>
+              </a:rPr>
+              <a:t>1. </a:t>
+            </a:r>
+            <a:r>
+              <a:rPr lang="ru-RU" sz="1400" dirty="0" smtClean="0">
+                <a:latin typeface="Roboto" panose="020B0604020202020204"/>
+                <a:ea typeface="+mj-ea"/>
+                <a:cs typeface="+mj-cs"/>
+              </a:rPr>
+              <a:t>Стандартный лист создан для </a:t>
+            </a:r>
+            <a:r>
+              <a:rPr lang="en-US" sz="1400" dirty="0" smtClean="0">
+                <a:latin typeface="Roboto" panose="020B0604020202020204"/>
+                <a:ea typeface="+mj-ea"/>
+                <a:cs typeface="+mj-cs"/>
+              </a:rPr>
+              <a:t>NAT</a:t>
+            </a:r>
+            <a:endParaRPr lang="ru-RU" sz="1400" dirty="0">
+              <a:latin typeface="Roboto" panose="020B0604020202020204"/>
+              <a:ea typeface="+mj-ea"/>
+              <a:cs typeface="+mj-cs"/>
+            </a:endParaRPr>
+          </a:p>
+          <a:p>
+            <a:pPr marL="177796" indent="0">
+              <a:lnSpc>
+                <a:spcPct val="114000"/>
+              </a:lnSpc>
+              <a:spcBef>
+                <a:spcPts val="0"/>
+              </a:spcBef>
+              <a:buSzPts val="3100"/>
+              <a:buNone/>
+            </a:pPr>
+            <a:r>
+              <a:rPr lang="ru-RU" sz="2100" b="1" dirty="0">
+                <a:solidFill>
+                  <a:srgbClr val="3F299A"/>
+                </a:solidFill>
+                <a:latin typeface="Roboto"/>
+                <a:ea typeface="Roboto"/>
+                <a:cs typeface="Roboto"/>
+              </a:rPr>
+              <a:t>2. </a:t>
+            </a:r>
+            <a:r>
+              <a:rPr lang="ru-RU" sz="1400" dirty="0" smtClean="0">
+                <a:latin typeface="Roboto" panose="020B0604020202020204"/>
+              </a:rPr>
+              <a:t>Расширенный лист запрет на </a:t>
+            </a:r>
+            <a:r>
+              <a:rPr lang="en-US" sz="1400" dirty="0" smtClean="0">
+                <a:latin typeface="Roboto" panose="020B0604020202020204"/>
+              </a:rPr>
+              <a:t>80 </a:t>
+            </a:r>
+            <a:r>
+              <a:rPr lang="ru-RU" sz="1400" dirty="0" smtClean="0">
+                <a:latin typeface="Roboto" panose="020B0604020202020204"/>
+              </a:rPr>
+              <a:t>порт для </a:t>
+            </a:r>
+            <a:r>
+              <a:rPr lang="en-US" sz="1400" dirty="0" smtClean="0">
+                <a:latin typeface="Roboto" panose="020B0604020202020204"/>
+              </a:rPr>
+              <a:t>10.0.2.2</a:t>
+            </a:r>
+            <a:endParaRPr lang="ru-RU" sz="1400" dirty="0" smtClean="0">
+              <a:latin typeface="Roboto" panose="020B0604020202020204"/>
+            </a:endParaRPr>
+          </a:p>
+          <a:p>
+            <a:pPr marL="177796" indent="0">
+              <a:lnSpc>
+                <a:spcPct val="114000"/>
+              </a:lnSpc>
+              <a:spcBef>
+                <a:spcPts val="0"/>
+              </a:spcBef>
+              <a:buSzPts val="3100"/>
+              <a:buNone/>
+            </a:pPr>
+            <a:r>
+              <a:rPr lang="ru-RU" sz="2100" b="1" dirty="0" smtClean="0">
+                <a:solidFill>
+                  <a:srgbClr val="3F299A"/>
+                </a:solidFill>
+                <a:latin typeface="Roboto"/>
+                <a:ea typeface="Roboto"/>
+                <a:cs typeface="Roboto"/>
+              </a:rPr>
+              <a:t>3</a:t>
+            </a:r>
+            <a:r>
+              <a:rPr lang="ru-RU" sz="2100" b="1" dirty="0">
+                <a:solidFill>
+                  <a:srgbClr val="3F299A"/>
+                </a:solidFill>
+                <a:latin typeface="Roboto"/>
+                <a:ea typeface="Roboto"/>
+                <a:cs typeface="Roboto"/>
+              </a:rPr>
+              <a:t>. </a:t>
+            </a:r>
+            <a:r>
+              <a:rPr lang="ru-RU" sz="1400" dirty="0">
+                <a:latin typeface="Roboto" panose="020B0604020202020204"/>
+              </a:rPr>
+              <a:t>Расширенный лист </a:t>
+            </a:r>
+            <a:r>
+              <a:rPr lang="ru-RU" sz="1400" dirty="0" smtClean="0">
+                <a:latin typeface="Roboto" panose="020B0604020202020204"/>
+              </a:rPr>
+              <a:t>разрешено </a:t>
+            </a:r>
+            <a:r>
+              <a:rPr lang="ru-RU" sz="1400" dirty="0">
+                <a:latin typeface="Roboto" panose="020B0604020202020204"/>
+              </a:rPr>
+              <a:t>на </a:t>
+            </a:r>
+            <a:r>
+              <a:rPr lang="en-US" sz="1400" dirty="0" smtClean="0">
+                <a:latin typeface="Roboto" panose="020B0604020202020204"/>
+              </a:rPr>
+              <a:t>80</a:t>
+            </a:r>
+            <a:r>
+              <a:rPr lang="ru-RU" sz="1400" dirty="0" smtClean="0">
+                <a:latin typeface="Roboto" panose="020B0604020202020204"/>
+              </a:rPr>
+              <a:t> и 8080</a:t>
+            </a:r>
+            <a:r>
+              <a:rPr lang="en-US" sz="1400" dirty="0" smtClean="0">
+                <a:latin typeface="Roboto" panose="020B0604020202020204"/>
+              </a:rPr>
+              <a:t> </a:t>
+            </a:r>
+            <a:r>
+              <a:rPr lang="ru-RU" sz="1400" dirty="0" smtClean="0">
+                <a:latin typeface="Roboto" panose="020B0604020202020204"/>
+              </a:rPr>
+              <a:t>порты </a:t>
+            </a:r>
+            <a:r>
+              <a:rPr lang="ru-RU" sz="1400" dirty="0">
+                <a:latin typeface="Roboto" panose="020B0604020202020204"/>
+              </a:rPr>
+              <a:t>для </a:t>
+            </a:r>
+            <a:r>
+              <a:rPr lang="ru-RU" sz="1400" dirty="0" smtClean="0">
+                <a:latin typeface="Roboto" panose="020B0604020202020204"/>
+              </a:rPr>
+              <a:t>остальных</a:t>
+            </a:r>
+          </a:p>
+          <a:p>
+            <a:pPr marL="177796" indent="0">
+              <a:lnSpc>
+                <a:spcPct val="114000"/>
+              </a:lnSpc>
+              <a:spcBef>
+                <a:spcPts val="0"/>
+              </a:spcBef>
+              <a:buSzPts val="3100"/>
+              <a:buNone/>
+            </a:pPr>
+            <a:r>
+              <a:rPr lang="en-US" sz="1400" dirty="0" smtClean="0">
+                <a:latin typeface="Roboto" panose="020B0604020202020204"/>
+              </a:rPr>
+              <a:t>10.0.</a:t>
+            </a:r>
+            <a:r>
+              <a:rPr lang="ru-RU" sz="1400" dirty="0" smtClean="0">
+                <a:latin typeface="Roboto" panose="020B0604020202020204"/>
+              </a:rPr>
+              <a:t>0</a:t>
+            </a:r>
+            <a:r>
+              <a:rPr lang="en-US" sz="1400" dirty="0" smtClean="0">
+                <a:latin typeface="Roboto" panose="020B0604020202020204"/>
+              </a:rPr>
+              <a:t>.</a:t>
+            </a:r>
+            <a:r>
+              <a:rPr lang="ru-RU" sz="1400" dirty="0" smtClean="0">
+                <a:latin typeface="Roboto" panose="020B0604020202020204"/>
+              </a:rPr>
+              <a:t>0</a:t>
+            </a:r>
+            <a:endParaRPr lang="ru-RU" sz="1400" dirty="0">
+              <a:latin typeface="Roboto" panose="020B0604020202020204"/>
+            </a:endParaRPr>
+          </a:p>
+          <a:p>
+            <a:pPr marL="177796" indent="0">
+              <a:lnSpc>
+                <a:spcPct val="114000"/>
+              </a:lnSpc>
+              <a:spcBef>
+                <a:spcPts val="0"/>
+              </a:spcBef>
+              <a:buSzPts val="3100"/>
+              <a:buNone/>
+            </a:pPr>
+            <a:r>
+              <a:rPr lang="ru-RU" sz="2100" b="1" dirty="0" smtClean="0">
+                <a:solidFill>
+                  <a:srgbClr val="3F299A"/>
+                </a:solidFill>
+                <a:latin typeface="Roboto"/>
+                <a:ea typeface="Roboto"/>
+                <a:cs typeface="Roboto"/>
+              </a:rPr>
+              <a:t>4. </a:t>
+            </a:r>
+            <a:r>
+              <a:rPr lang="ru-RU" sz="1400" dirty="0">
+                <a:latin typeface="Roboto" panose="020B0604020202020204"/>
+              </a:rPr>
+              <a:t>Расширенный лист разрешен </a:t>
+            </a:r>
+            <a:r>
+              <a:rPr lang="en-US" sz="1400" dirty="0">
+                <a:latin typeface="Roboto" panose="020B0604020202020204"/>
+              </a:rPr>
+              <a:t>OSPF</a:t>
+            </a:r>
+          </a:p>
+          <a:p>
+            <a:pPr marL="177796" indent="0">
+              <a:lnSpc>
+                <a:spcPct val="114000"/>
+              </a:lnSpc>
+              <a:spcBef>
+                <a:spcPts val="0"/>
+              </a:spcBef>
+              <a:buSzPts val="3100"/>
+              <a:buNone/>
+            </a:pPr>
+            <a:endParaRPr lang="ru-RU" sz="1400" dirty="0" smtClean="0">
+              <a:latin typeface="Roboto" panose="020B0604020202020204"/>
+              <a:ea typeface="+mj-ea"/>
+              <a:cs typeface="+mj-cs"/>
+            </a:endParaRPr>
+          </a:p>
+        </p:txBody>
+      </p:sp>
+      <p:pic>
+        <p:nvPicPr>
+          <p:cNvPr id="4" name="Рисунок 3"/>
+          <p:cNvPicPr>
+            <a:picLocks noChangeAspect="1"/>
+          </p:cNvPicPr>
+          <p:nvPr/>
+        </p:nvPicPr>
+        <p:blipFill>
+          <a:blip r:embed="rId2"/>
+          <a:stretch>
+            <a:fillRect/>
+          </a:stretch>
+        </p:blipFill>
+        <p:spPr>
+          <a:xfrm>
+            <a:off x="6749142" y="1975995"/>
+            <a:ext cx="4685619" cy="4407127"/>
+          </a:xfrm>
+          <a:prstGeom prst="rect">
+            <a:avLst/>
+          </a:prstGeom>
+        </p:spPr>
+      </p:pic>
+    </p:spTree>
+    <p:extLst>
+      <p:ext uri="{BB962C8B-B14F-4D97-AF65-F5344CB8AC3E}">
+        <p14:creationId xmlns:p14="http://schemas.microsoft.com/office/powerpoint/2010/main" val="1427957373"/>
+      </p:ext>
+    </p:extLst>
+  </p:cSld>
+  <p:clrMapOvr>
+    <a:masterClrMapping/>
+  </p:clrMapOvr>
+  <p:timing>
+    <p:tnLst>
+      <p:par>
+        <p:cTn id="1" dur="indefinite" restart="never" nodeType="tmRoot"/>
+      </p:par>
+    </p:tnLst>
+  </p:timing>
+</p:sld>
+</file>
+
+<file path=ppt/slides/slide22.xml><?xml version="1.0" encoding="utf-8"?>
+<p:sld xmlns:a="http://schemas.openxmlformats.org/drawingml/2006/main" xmlns:r="http://schemas.openxmlformats.org/officeDocument/2006/relationships" xmlns:p="http://schemas.openxmlformats.org/presentationml/2006/main">
+  <p:cSld>
+    <p:spTree>
+      <p:nvGrpSpPr>
+        <p:cNvPr id="1" name=""/>
+        <p:cNvGrpSpPr/>
+        <p:nvPr/>
+      </p:nvGrpSpPr>
+      <p:grpSpPr>
+        <a:xfrm>
+          <a:off x="0" y="0"/>
+          <a:ext cx="0" cy="0"/>
+          <a:chOff x="0" y="0"/>
+          <a:chExt cx="0" cy="0"/>
+        </a:xfrm>
+      </p:grpSpPr>
+      <p:sp>
+        <p:nvSpPr>
+          <p:cNvPr id="2" name="Заголовок 1"/>
+          <p:cNvSpPr>
+            <a:spLocks noGrp="1"/>
+          </p:cNvSpPr>
+          <p:nvPr>
+            <p:ph type="title"/>
+          </p:nvPr>
+        </p:nvSpPr>
+        <p:spPr/>
+        <p:txBody>
+          <a:bodyPr/>
+          <a:lstStyle/>
+          <a:p>
+            <a:r>
+              <a:rPr lang="en-US" sz="2800" b="1" dirty="0">
+                <a:latin typeface="Roboto" panose="020B0604020202020204"/>
+              </a:rPr>
+              <a:t>NAT</a:t>
+            </a:r>
+            <a:endParaRPr lang="ru-RU" sz="2800" b="1" dirty="0">
+              <a:latin typeface="Roboto" panose="020B0604020202020204"/>
+            </a:endParaRPr>
+          </a:p>
+        </p:txBody>
+      </p:sp>
+      <p:sp>
+        <p:nvSpPr>
+          <p:cNvPr id="3" name="Текст 2"/>
+          <p:cNvSpPr>
+            <a:spLocks noGrp="1"/>
+          </p:cNvSpPr>
+          <p:nvPr>
+            <p:ph type="body" idx="1"/>
+          </p:nvPr>
+        </p:nvSpPr>
+        <p:spPr/>
+        <p:txBody>
+          <a:bodyPr>
+            <a:normAutofit/>
+          </a:bodyPr>
+          <a:lstStyle/>
+          <a:p>
+            <a:pPr marL="177796" indent="0">
+              <a:lnSpc>
+                <a:spcPct val="113000"/>
+              </a:lnSpc>
+              <a:spcBef>
+                <a:spcPts val="0"/>
+              </a:spcBef>
+              <a:buSzPts val="3100"/>
+              <a:buNone/>
+            </a:pPr>
+            <a:r>
+              <a:rPr lang="ru-RU" sz="2100" b="1" dirty="0">
+                <a:solidFill>
+                  <a:srgbClr val="3F299A"/>
+                </a:solidFill>
+                <a:latin typeface="Roboto"/>
+                <a:ea typeface="Roboto"/>
+                <a:cs typeface="Roboto"/>
+              </a:rPr>
+              <a:t>1. </a:t>
+            </a:r>
+            <a:r>
+              <a:rPr lang="ru-RU" sz="1400" dirty="0" smtClean="0">
+                <a:latin typeface="Roboto" panose="020B0604020202020204"/>
+                <a:ea typeface="+mj-ea"/>
+                <a:cs typeface="+mj-cs"/>
+              </a:rPr>
+              <a:t>Экономия публичных адресов</a:t>
+            </a:r>
+            <a:endParaRPr lang="ru-RU" sz="1400" dirty="0">
+              <a:latin typeface="Roboto" panose="020B0604020202020204"/>
+              <a:ea typeface="+mj-ea"/>
+              <a:cs typeface="+mj-cs"/>
+            </a:endParaRPr>
+          </a:p>
+          <a:p>
+            <a:pPr marL="177796" indent="0">
+              <a:lnSpc>
+                <a:spcPct val="114000"/>
+              </a:lnSpc>
+              <a:spcBef>
+                <a:spcPts val="0"/>
+              </a:spcBef>
+              <a:buSzPts val="3100"/>
+              <a:buNone/>
+            </a:pPr>
+            <a:r>
+              <a:rPr lang="ru-RU" sz="2100" b="1" dirty="0">
+                <a:solidFill>
+                  <a:srgbClr val="3F299A"/>
+                </a:solidFill>
+                <a:latin typeface="Roboto"/>
+                <a:ea typeface="Roboto"/>
+                <a:cs typeface="Roboto"/>
+              </a:rPr>
+              <a:t>2. </a:t>
+            </a:r>
+            <a:r>
+              <a:rPr lang="ru-RU" sz="1400" dirty="0" smtClean="0">
+                <a:latin typeface="Roboto" panose="020B0604020202020204"/>
+              </a:rPr>
+              <a:t>Преобразование </a:t>
+            </a:r>
+            <a:r>
+              <a:rPr lang="en-US" sz="1400" dirty="0" err="1" smtClean="0">
+                <a:latin typeface="Roboto" panose="020B0604020202020204"/>
+              </a:rPr>
+              <a:t>ip</a:t>
+            </a:r>
+            <a:r>
+              <a:rPr lang="en-US" sz="1400" dirty="0" smtClean="0">
+                <a:latin typeface="Roboto" panose="020B0604020202020204"/>
+              </a:rPr>
+              <a:t> </a:t>
+            </a:r>
+            <a:r>
+              <a:rPr lang="ru-RU" sz="1400" dirty="0" smtClean="0">
+                <a:latin typeface="Roboto" panose="020B0604020202020204"/>
+              </a:rPr>
+              <a:t>адресов</a:t>
+            </a:r>
+          </a:p>
+          <a:p>
+            <a:pPr marL="177796" indent="0">
+              <a:lnSpc>
+                <a:spcPct val="114000"/>
+              </a:lnSpc>
+              <a:spcBef>
+                <a:spcPts val="0"/>
+              </a:spcBef>
+              <a:buSzPts val="3100"/>
+              <a:buNone/>
+            </a:pPr>
+            <a:r>
+              <a:rPr lang="ru-RU" sz="2100" b="1" dirty="0" smtClean="0">
+                <a:solidFill>
+                  <a:srgbClr val="3F299A"/>
+                </a:solidFill>
+                <a:latin typeface="Roboto"/>
+                <a:ea typeface="Roboto"/>
+                <a:cs typeface="Roboto"/>
+              </a:rPr>
+              <a:t>3</a:t>
+            </a:r>
+            <a:r>
+              <a:rPr lang="ru-RU" sz="2100" b="1" dirty="0">
+                <a:solidFill>
+                  <a:srgbClr val="3F299A"/>
+                </a:solidFill>
+                <a:latin typeface="Roboto"/>
+                <a:ea typeface="Roboto"/>
+                <a:cs typeface="Roboto"/>
+              </a:rPr>
+              <a:t>. </a:t>
+            </a:r>
+            <a:r>
+              <a:rPr lang="ru-RU" sz="1400" dirty="0" smtClean="0">
+                <a:latin typeface="Roboto" panose="020B0604020202020204"/>
+                <a:ea typeface="+mj-ea"/>
+                <a:cs typeface="+mj-cs"/>
+              </a:rPr>
+              <a:t>Безопасность</a:t>
+            </a:r>
+          </a:p>
+          <a:p>
+            <a:pPr marL="177796" indent="0">
+              <a:lnSpc>
+                <a:spcPct val="114000"/>
+              </a:lnSpc>
+              <a:spcBef>
+                <a:spcPts val="0"/>
+              </a:spcBef>
+              <a:buSzPts val="3100"/>
+              <a:buNone/>
+            </a:pPr>
+            <a:endParaRPr lang="ru-RU" sz="1400" dirty="0" smtClean="0">
+              <a:latin typeface="Roboto" panose="020B0604020202020204"/>
+              <a:ea typeface="+mj-ea"/>
+              <a:cs typeface="+mj-cs"/>
+            </a:endParaRPr>
+          </a:p>
+        </p:txBody>
+      </p:sp>
+    </p:spTree>
+    <p:extLst>
+      <p:ext uri="{BB962C8B-B14F-4D97-AF65-F5344CB8AC3E}">
+        <p14:creationId xmlns:p14="http://schemas.microsoft.com/office/powerpoint/2010/main" val="1085908630"/>
+      </p:ext>
+    </p:extLst>
+  </p:cSld>
+  <p:clrMapOvr>
+    <a:masterClrMapping/>
+  </p:clrMapOvr>
+  <p:timing>
+    <p:tnLst>
+      <p:par>
+        <p:cTn id="1" dur="indefinite" restart="never" nodeType="tmRoot"/>
+      </p:par>
+    </p:tnLst>
+  </p:timing>
+</p:sld>
+</file>
+
+<file path=ppt/slides/slide23.xml><?xml version="1.0" encoding="utf-8"?>
+<p:sld xmlns:a="http://schemas.openxmlformats.org/drawingml/2006/main" xmlns:r="http://schemas.openxmlformats.org/officeDocument/2006/relationships" xmlns:p="http://schemas.openxmlformats.org/presentationml/2006/main">
+  <p:cSld>
+    <p:spTree>
+      <p:nvGrpSpPr>
+        <p:cNvPr id="1" name=""/>
+        <p:cNvGrpSpPr/>
+        <p:nvPr/>
+      </p:nvGrpSpPr>
+      <p:grpSpPr>
+        <a:xfrm>
+          <a:off x="0" y="0"/>
+          <a:ext cx="0" cy="0"/>
+          <a:chOff x="0" y="0"/>
+          <a:chExt cx="0" cy="0"/>
+        </a:xfrm>
+      </p:grpSpPr>
+      <p:sp>
+        <p:nvSpPr>
+          <p:cNvPr id="2" name="Заголовок 1"/>
+          <p:cNvSpPr>
+            <a:spLocks noGrp="1"/>
+          </p:cNvSpPr>
+          <p:nvPr>
+            <p:ph type="title"/>
+          </p:nvPr>
+        </p:nvSpPr>
+        <p:spPr/>
+        <p:txBody>
+          <a:bodyPr/>
+          <a:lstStyle/>
+          <a:p>
+            <a:r>
+              <a:rPr lang="en-US" sz="2800" b="1" dirty="0">
+                <a:latin typeface="Roboto" panose="020B0604020202020204"/>
+              </a:rPr>
+              <a:t>NAT</a:t>
+            </a:r>
+            <a:r>
+              <a:rPr lang="ru-RU" sz="2800" b="1" dirty="0">
+                <a:latin typeface="Roboto" panose="020B0604020202020204"/>
+              </a:rPr>
+              <a:t> – реализация</a:t>
+            </a:r>
+            <a:r>
+              <a:rPr lang="en-US" sz="2800" b="1" dirty="0">
+                <a:latin typeface="Roboto" panose="020B0604020202020204"/>
+              </a:rPr>
+              <a:t> </a:t>
+            </a:r>
+            <a:r>
+              <a:rPr lang="ru-RU" sz="2800" b="1" dirty="0">
+                <a:latin typeface="Roboto" panose="020B0604020202020204"/>
+              </a:rPr>
+              <a:t>«</a:t>
+            </a:r>
+            <a:r>
+              <a:rPr lang="en-US" sz="2800" b="1" dirty="0">
+                <a:latin typeface="Roboto" panose="020B0604020202020204"/>
+              </a:rPr>
+              <a:t>c </a:t>
+            </a:r>
+            <a:r>
+              <a:rPr lang="ru-RU" sz="2800" b="1" dirty="0">
+                <a:latin typeface="Roboto" panose="020B0604020202020204"/>
+              </a:rPr>
+              <a:t>перегрузкой»</a:t>
+            </a:r>
+            <a:r>
+              <a:rPr lang="en-US" sz="2800" b="1" dirty="0">
+                <a:latin typeface="Roboto" panose="020B0604020202020204"/>
+              </a:rPr>
+              <a:t> - PAT</a:t>
+            </a:r>
+            <a:endParaRPr lang="ru-RU" sz="2800" b="1" dirty="0">
+              <a:latin typeface="Roboto" panose="020B0604020202020204"/>
+            </a:endParaRPr>
+          </a:p>
+        </p:txBody>
+      </p:sp>
+      <p:sp>
+        <p:nvSpPr>
+          <p:cNvPr id="3" name="Текст 2"/>
+          <p:cNvSpPr>
+            <a:spLocks noGrp="1"/>
+          </p:cNvSpPr>
+          <p:nvPr>
+            <p:ph type="body" idx="1"/>
+          </p:nvPr>
+        </p:nvSpPr>
+        <p:spPr/>
+        <p:txBody>
+          <a:bodyPr>
+            <a:normAutofit/>
+          </a:bodyPr>
+          <a:lstStyle/>
+          <a:p>
+            <a:pPr marL="177796" indent="0">
+              <a:lnSpc>
+                <a:spcPct val="113000"/>
+              </a:lnSpc>
+              <a:spcBef>
+                <a:spcPts val="0"/>
+              </a:spcBef>
+              <a:buSzPts val="3100"/>
+              <a:buNone/>
+            </a:pPr>
+            <a:r>
+              <a:rPr lang="ru-RU" sz="2100" b="1" dirty="0">
+                <a:solidFill>
+                  <a:srgbClr val="3F299A"/>
+                </a:solidFill>
+                <a:latin typeface="Roboto"/>
+                <a:ea typeface="Roboto"/>
+                <a:cs typeface="Roboto"/>
+              </a:rPr>
+              <a:t>1. </a:t>
+            </a:r>
+            <a:r>
+              <a:rPr lang="ru-RU" sz="1400" dirty="0" smtClean="0">
+                <a:latin typeface="Roboto" panose="020B0604020202020204"/>
+                <a:ea typeface="+mj-ea"/>
+                <a:cs typeface="+mj-cs"/>
+              </a:rPr>
+              <a:t>Создан лист </a:t>
+            </a:r>
+            <a:r>
+              <a:rPr lang="en-US" sz="1400" dirty="0" smtClean="0">
+                <a:latin typeface="Roboto" panose="020B0604020202020204"/>
+                <a:ea typeface="+mj-ea"/>
+                <a:cs typeface="+mj-cs"/>
+              </a:rPr>
+              <a:t>1 c </a:t>
+            </a:r>
+            <a:r>
+              <a:rPr lang="en-US" sz="1400" dirty="0" err="1" smtClean="0">
+                <a:latin typeface="Roboto" panose="020B0604020202020204"/>
+                <a:ea typeface="+mj-ea"/>
+                <a:cs typeface="+mj-cs"/>
+              </a:rPr>
+              <a:t>ip</a:t>
+            </a:r>
+            <a:r>
+              <a:rPr lang="en-US" sz="1400" dirty="0" smtClean="0">
+                <a:latin typeface="Roboto" panose="020B0604020202020204"/>
+                <a:ea typeface="+mj-ea"/>
+                <a:cs typeface="+mj-cs"/>
+              </a:rPr>
+              <a:t> </a:t>
+            </a:r>
+            <a:r>
+              <a:rPr lang="ru-RU" sz="1400" dirty="0" smtClean="0">
+                <a:latin typeface="Roboto" panose="020B0604020202020204"/>
+                <a:ea typeface="+mj-ea"/>
+                <a:cs typeface="+mj-cs"/>
+              </a:rPr>
+              <a:t>которые будут преобразовываться</a:t>
+            </a:r>
+            <a:endParaRPr lang="ru-RU" sz="1400" dirty="0">
+              <a:latin typeface="Roboto" panose="020B0604020202020204"/>
+              <a:ea typeface="+mj-ea"/>
+              <a:cs typeface="+mj-cs"/>
+            </a:endParaRPr>
+          </a:p>
+          <a:p>
+            <a:pPr marL="177796" indent="0">
+              <a:lnSpc>
+                <a:spcPct val="114000"/>
+              </a:lnSpc>
+              <a:spcBef>
+                <a:spcPts val="0"/>
+              </a:spcBef>
+              <a:buSzPts val="3100"/>
+              <a:buNone/>
+            </a:pPr>
+            <a:r>
+              <a:rPr lang="ru-RU" sz="2100" b="1" dirty="0">
+                <a:solidFill>
+                  <a:srgbClr val="3F299A"/>
+                </a:solidFill>
+                <a:latin typeface="Roboto"/>
+                <a:ea typeface="Roboto"/>
+                <a:cs typeface="Roboto"/>
+              </a:rPr>
+              <a:t>2. </a:t>
+            </a:r>
+            <a:r>
+              <a:rPr lang="ru-RU" sz="1400" dirty="0" smtClean="0">
+                <a:latin typeface="Roboto" panose="020B0604020202020204"/>
+              </a:rPr>
+              <a:t>Заданы интерфейсы входящие и исходящий</a:t>
+            </a:r>
+          </a:p>
+          <a:p>
+            <a:pPr marL="177796" indent="0">
+              <a:lnSpc>
+                <a:spcPct val="114000"/>
+              </a:lnSpc>
+              <a:spcBef>
+                <a:spcPts val="0"/>
+              </a:spcBef>
+              <a:buSzPts val="3100"/>
+              <a:buNone/>
+            </a:pPr>
+            <a:r>
+              <a:rPr lang="ru-RU" sz="2100" b="1" dirty="0" smtClean="0">
+                <a:solidFill>
+                  <a:srgbClr val="3F299A"/>
+                </a:solidFill>
+                <a:latin typeface="Roboto"/>
+                <a:ea typeface="Roboto"/>
+                <a:cs typeface="Roboto"/>
+              </a:rPr>
+              <a:t>3</a:t>
+            </a:r>
+            <a:r>
+              <a:rPr lang="ru-RU" sz="2100" b="1" dirty="0">
+                <a:solidFill>
+                  <a:srgbClr val="3F299A"/>
+                </a:solidFill>
+                <a:latin typeface="Roboto"/>
+                <a:ea typeface="Roboto"/>
+                <a:cs typeface="Roboto"/>
+              </a:rPr>
+              <a:t>. </a:t>
+            </a:r>
+            <a:r>
+              <a:rPr lang="ru-RU" sz="1400" dirty="0" smtClean="0">
+                <a:latin typeface="Roboto" panose="020B0604020202020204"/>
+                <a:ea typeface="+mj-ea"/>
+                <a:cs typeface="+mj-cs"/>
+              </a:rPr>
+              <a:t>Задан интерфейс в </a:t>
+            </a:r>
+            <a:r>
+              <a:rPr lang="en-US" sz="1400" dirty="0" err="1" smtClean="0">
+                <a:latin typeface="Roboto" panose="020B0604020202020204"/>
+                <a:ea typeface="+mj-ea"/>
+                <a:cs typeface="+mj-cs"/>
+              </a:rPr>
+              <a:t>ip</a:t>
+            </a:r>
+            <a:r>
+              <a:rPr lang="en-US" sz="1400" dirty="0" smtClean="0">
+                <a:latin typeface="Roboto" panose="020B0604020202020204"/>
+                <a:ea typeface="+mj-ea"/>
+                <a:cs typeface="+mj-cs"/>
+              </a:rPr>
+              <a:t> </a:t>
+            </a:r>
+            <a:r>
+              <a:rPr lang="ru-RU" sz="1400" dirty="0" smtClean="0">
+                <a:latin typeface="Roboto" panose="020B0604020202020204"/>
+                <a:ea typeface="+mj-ea"/>
+                <a:cs typeface="+mj-cs"/>
+              </a:rPr>
+              <a:t>которого будет происходить </a:t>
+            </a:r>
+          </a:p>
+          <a:p>
+            <a:pPr marL="177796" indent="0">
+              <a:lnSpc>
+                <a:spcPct val="114000"/>
+              </a:lnSpc>
+              <a:spcBef>
+                <a:spcPts val="0"/>
+              </a:spcBef>
+              <a:buSzPts val="3100"/>
+              <a:buNone/>
+            </a:pPr>
+            <a:r>
+              <a:rPr lang="ru-RU" sz="1400" dirty="0" smtClean="0">
+                <a:latin typeface="Roboto" panose="020B0604020202020204"/>
+                <a:ea typeface="+mj-ea"/>
+                <a:cs typeface="+mj-cs"/>
+              </a:rPr>
+              <a:t>преобразование</a:t>
+            </a:r>
+          </a:p>
+          <a:p>
+            <a:pPr marL="177796" indent="0">
+              <a:lnSpc>
+                <a:spcPct val="114000"/>
+              </a:lnSpc>
+              <a:spcBef>
+                <a:spcPts val="0"/>
+              </a:spcBef>
+              <a:buSzPts val="3100"/>
+              <a:buNone/>
+            </a:pPr>
+            <a:endParaRPr lang="ru-RU" sz="1400" dirty="0" smtClean="0">
+              <a:latin typeface="Roboto" panose="020B0604020202020204"/>
+              <a:ea typeface="+mj-ea"/>
+              <a:cs typeface="+mj-cs"/>
+            </a:endParaRPr>
+          </a:p>
+        </p:txBody>
+      </p:sp>
+      <p:pic>
+        <p:nvPicPr>
+          <p:cNvPr id="4" name="Рисунок 3"/>
+          <p:cNvPicPr>
+            <a:picLocks noChangeAspect="1"/>
+          </p:cNvPicPr>
+          <p:nvPr/>
+        </p:nvPicPr>
+        <p:blipFill>
+          <a:blip r:embed="rId2"/>
+          <a:stretch>
+            <a:fillRect/>
+          </a:stretch>
+        </p:blipFill>
+        <p:spPr>
+          <a:xfrm>
+            <a:off x="6463725" y="1717247"/>
+            <a:ext cx="4882862" cy="4739912"/>
+          </a:xfrm>
+          <a:prstGeom prst="rect">
+            <a:avLst/>
+          </a:prstGeom>
+        </p:spPr>
+      </p:pic>
+    </p:spTree>
+    <p:extLst>
+      <p:ext uri="{BB962C8B-B14F-4D97-AF65-F5344CB8AC3E}">
+        <p14:creationId xmlns:p14="http://schemas.microsoft.com/office/powerpoint/2010/main" val="1331950200"/>
+      </p:ext>
+    </p:extLst>
+  </p:cSld>
+  <p:clrMapOvr>
+    <a:masterClrMapping/>
+  </p:clrMapOvr>
+  <p:timing>
+    <p:tnLst>
+      <p:par>
+        <p:cTn id="1" dur="indefinite" restart="never" nodeType="tmRoot"/>
+      </p:par>
+    </p:tnLst>
+  </p:timing>
+</p:sld>
+</file>
+
+<file path=ppt/slides/slide24.xml><?xml version="1.0" encoding="utf-8"?>
+<p:sld xmlns:a="http://schemas.openxmlformats.org/drawingml/2006/main" xmlns:r="http://schemas.openxmlformats.org/officeDocument/2006/relationships" xmlns:p="http://schemas.openxmlformats.org/presentationml/2006/main">
+  <p:cSld>
+    <p:spTree>
+      <p:nvGrpSpPr>
+        <p:cNvPr id="1" name=""/>
+        <p:cNvGrpSpPr/>
+        <p:nvPr/>
+      </p:nvGrpSpPr>
+      <p:grpSpPr>
+        <a:xfrm>
+          <a:off x="0" y="0"/>
+          <a:ext cx="0" cy="0"/>
+          <a:chOff x="0" y="0"/>
+          <a:chExt cx="0" cy="0"/>
+        </a:xfrm>
+      </p:grpSpPr>
+      <p:sp>
+        <p:nvSpPr>
+          <p:cNvPr id="2" name="Заголовок 1"/>
+          <p:cNvSpPr>
+            <a:spLocks noGrp="1"/>
+          </p:cNvSpPr>
+          <p:nvPr>
+            <p:ph type="title"/>
+          </p:nvPr>
+        </p:nvSpPr>
+        <p:spPr/>
+        <p:txBody>
+          <a:bodyPr/>
+          <a:lstStyle/>
+          <a:p>
+            <a:r>
+              <a:rPr lang="en-US" sz="2800" b="1" dirty="0">
+                <a:latin typeface="Roboto" panose="020B0604020202020204"/>
+              </a:rPr>
+              <a:t>NAT – </a:t>
+            </a:r>
+            <a:r>
+              <a:rPr lang="ru-RU" sz="2800" b="1" dirty="0">
+                <a:latin typeface="Roboto" panose="020B0604020202020204"/>
+              </a:rPr>
+              <a:t>реализация «статический в порт»</a:t>
+            </a:r>
+            <a:endParaRPr lang="ru-RU" sz="2800" b="1" dirty="0">
+              <a:latin typeface="Roboto" panose="020B0604020202020204"/>
+            </a:endParaRPr>
+          </a:p>
+        </p:txBody>
+      </p:sp>
+      <p:sp>
+        <p:nvSpPr>
+          <p:cNvPr id="3" name="Текст 2"/>
+          <p:cNvSpPr>
+            <a:spLocks noGrp="1"/>
+          </p:cNvSpPr>
+          <p:nvPr>
+            <p:ph type="body" idx="1"/>
+          </p:nvPr>
+        </p:nvSpPr>
+        <p:spPr/>
+        <p:txBody>
+          <a:bodyPr>
+            <a:normAutofit/>
+          </a:bodyPr>
+          <a:lstStyle/>
+          <a:p>
+            <a:pPr marL="177796" indent="0">
+              <a:lnSpc>
+                <a:spcPct val="113000"/>
+              </a:lnSpc>
+              <a:spcBef>
+                <a:spcPts val="0"/>
+              </a:spcBef>
+              <a:buSzPts val="3100"/>
+              <a:buNone/>
+            </a:pPr>
+            <a:r>
+              <a:rPr lang="ru-RU" sz="2100" b="1" dirty="0" smtClean="0">
+                <a:solidFill>
+                  <a:srgbClr val="3F299A"/>
+                </a:solidFill>
+                <a:latin typeface="Roboto"/>
+                <a:ea typeface="Roboto"/>
+                <a:cs typeface="Roboto"/>
+              </a:rPr>
+              <a:t>1. </a:t>
+            </a:r>
+            <a:r>
+              <a:rPr lang="ru-RU" sz="1400" dirty="0" smtClean="0">
+                <a:latin typeface="Roboto" panose="020B0604020202020204"/>
+                <a:ea typeface="+mj-ea"/>
+                <a:cs typeface="+mj-cs"/>
+              </a:rPr>
+              <a:t>При подключении к 176.0.4.2 на 80 порт </a:t>
+            </a:r>
+          </a:p>
+          <a:p>
+            <a:pPr marL="177796" indent="0">
+              <a:lnSpc>
+                <a:spcPct val="113000"/>
+              </a:lnSpc>
+              <a:spcBef>
+                <a:spcPts val="0"/>
+              </a:spcBef>
+              <a:buSzPts val="3100"/>
+              <a:buNone/>
+            </a:pPr>
+            <a:r>
+              <a:rPr lang="ru-RU" sz="1400" dirty="0" smtClean="0">
+                <a:latin typeface="Roboto" panose="020B0604020202020204"/>
+                <a:ea typeface="+mj-ea"/>
+                <a:cs typeface="+mj-cs"/>
+              </a:rPr>
+              <a:t>Пересылать на 10.5.0.2 80 порт</a:t>
+            </a:r>
+            <a:endParaRPr lang="ru-RU" sz="1400" dirty="0">
+              <a:latin typeface="Roboto" panose="020B0604020202020204"/>
+              <a:ea typeface="+mj-ea"/>
+              <a:cs typeface="+mj-cs"/>
+            </a:endParaRPr>
+          </a:p>
+          <a:p>
+            <a:pPr marL="177796" indent="0">
+              <a:lnSpc>
+                <a:spcPct val="113000"/>
+              </a:lnSpc>
+              <a:spcBef>
+                <a:spcPts val="0"/>
+              </a:spcBef>
+              <a:buSzPts val="3100"/>
+              <a:buNone/>
+            </a:pPr>
+            <a:r>
+              <a:rPr lang="ru-RU" sz="2100" b="1" dirty="0">
+                <a:solidFill>
+                  <a:srgbClr val="3F299A"/>
+                </a:solidFill>
+                <a:latin typeface="Roboto"/>
+                <a:ea typeface="Roboto"/>
+                <a:cs typeface="Roboto"/>
+              </a:rPr>
+              <a:t>2. </a:t>
+            </a:r>
+            <a:r>
+              <a:rPr lang="ru-RU" sz="1400" dirty="0">
+                <a:latin typeface="Roboto" panose="020B0604020202020204"/>
+              </a:rPr>
+              <a:t>При подключении к 176.0.4.2 на </a:t>
+            </a:r>
+            <a:r>
+              <a:rPr lang="ru-RU" sz="1400" dirty="0" smtClean="0">
+                <a:latin typeface="Roboto" panose="020B0604020202020204"/>
+              </a:rPr>
+              <a:t>8080 </a:t>
+            </a:r>
+            <a:r>
+              <a:rPr lang="ru-RU" sz="1400" dirty="0">
+                <a:latin typeface="Roboto" panose="020B0604020202020204"/>
+              </a:rPr>
+              <a:t>порт </a:t>
+            </a:r>
+          </a:p>
+          <a:p>
+            <a:pPr marL="177796" indent="0">
+              <a:lnSpc>
+                <a:spcPct val="113000"/>
+              </a:lnSpc>
+              <a:spcBef>
+                <a:spcPts val="0"/>
+              </a:spcBef>
+              <a:buSzPts val="3100"/>
+              <a:buNone/>
+            </a:pPr>
+            <a:r>
+              <a:rPr lang="ru-RU" sz="1400" dirty="0">
+                <a:latin typeface="Roboto" panose="020B0604020202020204"/>
+              </a:rPr>
+              <a:t>Пересылать на </a:t>
+            </a:r>
+            <a:r>
+              <a:rPr lang="ru-RU" sz="1400" dirty="0" smtClean="0">
+                <a:latin typeface="Roboto" panose="020B0604020202020204"/>
+              </a:rPr>
+              <a:t>10.5.0.3 443 </a:t>
+            </a:r>
+            <a:r>
+              <a:rPr lang="ru-RU" sz="1400" dirty="0">
+                <a:latin typeface="Roboto" panose="020B0604020202020204"/>
+              </a:rPr>
+              <a:t>порт</a:t>
+            </a:r>
+          </a:p>
+          <a:p>
+            <a:pPr marL="177796" indent="0">
+              <a:lnSpc>
+                <a:spcPct val="114000"/>
+              </a:lnSpc>
+              <a:spcBef>
+                <a:spcPts val="0"/>
+              </a:spcBef>
+              <a:buSzPts val="3100"/>
+              <a:buNone/>
+            </a:pPr>
+            <a:r>
+              <a:rPr lang="ru-RU" sz="2100" b="1" dirty="0" smtClean="0">
+                <a:solidFill>
+                  <a:srgbClr val="3F299A"/>
+                </a:solidFill>
+                <a:latin typeface="Roboto"/>
+                <a:ea typeface="Roboto"/>
+                <a:cs typeface="Roboto"/>
+              </a:rPr>
+              <a:t>3</a:t>
+            </a:r>
+            <a:r>
+              <a:rPr lang="ru-RU" sz="2100" b="1" dirty="0">
+                <a:solidFill>
+                  <a:srgbClr val="3F299A"/>
+                </a:solidFill>
+                <a:latin typeface="Roboto"/>
+                <a:ea typeface="Roboto"/>
+                <a:cs typeface="Roboto"/>
+              </a:rPr>
+              <a:t>. </a:t>
+            </a:r>
+            <a:r>
+              <a:rPr lang="ru-RU" sz="1400" dirty="0" smtClean="0">
+                <a:latin typeface="Roboto" panose="020B0604020202020204"/>
+                <a:ea typeface="+mj-ea"/>
+                <a:cs typeface="+mj-cs"/>
+              </a:rPr>
+              <a:t>Задан входящий порт и исходящий порт</a:t>
+            </a:r>
+          </a:p>
+          <a:p>
+            <a:pPr marL="177796" indent="0">
+              <a:lnSpc>
+                <a:spcPct val="114000"/>
+              </a:lnSpc>
+              <a:spcBef>
+                <a:spcPts val="0"/>
+              </a:spcBef>
+              <a:buSzPts val="3100"/>
+              <a:buNone/>
+            </a:pPr>
+            <a:endParaRPr lang="ru-RU" sz="1400" dirty="0" smtClean="0">
+              <a:latin typeface="Roboto" panose="020B0604020202020204"/>
+              <a:ea typeface="+mj-ea"/>
+              <a:cs typeface="+mj-cs"/>
+            </a:endParaRPr>
+          </a:p>
+          <a:p>
+            <a:pPr marL="177796" indent="0">
+              <a:lnSpc>
+                <a:spcPct val="114000"/>
+              </a:lnSpc>
+              <a:spcBef>
+                <a:spcPts val="0"/>
+              </a:spcBef>
+              <a:buSzPts val="3100"/>
+              <a:buNone/>
+            </a:pPr>
+            <a:endParaRPr lang="ru-RU" sz="1400" dirty="0" smtClean="0">
+              <a:latin typeface="Roboto" panose="020B0604020202020204"/>
+              <a:ea typeface="+mj-ea"/>
+              <a:cs typeface="+mj-cs"/>
+            </a:endParaRPr>
+          </a:p>
+        </p:txBody>
+      </p:sp>
+      <p:pic>
+        <p:nvPicPr>
+          <p:cNvPr id="4" name="Рисунок 3"/>
+          <p:cNvPicPr>
+            <a:picLocks noChangeAspect="1"/>
+          </p:cNvPicPr>
+          <p:nvPr/>
+        </p:nvPicPr>
+        <p:blipFill>
+          <a:blip r:embed="rId2"/>
+          <a:stretch>
+            <a:fillRect/>
+          </a:stretch>
+        </p:blipFill>
+        <p:spPr>
+          <a:xfrm>
+            <a:off x="5053012" y="1969862"/>
+            <a:ext cx="6353175" cy="4126138"/>
+          </a:xfrm>
+          <a:prstGeom prst="rect">
+            <a:avLst/>
+          </a:prstGeom>
+        </p:spPr>
+      </p:pic>
+    </p:spTree>
+    <p:extLst>
+      <p:ext uri="{BB962C8B-B14F-4D97-AF65-F5344CB8AC3E}">
+        <p14:creationId xmlns:p14="http://schemas.microsoft.com/office/powerpoint/2010/main" val="2820344032"/>
+      </p:ext>
+    </p:extLst>
+  </p:cSld>
+  <p:clrMapOvr>
+    <a:masterClrMapping/>
+  </p:clrMapOvr>
+  <p:timing>
+    <p:tnLst>
+      <p:par>
+        <p:cTn id="1" dur="indefinite" restart="never" nodeType="tmRoot"/>
+      </p:par>
+    </p:tnLst>
+  </p:timing>
+</p:sld>
+</file>
+
+<file path=ppt/slides/slide25.xml><?xml version="1.0" encoding="utf-8"?>
+<p:sld xmlns:a="http://schemas.openxmlformats.org/drawingml/2006/main" xmlns:r="http://schemas.openxmlformats.org/officeDocument/2006/relationships" xmlns:p="http://schemas.openxmlformats.org/presentationml/2006/main">
+  <p:cSld>
+    <p:spTree>
+      <p:nvGrpSpPr>
+        <p:cNvPr id="1" name="Shape 211"/>
+        <p:cNvGrpSpPr/>
+        <p:nvPr/>
+      </p:nvGrpSpPr>
+      <p:grpSpPr>
+        <a:xfrm>
+          <a:off x="0" y="0"/>
+          <a:ext cx="0" cy="0"/>
+          <a:chOff x="0" y="0"/>
+          <a:chExt cx="0" cy="0"/>
+        </a:xfrm>
+      </p:grpSpPr>
+      <p:sp>
+        <p:nvSpPr>
+          <p:cNvPr id="212" name="Google Shape;212;p42"/>
+          <p:cNvSpPr txBox="1">
+            <a:spLocks noGrp="1"/>
+          </p:cNvSpPr>
+          <p:nvPr>
+            <p:ph type="title"/>
+          </p:nvPr>
+        </p:nvSpPr>
+        <p:spPr>
+          <a:xfrm>
+            <a:off x="667400" y="440965"/>
+            <a:ext cx="11360800" cy="1461200"/>
+          </a:xfrm>
+          <a:prstGeom prst="rect">
+            <a:avLst/>
+          </a:prstGeom>
+        </p:spPr>
+        <p:txBody>
+          <a:bodyPr spcFirstLastPara="1" vert="horz" wrap="square" lIns="121900" tIns="121900" rIns="121900" bIns="121900" rtlCol="0" anchor="t" anchorCtr="0">
+            <a:noAutofit/>
+          </a:bodyPr>
+          <a:lstStyle/>
+          <a:p>
+            <a:r>
+              <a:rPr lang="ru" sz="2800" b="1" dirty="0">
+                <a:latin typeface="Roboto" panose="020B0604020202020204"/>
+              </a:rPr>
+              <a:t>Выводы</a:t>
+            </a:r>
+            <a:endParaRPr sz="2800" b="1" dirty="0">
+              <a:latin typeface="Roboto" panose="020B0604020202020204"/>
+            </a:endParaRPr>
+          </a:p>
+          <a:p>
+            <a:endParaRPr sz="4000" dirty="0"/>
+          </a:p>
+        </p:txBody>
+      </p:sp>
+      <p:graphicFrame>
+        <p:nvGraphicFramePr>
+          <p:cNvPr id="213" name="Google Shape;213;p42"/>
+          <p:cNvGraphicFramePr/>
+          <p:nvPr>
+            <p:extLst>
+              <p:ext uri="{D42A27DB-BD31-4B8C-83A1-F6EECF244321}">
+                <p14:modId xmlns:p14="http://schemas.microsoft.com/office/powerpoint/2010/main" val="2486970824"/>
+              </p:ext>
+            </p:extLst>
+          </p:nvPr>
+        </p:nvGraphicFramePr>
+        <p:xfrm>
+          <a:off x="1270000" y="2291200"/>
+          <a:ext cx="9652000" cy="2470752"/>
+        </p:xfrm>
+        <a:graphic>
+          <a:graphicData uri="http://schemas.openxmlformats.org/drawingml/2006/table">
+            <a:tbl>
+              <a:tblPr>
+                <a:noFill/>
+              </a:tblPr>
+              <a:tblGrid>
+                <a:gridCol w="652567">
+                  <a:extLst>
+                    <a:ext uri="{9D8B030D-6E8A-4147-A177-3AD203B41FA5}">
+                      <a16:colId xmlns:a16="http://schemas.microsoft.com/office/drawing/2014/main" val="20000"/>
+                    </a:ext>
+                  </a:extLst>
+                </a:gridCol>
+                <a:gridCol w="8999433">
+                  <a:extLst>
+                    <a:ext uri="{9D8B030D-6E8A-4147-A177-3AD203B41FA5}">
+                      <a16:colId xmlns:a16="http://schemas.microsoft.com/office/drawing/2014/main" val="20001"/>
+                    </a:ext>
+                  </a:extLst>
+                </a:gridCol>
+              </a:tblGrid>
+              <a:tr h="617688">
+                <a:tc>
+                  <a:txBody>
+                    <a:bodyPr/>
+                    <a:lstStyle/>
+                    <a:p>
+                      <a:pPr marL="0" lvl="0" indent="0" algn="l" rtl="0">
+                        <a:spcBef>
+                          <a:spcPts val="0"/>
+                        </a:spcBef>
+                        <a:spcAft>
+                          <a:spcPts val="0"/>
+                        </a:spcAft>
+                        <a:buNone/>
+                      </a:pPr>
+                      <a:r>
+                        <a:rPr lang="ru" sz="1600" b="1" dirty="0">
+                          <a:solidFill>
+                            <a:srgbClr val="3F299A"/>
+                          </a:solidFill>
+                          <a:latin typeface="Roboto"/>
+                          <a:ea typeface="Roboto"/>
+                          <a:cs typeface="Roboto"/>
+                          <a:sym typeface="Roboto"/>
+                        </a:rPr>
+                        <a:t>1.</a:t>
+                      </a:r>
+                      <a:endParaRPr sz="1600" b="1" dirty="0">
+                        <a:solidFill>
+                          <a:srgbClr val="3F299A"/>
+                        </a:solidFill>
+                        <a:latin typeface="Roboto"/>
+                        <a:ea typeface="Roboto"/>
+                        <a:cs typeface="Roboto"/>
+                        <a:sym typeface="Roboto"/>
+                      </a:endParaRPr>
+                    </a:p>
+                  </a:txBody>
+                  <a:tcPr marL="264000" marR="121900" marT="121900" marB="121900">
+                    <a:lnL w="9525" cap="flat" cmpd="sng">
+                      <a:solidFill>
+                        <a:srgbClr val="BFC1F0">
+                          <a:alpha val="0"/>
+                        </a:srgbClr>
+                      </a:solidFill>
+                      <a:prstDash val="solid"/>
+                      <a:round/>
+                      <a:headEnd type="none" w="sm" len="sm"/>
+                      <a:tailEnd type="none" w="sm" len="sm"/>
+                    </a:lnL>
+                    <a:lnR w="9525" cap="flat" cmpd="sng">
+                      <a:solidFill>
+                        <a:srgbClr val="FFFFFF">
+                          <a:alpha val="0"/>
+                        </a:srgbClr>
+                      </a:solidFill>
+                      <a:prstDash val="solid"/>
+                      <a:round/>
+                      <a:headEnd type="none" w="sm" len="sm"/>
+                      <a:tailEnd type="none" w="sm" len="sm"/>
+                    </a:lnR>
+                    <a:lnT w="9525" cap="flat" cmpd="sng">
+                      <a:solidFill>
+                        <a:srgbClr val="BFC1F0">
+                          <a:alpha val="0"/>
+                        </a:srgbClr>
+                      </a:solidFill>
+                      <a:prstDash val="solid"/>
+                      <a:round/>
+                      <a:headEnd type="none" w="sm" len="sm"/>
+                      <a:tailEnd type="none" w="sm" len="sm"/>
+                    </a:lnT>
+                    <a:lnB w="9525" cap="flat" cmpd="sng">
+                      <a:solidFill>
+                        <a:srgbClr val="BFC1F0">
+                          <a:alpha val="0"/>
+                        </a:srgbClr>
+                      </a:solidFill>
+                      <a:prstDash val="solid"/>
+                      <a:round/>
+                      <a:headEnd type="none" w="sm" len="sm"/>
+                      <a:tailEnd type="none" w="sm" len="sm"/>
+                    </a:lnB>
+                  </a:tcPr>
+                </a:tc>
+                <a:tc>
+                  <a:txBody>
+                    <a:bodyPr/>
+                    <a:lstStyle/>
+                    <a:p>
+                      <a:pPr marL="0" lvl="0" indent="0" algn="l" rtl="0">
+                        <a:lnSpc>
+                          <a:spcPct val="115000"/>
+                        </a:lnSpc>
+                        <a:spcBef>
+                          <a:spcPts val="0"/>
+                        </a:spcBef>
+                        <a:spcAft>
+                          <a:spcPts val="0"/>
+                        </a:spcAft>
+                        <a:buNone/>
+                      </a:pPr>
+                      <a:r>
+                        <a:rPr lang="ru-RU" sz="1400" kern="1200" dirty="0" smtClean="0">
+                          <a:solidFill>
+                            <a:schemeClr val="tx1"/>
+                          </a:solidFill>
+                          <a:latin typeface="Roboto" panose="020B0604020202020204"/>
+                          <a:ea typeface="+mj-ea"/>
+                          <a:cs typeface="+mj-cs"/>
+                          <a:sym typeface="Roboto"/>
+                        </a:rPr>
+                        <a:t>Организована сеть с межсетевым </a:t>
+                      </a:r>
+                      <a:r>
+                        <a:rPr lang="ru-RU" sz="1400" kern="1200" dirty="0" err="1" smtClean="0">
+                          <a:solidFill>
+                            <a:schemeClr val="tx1"/>
+                          </a:solidFill>
+                          <a:latin typeface="Roboto" panose="020B0604020202020204"/>
+                          <a:ea typeface="+mj-ea"/>
+                          <a:cs typeface="+mj-cs"/>
+                          <a:sym typeface="Roboto"/>
+                        </a:rPr>
+                        <a:t>взаимоджействием</a:t>
+                      </a:r>
+                      <a:endParaRPr sz="1400" kern="1200" dirty="0">
+                        <a:solidFill>
+                          <a:schemeClr val="tx1"/>
+                        </a:solidFill>
+                        <a:latin typeface="Roboto" panose="020B0604020202020204"/>
+                        <a:ea typeface="+mj-ea"/>
+                        <a:cs typeface="+mj-cs"/>
+                        <a:sym typeface="Roboto"/>
+                      </a:endParaRPr>
+                    </a:p>
+                  </a:txBody>
+                  <a:tcPr marL="264000" marR="121900" marT="121900" marB="121900">
+                    <a:lnL w="9525" cap="flat" cmpd="sng">
+                      <a:solidFill>
+                        <a:srgbClr val="FFFFFF">
+                          <a:alpha val="0"/>
+                        </a:srgbClr>
+                      </a:solidFill>
+                      <a:prstDash val="solid"/>
+                      <a:round/>
+                      <a:headEnd type="none" w="sm" len="sm"/>
+                      <a:tailEnd type="none" w="sm" len="sm"/>
+                    </a:lnL>
+                    <a:lnR w="9525" cap="flat" cmpd="sng">
+                      <a:solidFill>
+                        <a:srgbClr val="BFC1F0">
+                          <a:alpha val="0"/>
+                        </a:srgbClr>
+                      </a:solidFill>
+                      <a:prstDash val="solid"/>
+                      <a:round/>
+                      <a:headEnd type="none" w="sm" len="sm"/>
+                      <a:tailEnd type="none" w="sm" len="sm"/>
+                    </a:lnR>
+                    <a:lnT w="9525" cap="flat" cmpd="sng">
+                      <a:solidFill>
+                        <a:srgbClr val="BFC1F0">
+                          <a:alpha val="0"/>
+                        </a:srgbClr>
+                      </a:solidFill>
+                      <a:prstDash val="solid"/>
+                      <a:round/>
+                      <a:headEnd type="none" w="sm" len="sm"/>
+                      <a:tailEnd type="none" w="sm" len="sm"/>
+                    </a:lnT>
+                    <a:lnB w="9525" cap="flat" cmpd="sng">
+                      <a:solidFill>
+                        <a:srgbClr val="BFC1F0">
+                          <a:alpha val="0"/>
+                        </a:srgbClr>
+                      </a:solidFill>
+                      <a:prstDash val="solid"/>
+                      <a:round/>
+                      <a:headEnd type="none" w="sm" len="sm"/>
+                      <a:tailEnd type="none" w="sm" len="sm"/>
+                    </a:lnB>
+                  </a:tcPr>
+                </a:tc>
+                <a:extLst>
+                  <a:ext uri="{0D108BD9-81ED-4DB2-BD59-A6C34878D82A}">
+                    <a16:rowId xmlns:a16="http://schemas.microsoft.com/office/drawing/2014/main" val="10000"/>
+                  </a:ext>
+                </a:extLst>
+              </a:tr>
+              <a:tr h="617688">
+                <a:tc>
+                  <a:txBody>
+                    <a:bodyPr/>
+                    <a:lstStyle/>
+                    <a:p>
+                      <a:pPr marL="0" lvl="0" indent="0" algn="l" defTabSz="914400" rtl="0" eaLnBrk="1" latinLnBrk="0" hangingPunct="1">
+                        <a:spcBef>
+                          <a:spcPts val="0"/>
+                        </a:spcBef>
+                        <a:spcAft>
+                          <a:spcPts val="0"/>
+                        </a:spcAft>
+                        <a:buNone/>
+                      </a:pPr>
+                      <a:r>
+                        <a:rPr lang="ru" sz="1600" b="1" kern="1200">
+                          <a:solidFill>
+                            <a:srgbClr val="3F299A"/>
+                          </a:solidFill>
+                          <a:latin typeface="Roboto"/>
+                          <a:ea typeface="Roboto"/>
+                          <a:cs typeface="Roboto"/>
+                          <a:sym typeface="Roboto"/>
+                        </a:rPr>
+                        <a:t>2.</a:t>
+                      </a:r>
+                      <a:endParaRPr sz="1600" b="1" kern="1200" dirty="0">
+                        <a:solidFill>
+                          <a:srgbClr val="3F299A"/>
+                        </a:solidFill>
+                        <a:latin typeface="Roboto"/>
+                        <a:ea typeface="Roboto"/>
+                        <a:cs typeface="Roboto"/>
+                        <a:sym typeface="Roboto"/>
+                      </a:endParaRPr>
+                    </a:p>
+                  </a:txBody>
+                  <a:tcPr marL="264000" marR="121900" marT="121900" marB="121900">
+                    <a:lnL w="9525" cap="flat" cmpd="sng">
+                      <a:solidFill>
+                        <a:srgbClr val="BFC1F0">
+                          <a:alpha val="0"/>
+                        </a:srgbClr>
+                      </a:solidFill>
+                      <a:prstDash val="solid"/>
+                      <a:round/>
+                      <a:headEnd type="none" w="sm" len="sm"/>
+                      <a:tailEnd type="none" w="sm" len="sm"/>
+                    </a:lnL>
+                    <a:lnR w="9525" cap="flat" cmpd="sng">
+                      <a:solidFill>
+                        <a:srgbClr val="FFFFFF">
+                          <a:alpha val="0"/>
+                        </a:srgbClr>
+                      </a:solidFill>
+                      <a:prstDash val="solid"/>
+                      <a:round/>
+                      <a:headEnd type="none" w="sm" len="sm"/>
+                      <a:tailEnd type="none" w="sm" len="sm"/>
+                    </a:lnR>
+                    <a:lnT w="9525" cap="flat" cmpd="sng">
+                      <a:solidFill>
+                        <a:srgbClr val="BFC1F0">
+                          <a:alpha val="0"/>
+                        </a:srgbClr>
+                      </a:solidFill>
+                      <a:prstDash val="solid"/>
+                      <a:round/>
+                      <a:headEnd type="none" w="sm" len="sm"/>
+                      <a:tailEnd type="none" w="sm" len="sm"/>
+                    </a:lnT>
+                    <a:lnB w="9525" cap="flat" cmpd="sng">
+                      <a:solidFill>
+                        <a:srgbClr val="BFC1F0">
+                          <a:alpha val="0"/>
+                        </a:srgbClr>
+                      </a:solidFill>
+                      <a:prstDash val="solid"/>
+                      <a:round/>
+                      <a:headEnd type="none" w="sm" len="sm"/>
+                      <a:tailEnd type="none" w="sm" len="sm"/>
+                    </a:lnB>
+                  </a:tcPr>
+                </a:tc>
+                <a:tc>
+                  <a:txBody>
+                    <a:bodyPr/>
+                    <a:lstStyle/>
+                    <a:p>
+                      <a:pPr marL="0" lvl="0" indent="0" algn="l" rtl="0">
+                        <a:lnSpc>
+                          <a:spcPct val="115000"/>
+                        </a:lnSpc>
+                        <a:spcBef>
+                          <a:spcPts val="0"/>
+                        </a:spcBef>
+                        <a:spcAft>
+                          <a:spcPts val="0"/>
+                        </a:spcAft>
+                        <a:buNone/>
+                      </a:pPr>
+                      <a:r>
+                        <a:rPr lang="ru-RU" sz="1400" kern="1200" dirty="0" smtClean="0">
+                          <a:solidFill>
+                            <a:schemeClr val="tx1"/>
+                          </a:solidFill>
+                          <a:latin typeface="Roboto" panose="020B0604020202020204"/>
+                          <a:ea typeface="+mj-ea"/>
+                          <a:cs typeface="+mj-cs"/>
+                          <a:sym typeface="Roboto"/>
+                        </a:rPr>
+                        <a:t>Настроена отказоустойчивость</a:t>
+                      </a:r>
+                      <a:endParaRPr sz="1400" kern="1200" dirty="0">
+                        <a:solidFill>
+                          <a:schemeClr val="tx1"/>
+                        </a:solidFill>
+                        <a:latin typeface="Roboto" panose="020B0604020202020204"/>
+                        <a:ea typeface="+mj-ea"/>
+                        <a:cs typeface="+mj-cs"/>
+                        <a:sym typeface="Roboto"/>
+                      </a:endParaRPr>
+                    </a:p>
+                  </a:txBody>
+                  <a:tcPr marL="264000" marR="121900" marT="121900" marB="121900">
+                    <a:lnL w="9525" cap="flat" cmpd="sng">
+                      <a:solidFill>
+                        <a:srgbClr val="FFFFFF">
+                          <a:alpha val="0"/>
+                        </a:srgbClr>
+                      </a:solidFill>
+                      <a:prstDash val="solid"/>
+                      <a:round/>
+                      <a:headEnd type="none" w="sm" len="sm"/>
+                      <a:tailEnd type="none" w="sm" len="sm"/>
+                    </a:lnL>
+                    <a:lnR w="9525" cap="flat" cmpd="sng">
+                      <a:solidFill>
+                        <a:srgbClr val="BFC1F0">
+                          <a:alpha val="0"/>
+                        </a:srgbClr>
+                      </a:solidFill>
+                      <a:prstDash val="solid"/>
+                      <a:round/>
+                      <a:headEnd type="none" w="sm" len="sm"/>
+                      <a:tailEnd type="none" w="sm" len="sm"/>
+                    </a:lnR>
+                    <a:lnT w="9525" cap="flat" cmpd="sng">
+                      <a:solidFill>
+                        <a:srgbClr val="BFC1F0">
+                          <a:alpha val="0"/>
+                        </a:srgbClr>
+                      </a:solidFill>
+                      <a:prstDash val="solid"/>
+                      <a:round/>
+                      <a:headEnd type="none" w="sm" len="sm"/>
+                      <a:tailEnd type="none" w="sm" len="sm"/>
+                    </a:lnT>
+                    <a:lnB w="9525" cap="flat" cmpd="sng">
+                      <a:solidFill>
+                        <a:srgbClr val="BFC1F0">
+                          <a:alpha val="0"/>
+                        </a:srgbClr>
+                      </a:solidFill>
+                      <a:prstDash val="solid"/>
+                      <a:round/>
+                      <a:headEnd type="none" w="sm" len="sm"/>
+                      <a:tailEnd type="none" w="sm" len="sm"/>
+                    </a:lnB>
+                  </a:tcPr>
+                </a:tc>
+                <a:extLst>
+                  <a:ext uri="{0D108BD9-81ED-4DB2-BD59-A6C34878D82A}">
+                    <a16:rowId xmlns:a16="http://schemas.microsoft.com/office/drawing/2014/main" val="10001"/>
+                  </a:ext>
+                </a:extLst>
+              </a:tr>
+              <a:tr h="617688">
+                <a:tc>
+                  <a:txBody>
+                    <a:bodyPr/>
+                    <a:lstStyle/>
+                    <a:p>
+                      <a:pPr marL="0" lvl="0" indent="0" algn="l" defTabSz="914400" rtl="0" eaLnBrk="1" latinLnBrk="0" hangingPunct="1">
+                        <a:spcBef>
+                          <a:spcPts val="0"/>
+                        </a:spcBef>
+                        <a:spcAft>
+                          <a:spcPts val="0"/>
+                        </a:spcAft>
+                        <a:buNone/>
+                      </a:pPr>
+                      <a:r>
+                        <a:rPr lang="ru" sz="1600" b="1" kern="1200" dirty="0">
+                          <a:solidFill>
+                            <a:srgbClr val="3F299A"/>
+                          </a:solidFill>
+                          <a:latin typeface="Roboto"/>
+                          <a:ea typeface="Roboto"/>
+                          <a:cs typeface="Roboto"/>
+                          <a:sym typeface="Roboto"/>
+                        </a:rPr>
+                        <a:t>3.</a:t>
+                      </a:r>
+                      <a:endParaRPr sz="1600" b="1" kern="1200" dirty="0">
+                        <a:solidFill>
+                          <a:srgbClr val="3F299A"/>
+                        </a:solidFill>
+                        <a:latin typeface="Roboto"/>
+                        <a:ea typeface="Roboto"/>
+                        <a:cs typeface="Roboto"/>
+                        <a:sym typeface="Roboto"/>
+                      </a:endParaRPr>
+                    </a:p>
+                  </a:txBody>
+                  <a:tcPr marL="264000" marR="121900" marT="121900" marB="121900">
+                    <a:lnL w="9525" cap="flat" cmpd="sng">
+                      <a:solidFill>
+                        <a:srgbClr val="BFC1F0">
+                          <a:alpha val="0"/>
+                        </a:srgbClr>
+                      </a:solidFill>
+                      <a:prstDash val="solid"/>
+                      <a:round/>
+                      <a:headEnd type="none" w="sm" len="sm"/>
+                      <a:tailEnd type="none" w="sm" len="sm"/>
+                    </a:lnL>
+                    <a:lnR w="9525" cap="flat" cmpd="sng">
+                      <a:solidFill>
+                        <a:srgbClr val="FFFFFF">
+                          <a:alpha val="0"/>
+                        </a:srgbClr>
+                      </a:solidFill>
+                      <a:prstDash val="solid"/>
+                      <a:round/>
+                      <a:headEnd type="none" w="sm" len="sm"/>
+                      <a:tailEnd type="none" w="sm" len="sm"/>
+                    </a:lnR>
+                    <a:lnT w="9525" cap="flat" cmpd="sng">
+                      <a:solidFill>
+                        <a:srgbClr val="BFC1F0">
+                          <a:alpha val="0"/>
+                        </a:srgbClr>
+                      </a:solidFill>
+                      <a:prstDash val="solid"/>
+                      <a:round/>
+                      <a:headEnd type="none" w="sm" len="sm"/>
+                      <a:tailEnd type="none" w="sm" len="sm"/>
+                    </a:lnT>
+                    <a:lnB w="9525" cap="flat" cmpd="sng">
+                      <a:solidFill>
+                        <a:srgbClr val="BFC1F0">
+                          <a:alpha val="0"/>
+                        </a:srgbClr>
+                      </a:solidFill>
+                      <a:prstDash val="solid"/>
+                      <a:round/>
+                      <a:headEnd type="none" w="sm" len="sm"/>
+                      <a:tailEnd type="none" w="sm" len="sm"/>
+                    </a:lnB>
+                  </a:tcPr>
+                </a:tc>
+                <a:tc>
+                  <a:txBody>
+                    <a:bodyPr/>
+                    <a:lstStyle/>
+                    <a:p>
+                      <a:pPr marL="0" lvl="0" indent="0" algn="l" rtl="0">
+                        <a:lnSpc>
+                          <a:spcPct val="115000"/>
+                        </a:lnSpc>
+                        <a:spcBef>
+                          <a:spcPts val="0"/>
+                        </a:spcBef>
+                        <a:spcAft>
+                          <a:spcPts val="0"/>
+                        </a:spcAft>
+                        <a:buNone/>
+                      </a:pPr>
+                      <a:r>
+                        <a:rPr lang="ru-RU" sz="1400" kern="1200" dirty="0" smtClean="0">
+                          <a:solidFill>
+                            <a:schemeClr val="tx1"/>
+                          </a:solidFill>
+                          <a:latin typeface="Roboto" panose="020B0604020202020204"/>
+                          <a:ea typeface="+mj-ea"/>
+                          <a:cs typeface="+mj-cs"/>
+                          <a:sym typeface="Roboto"/>
+                        </a:rPr>
+                        <a:t>Настроены разграничения доступа</a:t>
+                      </a:r>
+                      <a:endParaRPr sz="1400" kern="1200" dirty="0">
+                        <a:solidFill>
+                          <a:schemeClr val="tx1"/>
+                        </a:solidFill>
+                        <a:latin typeface="Roboto" panose="020B0604020202020204"/>
+                        <a:ea typeface="+mj-ea"/>
+                        <a:cs typeface="+mj-cs"/>
+                        <a:sym typeface="Roboto"/>
+                      </a:endParaRPr>
+                    </a:p>
+                  </a:txBody>
+                  <a:tcPr marL="264000" marR="121900" marT="121900" marB="121900">
+                    <a:lnL w="9525" cap="flat" cmpd="sng">
+                      <a:solidFill>
+                        <a:srgbClr val="FFFFFF">
+                          <a:alpha val="0"/>
+                        </a:srgbClr>
+                      </a:solidFill>
+                      <a:prstDash val="solid"/>
+                      <a:round/>
+                      <a:headEnd type="none" w="sm" len="sm"/>
+                      <a:tailEnd type="none" w="sm" len="sm"/>
+                    </a:lnL>
+                    <a:lnR w="9525" cap="flat" cmpd="sng">
+                      <a:solidFill>
+                        <a:srgbClr val="BFC1F0">
+                          <a:alpha val="0"/>
+                        </a:srgbClr>
+                      </a:solidFill>
+                      <a:prstDash val="solid"/>
+                      <a:round/>
+                      <a:headEnd type="none" w="sm" len="sm"/>
+                      <a:tailEnd type="none" w="sm" len="sm"/>
+                    </a:lnR>
+                    <a:lnT w="9525" cap="flat" cmpd="sng">
+                      <a:solidFill>
+                        <a:srgbClr val="BFC1F0">
+                          <a:alpha val="0"/>
+                        </a:srgbClr>
+                      </a:solidFill>
+                      <a:prstDash val="solid"/>
+                      <a:round/>
+                      <a:headEnd type="none" w="sm" len="sm"/>
+                      <a:tailEnd type="none" w="sm" len="sm"/>
+                    </a:lnT>
+                    <a:lnB w="9525" cap="flat" cmpd="sng">
+                      <a:solidFill>
+                        <a:srgbClr val="BFC1F0">
+                          <a:alpha val="0"/>
+                        </a:srgbClr>
+                      </a:solidFill>
+                      <a:prstDash val="solid"/>
+                      <a:round/>
+                      <a:headEnd type="none" w="sm" len="sm"/>
+                      <a:tailEnd type="none" w="sm" len="sm"/>
+                    </a:lnB>
+                  </a:tcPr>
+                </a:tc>
+                <a:extLst>
+                  <a:ext uri="{0D108BD9-81ED-4DB2-BD59-A6C34878D82A}">
+                    <a16:rowId xmlns:a16="http://schemas.microsoft.com/office/drawing/2014/main" val="10002"/>
+                  </a:ext>
+                </a:extLst>
+              </a:tr>
+              <a:tr h="617688">
+                <a:tc>
+                  <a:txBody>
+                    <a:bodyPr/>
+                    <a:lstStyle/>
+                    <a:p>
+                      <a:pPr marL="0" lvl="0" indent="0" algn="l" rtl="0">
+                        <a:spcBef>
+                          <a:spcPts val="0"/>
+                        </a:spcBef>
+                        <a:spcAft>
+                          <a:spcPts val="0"/>
+                        </a:spcAft>
+                        <a:buNone/>
+                      </a:pPr>
+                      <a:endParaRPr sz="2400" dirty="0"/>
+                    </a:p>
+                  </a:txBody>
+                  <a:tcPr marL="264000" marR="121900" marT="121900" marB="121900">
+                    <a:lnL w="9525" cap="flat" cmpd="sng">
+                      <a:solidFill>
+                        <a:srgbClr val="BFC1F0">
+                          <a:alpha val="0"/>
+                        </a:srgbClr>
+                      </a:solidFill>
+                      <a:prstDash val="solid"/>
+                      <a:round/>
+                      <a:headEnd type="none" w="sm" len="sm"/>
+                      <a:tailEnd type="none" w="sm" len="sm"/>
+                    </a:lnL>
+                    <a:lnR w="9525" cap="flat" cmpd="sng">
+                      <a:solidFill>
+                        <a:srgbClr val="FFFFFF">
+                          <a:alpha val="0"/>
+                        </a:srgbClr>
+                      </a:solidFill>
+                      <a:prstDash val="solid"/>
+                      <a:round/>
+                      <a:headEnd type="none" w="sm" len="sm"/>
+                      <a:tailEnd type="none" w="sm" len="sm"/>
+                    </a:lnR>
+                    <a:lnT w="9525" cap="flat" cmpd="sng">
+                      <a:solidFill>
+                        <a:srgbClr val="BFC1F0">
+                          <a:alpha val="0"/>
+                        </a:srgbClr>
+                      </a:solidFill>
+                      <a:prstDash val="solid"/>
+                      <a:round/>
+                      <a:headEnd type="none" w="sm" len="sm"/>
+                      <a:tailEnd type="none" w="sm" len="sm"/>
+                    </a:lnT>
+                    <a:lnB w="9525" cap="flat" cmpd="sng">
+                      <a:solidFill>
+                        <a:srgbClr val="BFC1F0">
+                          <a:alpha val="0"/>
+                        </a:srgbClr>
+                      </a:solidFill>
+                      <a:prstDash val="solid"/>
+                      <a:round/>
+                      <a:headEnd type="none" w="sm" len="sm"/>
+                      <a:tailEnd type="none" w="sm" len="sm"/>
+                    </a:lnB>
+                  </a:tcPr>
+                </a:tc>
+                <a:tc>
+                  <a:txBody>
+                    <a:bodyPr/>
+                    <a:lstStyle/>
+                    <a:p>
+                      <a:pPr marL="0" lvl="0" indent="0" algn="l" rtl="0">
+                        <a:lnSpc>
+                          <a:spcPct val="115000"/>
+                        </a:lnSpc>
+                        <a:spcBef>
+                          <a:spcPts val="0"/>
+                        </a:spcBef>
+                        <a:spcAft>
+                          <a:spcPts val="0"/>
+                        </a:spcAft>
+                        <a:buNone/>
+                      </a:pPr>
+                      <a:endParaRPr sz="2100" dirty="0">
+                        <a:solidFill>
+                          <a:srgbClr val="9857F3"/>
+                        </a:solidFill>
+                        <a:latin typeface="Roboto"/>
+                        <a:ea typeface="Roboto"/>
+                        <a:cs typeface="Roboto"/>
+                        <a:sym typeface="Roboto"/>
+                      </a:endParaRPr>
+                    </a:p>
+                  </a:txBody>
+                  <a:tcPr marL="264000" marR="121900" marT="121900" marB="121900">
+                    <a:lnL w="9525" cap="flat" cmpd="sng">
+                      <a:solidFill>
+                        <a:srgbClr val="FFFFFF">
+                          <a:alpha val="0"/>
+                        </a:srgbClr>
+                      </a:solidFill>
+                      <a:prstDash val="solid"/>
+                      <a:round/>
+                      <a:headEnd type="none" w="sm" len="sm"/>
+                      <a:tailEnd type="none" w="sm" len="sm"/>
+                    </a:lnL>
+                    <a:lnR w="9525" cap="flat" cmpd="sng">
+                      <a:solidFill>
+                        <a:srgbClr val="BFC1F0">
+                          <a:alpha val="0"/>
+                        </a:srgbClr>
+                      </a:solidFill>
+                      <a:prstDash val="solid"/>
+                      <a:round/>
+                      <a:headEnd type="none" w="sm" len="sm"/>
+                      <a:tailEnd type="none" w="sm" len="sm"/>
+                    </a:lnR>
+                    <a:lnT w="9525" cap="flat" cmpd="sng">
+                      <a:solidFill>
+                        <a:srgbClr val="BFC1F0">
+                          <a:alpha val="0"/>
+                        </a:srgbClr>
+                      </a:solidFill>
+                      <a:prstDash val="solid"/>
+                      <a:round/>
+                      <a:headEnd type="none" w="sm" len="sm"/>
+                      <a:tailEnd type="none" w="sm" len="sm"/>
+                    </a:lnT>
+                    <a:lnB w="9525" cap="flat" cmpd="sng">
+                      <a:solidFill>
+                        <a:srgbClr val="BFC1F0">
+                          <a:alpha val="0"/>
+                        </a:srgbClr>
+                      </a:solidFill>
+                      <a:prstDash val="solid"/>
+                      <a:round/>
+                      <a:headEnd type="none" w="sm" len="sm"/>
+                      <a:tailEnd type="none" w="sm" len="sm"/>
+                    </a:lnB>
+                  </a:tcPr>
+                </a:tc>
+                <a:extLst>
+                  <a:ext uri="{0D108BD9-81ED-4DB2-BD59-A6C34878D82A}">
+                    <a16:rowId xmlns:a16="http://schemas.microsoft.com/office/drawing/2014/main" val="10003"/>
+                  </a:ext>
+                </a:extLst>
+              </a:tr>
+            </a:tbl>
+          </a:graphicData>
+        </a:graphic>
+      </p:graphicFrame>
+    </p:spTree>
+    <p:extLst>
+      <p:ext uri="{BB962C8B-B14F-4D97-AF65-F5344CB8AC3E}">
+        <p14:creationId xmlns:p14="http://schemas.microsoft.com/office/powerpoint/2010/main" val="665923771"/>
+      </p:ext>
+    </p:extLst>
+  </p:cSld>
+  <p:clrMapOvr>
+    <a:masterClrMapping/>
+  </p:clrMapOvr>
+  <p:timing>
+    <p:tnLst>
+      <p:par>
+        <p:cTn id="1" dur="indefinite" restart="never" nodeType="tmRoot"/>
+      </p:par>
+    </p:tnLst>
+  </p:timing>
 </p:sld>
 </file>
 
@@ -6778,6 +11847,13 @@
   <p:clrMapOvr>
     <a:masterClrMapping/>
   </p:clrMapOvr>
+  <p:timing>
+    <p:tnLst>
+      <p:par>
+        <p:cTn id="1" dur="indefinite" restart="never" nodeType="tmRoot"/>
+      </p:par>
+    </p:tnLst>
+  </p:timing>
 </p:sld>
 </file>
 
@@ -6824,10 +11900,10 @@
           <a:lstStyle/>
           <a:p>
             <a:r>
-              <a:rPr lang="ru"/>
+              <a:rPr lang="ru" dirty="0"/>
               <a:t>План защиты</a:t>
             </a:r>
-            <a:endParaRPr/>
+            <a:endParaRPr dirty="0"/>
           </a:p>
         </p:txBody>
       </p:sp>
@@ -6868,7 +11944,7 @@
           <a:lstStyle/>
           <a:p>
             <a:r>
-              <a:rPr lang="ru" sz="2400">
+              <a:rPr lang="ru" sz="2400" dirty="0">
                 <a:solidFill>
                   <a:schemeClr val="dk1"/>
                 </a:solidFill>
@@ -6879,7 +11955,7 @@
               </a:rPr>
               <a:t>Цель и задачи проекта</a:t>
             </a:r>
-            <a:endParaRPr sz="2400">
+            <a:endParaRPr sz="2400" dirty="0">
               <a:solidFill>
                 <a:schemeClr val="dk1"/>
               </a:solidFill>
@@ -6999,7 +12075,7 @@
               </a:rPr>
               <a:t>Что получилось</a:t>
             </a:r>
-            <a:endParaRPr sz="2400">
+            <a:endParaRPr sz="2400" dirty="0">
               <a:solidFill>
                 <a:schemeClr val="dk1"/>
               </a:solidFill>
@@ -7059,7 +12135,7 @@
               </a:rPr>
               <a:t>Выводы</a:t>
             </a:r>
-            <a:endParaRPr sz="2400">
+            <a:endParaRPr sz="2400" dirty="0">
               <a:solidFill>
                 <a:schemeClr val="dk1"/>
               </a:solidFill>
@@ -7243,7 +12319,7 @@
               </a:rPr>
               <a:t>Вопросы и рекомендации</a:t>
             </a:r>
-            <a:endParaRPr sz="2400">
+            <a:endParaRPr sz="2400" dirty="0">
               <a:solidFill>
                 <a:schemeClr val="dk1"/>
               </a:solidFill>
@@ -7265,6 +12341,13 @@
   <p:clrMapOvr>
     <a:masterClrMapping/>
   </p:clrMapOvr>
+  <p:timing>
+    <p:tnLst>
+      <p:par>
+        <p:cTn id="1" dur="indefinite" restart="never" nodeType="tmRoot"/>
+      </p:par>
+    </p:tnLst>
+  </p:timing>
 </p:sld>
 </file>
 
@@ -7311,7 +12394,7 @@
           <a:lstStyle/>
           <a:p>
             <a:r>
-              <a:rPr lang="ru" sz="4000" b="1">
+              <a:rPr lang="ru" sz="2800" b="1" dirty="0">
                 <a:solidFill>
                   <a:srgbClr val="000000"/>
                 </a:solidFill>
@@ -7323,7 +12406,7 @@
               <a:t>Цел</a:t>
             </a:r>
             <a:r>
-              <a:rPr lang="ru" sz="4000" b="1">
+              <a:rPr lang="ru" sz="2800" b="1" dirty="0">
                 <a:latin typeface="Roboto"/>
                 <a:ea typeface="Roboto"/>
                 <a:cs typeface="Roboto"/>
@@ -7332,7 +12415,7 @@
               <a:t>ь и задачи</a:t>
             </a:r>
             <a:r>
-              <a:rPr lang="ru" sz="4000" b="1">
+              <a:rPr lang="ru" sz="2800" b="1" dirty="0">
                 <a:solidFill>
                   <a:srgbClr val="000000"/>
                 </a:solidFill>
@@ -7343,7 +12426,7 @@
               </a:rPr>
               <a:t> проекта</a:t>
             </a:r>
-            <a:endParaRPr sz="4000" b="1">
+            <a:endParaRPr sz="2800" b="1" dirty="0">
               <a:solidFill>
                 <a:srgbClr val="000000"/>
               </a:solidFill>
@@ -7362,14 +12445,14 @@
           <p:nvPr>
             <p:extLst>
               <p:ext uri="{D42A27DB-BD31-4B8C-83A1-F6EECF244321}">
-                <p14:modId xmlns:p14="http://schemas.microsoft.com/office/powerpoint/2010/main" val="4101616611"/>
+                <p14:modId xmlns:p14="http://schemas.microsoft.com/office/powerpoint/2010/main" val="1295859583"/>
               </p:ext>
             </p:extLst>
           </p:nvPr>
         </p:nvGraphicFramePr>
         <p:xfrm>
           <a:off x="1270000" y="3176169"/>
-          <a:ext cx="9652000" cy="3159310"/>
+          <a:ext cx="9652000" cy="3014026"/>
         </p:xfrm>
         <a:graphic>
           <a:graphicData uri="http://schemas.openxmlformats.org/drawingml/2006/table">
@@ -7496,7 +12579,7 @@
                         <a:buNone/>
                       </a:pPr>
                       <a:r>
-                        <a:rPr lang="ru" sz="2400" dirty="0" smtClean="0">
+                        <a:rPr lang="ru" sz="1400" dirty="0" smtClean="0">
                           <a:solidFill>
                             <a:schemeClr val="dk1"/>
                           </a:solidFill>
@@ -7507,7 +12590,7 @@
                         </a:rPr>
                         <a:t>Организация сетевой связанности между отделами</a:t>
                       </a:r>
-                      <a:endParaRPr sz="2400" dirty="0">
+                      <a:endParaRPr sz="1400" dirty="0">
                         <a:solidFill>
                           <a:schemeClr val="dk1"/>
                         </a:solidFill>
@@ -7598,7 +12681,7 @@
                         </a:rPr>
                         <a:t>2.</a:t>
                       </a:r>
-                      <a:endParaRPr sz="2100" b="1">
+                      <a:endParaRPr sz="2100" b="1" dirty="0">
                         <a:solidFill>
                           <a:srgbClr val="3F299A"/>
                         </a:solidFill>
@@ -7674,7 +12757,7 @@
                         <a:buNone/>
                       </a:pPr>
                       <a:r>
-                        <a:rPr lang="ru" sz="2400" dirty="0" smtClean="0">
+                        <a:rPr lang="ru" sz="1400" dirty="0" smtClean="0">
                           <a:solidFill>
                             <a:schemeClr val="dk1"/>
                           </a:solidFill>
@@ -7686,7 +12769,7 @@
                         <a:t>Настройка</a:t>
                       </a:r>
                       <a:r>
-                        <a:rPr lang="ru" sz="2400" baseline="0" dirty="0" smtClean="0">
+                        <a:rPr lang="ru" sz="1400" baseline="0" dirty="0" smtClean="0">
                           <a:solidFill>
                             <a:schemeClr val="dk1"/>
                           </a:solidFill>
@@ -7697,7 +12780,7 @@
                         </a:rPr>
                         <a:t> отказоустойчивости сети</a:t>
                       </a:r>
-                      <a:endParaRPr sz="2400" dirty="0">
+                      <a:endParaRPr sz="1400" dirty="0">
                         <a:solidFill>
                           <a:schemeClr val="dk1"/>
                         </a:solidFill>
@@ -7788,7 +12871,7 @@
                         </a:rPr>
                         <a:t>3.</a:t>
                       </a:r>
-                      <a:endParaRPr sz="2100" b="1">
+                      <a:endParaRPr sz="2100" b="1" dirty="0">
                         <a:solidFill>
                           <a:srgbClr val="3F299A"/>
                         </a:solidFill>
@@ -7869,7 +12952,7 @@
                         <a:buNone/>
                       </a:pPr>
                       <a:r>
-                        <a:rPr lang="ru-RU" sz="2400" dirty="0" smtClean="0">
+                        <a:rPr lang="ru-RU" sz="1400" dirty="0" smtClean="0">
                           <a:solidFill>
                             <a:schemeClr val="dk1"/>
                           </a:solidFill>
@@ -7880,7 +12963,7 @@
                         </a:rPr>
                         <a:t>Настройка ограничений доступа</a:t>
                       </a:r>
-                      <a:endParaRPr sz="2400" dirty="0">
+                      <a:endParaRPr sz="1400" dirty="0">
                         <a:solidFill>
                           <a:schemeClr val="dk1"/>
                         </a:solidFill>
@@ -7959,18 +13042,6 @@
                         </a:spcAft>
                         <a:buNone/>
                       </a:pPr>
-                      <a:r>
-                        <a:rPr lang="ru" sz="2100" b="1" dirty="0">
-                          <a:solidFill>
-                            <a:srgbClr val="3F299A"/>
-                          </a:solidFill>
-                          <a:latin typeface="Roboto"/>
-                          <a:ea typeface="Roboto"/>
-                          <a:cs typeface="Roboto"/>
-                          <a:sym typeface="Roboto"/>
-                        </a:rPr>
-                        <a:t>4.</a:t>
-                      </a:r>
                       <a:endParaRPr sz="2100" b="1" dirty="0">
                         <a:solidFill>
                           <a:srgbClr val="3F299A"/>
@@ -8046,30 +13117,6 @@
                         </a:spcAft>
                         <a:buNone/>
                       </a:pPr>
-                      <a:r>
-                        <a:rPr lang="ru-RU" sz="2400" dirty="0" smtClean="0">
-                          <a:solidFill>
-                            <a:schemeClr val="dk1"/>
-                          </a:solidFill>
-                          <a:latin typeface="Roboto"/>
-                          <a:ea typeface="Roboto"/>
-                          <a:cs typeface="Roboto"/>
-                          <a:sym typeface="Roboto"/>
-                        </a:rPr>
-                        <a:t>Настройка </a:t>
-                      </a:r>
-                      <a:r>
-                        <a:rPr lang="en-US" sz="2400" dirty="0" err="1" smtClean="0">
-                          <a:solidFill>
-                            <a:schemeClr val="dk1"/>
-                          </a:solidFill>
-                          <a:latin typeface="Roboto"/>
-                          <a:ea typeface="Roboto"/>
-                          <a:cs typeface="Roboto"/>
-                          <a:sym typeface="Roboto"/>
-                        </a:rPr>
-                        <a:t>ipsec</a:t>
-                      </a:r>
                       <a:endParaRPr sz="2400" dirty="0">
                         <a:solidFill>
                           <a:schemeClr val="dk1"/>
@@ -8149,7 +13196,7 @@
                         </a:spcAft>
                         <a:buNone/>
                       </a:pPr>
-                      <a:endParaRPr sz="2400"/>
+                      <a:endParaRPr sz="2400" dirty="0"/>
                     </a:p>
                   </a:txBody>
                   <a:tcPr marL="264000" marR="121900" marT="121900" marB="121900">
@@ -8321,7 +13368,7 @@
           <a:lstStyle/>
           <a:p>
             <a:r>
-              <a:rPr lang="ru" sz="2000" dirty="0">
+              <a:rPr lang="ru" sz="1600" dirty="0">
                 <a:solidFill>
                   <a:schemeClr val="dk1"/>
                 </a:solidFill>
@@ -8333,7 +13380,7 @@
               <a:t>Цель </a:t>
             </a:r>
             <a:r>
-              <a:rPr lang="ru" sz="2000" dirty="0" smtClean="0">
+              <a:rPr lang="ru" sz="1600" dirty="0" smtClean="0">
                 <a:solidFill>
                   <a:schemeClr val="dk1"/>
                 </a:solidFill>
@@ -8344,7 +13391,7 @@
               </a:rPr>
               <a:t>проекта: Создание сегмента распределенной сети строительной компании </a:t>
             </a:r>
-            <a:endParaRPr sz="2000" dirty="0">
+            <a:endParaRPr sz="1600" dirty="0">
               <a:latin typeface="Roboto Medium"/>
               <a:ea typeface="Roboto Medium"/>
               <a:cs typeface="Roboto Medium"/>
@@ -8363,6 +13410,13 @@
   <p:clrMapOvr>
     <a:masterClrMapping/>
   </p:clrMapOvr>
+  <p:timing>
+    <p:tnLst>
+      <p:par>
+        <p:cTn id="1" dur="indefinite" restart="never" nodeType="tmRoot"/>
+      </p:par>
+    </p:tnLst>
+  </p:timing>
 </p:sld>
 </file>
 
@@ -8409,13 +13463,27 @@
           <a:lstStyle/>
           <a:p>
             <a:r>
-              <a:rPr lang="ru" sz="4000"/>
+              <a:rPr lang="ru" sz="2800" dirty="0">
+                <a:solidFill>
+                  <a:schemeClr val="dk1"/>
+                </a:solidFill>
+                <a:latin typeface="Roboto"/>
+                <a:ea typeface="Roboto"/>
+                <a:cs typeface="Roboto"/>
+              </a:rPr>
               <a:t>Какие технологии использовались</a:t>
             </a:r>
-            <a:endParaRPr sz="4000"/>
-          </a:p>
-          <a:p>
-            <a:endParaRPr sz="4000"/>
+            <a:endParaRPr sz="2800" dirty="0">
+              <a:solidFill>
+                <a:schemeClr val="dk1"/>
+              </a:solidFill>
+              <a:latin typeface="Roboto"/>
+              <a:ea typeface="Roboto"/>
+              <a:cs typeface="Roboto"/>
+            </a:endParaRPr>
+          </a:p>
+          <a:p>
+            <a:endParaRPr sz="4000" dirty="0"/>
           </a:p>
         </p:txBody>
       </p:sp>
@@ -8426,14 +13494,14 @@
           <p:nvPr>
             <p:extLst>
               <p:ext uri="{D42A27DB-BD31-4B8C-83A1-F6EECF244321}">
-                <p14:modId xmlns:p14="http://schemas.microsoft.com/office/powerpoint/2010/main" val="427343608"/>
+                <p14:modId xmlns:p14="http://schemas.microsoft.com/office/powerpoint/2010/main" val="1470136902"/>
               </p:ext>
             </p:extLst>
           </p:nvPr>
         </p:nvGraphicFramePr>
         <p:xfrm>
           <a:off x="1270000" y="2530367"/>
-          <a:ext cx="9652000" cy="3419339"/>
+          <a:ext cx="9652000" cy="3088440"/>
         </p:xfrm>
         <a:graphic>
           <a:graphicData uri="http://schemas.openxmlformats.org/drawingml/2006/table">
@@ -8473,7 +13541,7 @@
                         <a:buNone/>
                       </a:pPr>
                       <a:r>
-                        <a:rPr lang="ru" sz="2100" b="1">
+                        <a:rPr lang="ru" sz="2100" b="1" dirty="0">
                           <a:solidFill>
                             <a:srgbClr val="3F299A"/>
                           </a:solidFill>
@@ -8484,7 +13552,7 @@
                         </a:rPr>
                         <a:t>1.</a:t>
                       </a:r>
-                      <a:endParaRPr sz="2100" b="1">
+                      <a:endParaRPr sz="2100" b="1" dirty="0">
                         <a:solidFill>
                           <a:srgbClr val="3F299A"/>
                         </a:solidFill>
@@ -8560,7 +13628,43 @@
                         <a:buNone/>
                       </a:pPr>
                       <a:r>
-                        <a:rPr lang="en-US" sz="2100" dirty="0" err="1" smtClean="0">
+                        <a:rPr lang="en-US" sz="1600" baseline="0" dirty="0" smtClean="0">
+                          <a:solidFill>
+                            <a:schemeClr val="dk1"/>
+                          </a:solidFill>
+                          <a:latin typeface="Roboto"/>
+                          <a:ea typeface="Roboto"/>
+                          <a:cs typeface="Roboto"/>
+                          <a:sym typeface="Roboto"/>
+                        </a:rPr>
+                        <a:t>SSH</a:t>
+                      </a:r>
+                      <a:r>
+                        <a:rPr lang="ru-RU" sz="1600" baseline="0" dirty="0" smtClean="0">
+                          <a:solidFill>
+                            <a:schemeClr val="dk1"/>
+                          </a:solidFill>
+                          <a:latin typeface="Roboto"/>
+                          <a:ea typeface="Roboto"/>
+                          <a:cs typeface="Roboto"/>
+                          <a:sym typeface="Roboto"/>
+                        </a:rPr>
+                        <a:t>,</a:t>
+                      </a:r>
+                      <a:r>
+                        <a:rPr lang="en-US" sz="1600" baseline="0" dirty="0" smtClean="0">
+                          <a:solidFill>
+                            <a:schemeClr val="dk1"/>
+                          </a:solidFill>
+                          <a:latin typeface="Roboto"/>
+                          <a:ea typeface="Roboto"/>
+                          <a:cs typeface="Roboto"/>
+                          <a:sym typeface="Roboto"/>
+                        </a:rPr>
+                        <a:t> </a:t>
+                      </a:r>
+                      <a:r>
+                        <a:rPr lang="en-US" sz="1600" dirty="0" err="1" smtClean="0">
                           <a:solidFill>
                             <a:schemeClr val="dk1"/>
                           </a:solidFill>
@@ -8572,7 +13676,43 @@
                         <a:t>Vlan</a:t>
                       </a:r>
                       <a:r>
-                        <a:rPr lang="en-US" sz="2100" dirty="0" smtClean="0">
+                        <a:rPr lang="ru-RU" sz="1600" dirty="0" smtClean="0">
+                          <a:solidFill>
+                            <a:schemeClr val="dk1"/>
+                          </a:solidFill>
+                          <a:latin typeface="Roboto"/>
+                          <a:ea typeface="Roboto"/>
+                          <a:cs typeface="Roboto"/>
+                          <a:sym typeface="Roboto"/>
+                        </a:rPr>
+                        <a:t> (+ Роутер</a:t>
+                      </a:r>
+                      <a:r>
+                        <a:rPr lang="ru-RU" sz="1600" baseline="0" dirty="0" smtClean="0">
+                          <a:solidFill>
+                            <a:schemeClr val="dk1"/>
+                          </a:solidFill>
+                          <a:latin typeface="Roboto"/>
+                          <a:ea typeface="Roboto"/>
+                          <a:cs typeface="Roboto"/>
+                          <a:sym typeface="Roboto"/>
+                        </a:rPr>
+                        <a:t> на палочке</a:t>
+                      </a:r>
+                      <a:r>
+                        <a:rPr lang="ru-RU" sz="1600" dirty="0" smtClean="0">
+                          <a:solidFill>
+                            <a:schemeClr val="dk1"/>
+                          </a:solidFill>
+                          <a:latin typeface="Roboto"/>
+                          <a:ea typeface="Roboto"/>
+                          <a:cs typeface="Roboto"/>
+                          <a:sym typeface="Roboto"/>
+                        </a:rPr>
+                        <a:t>)</a:t>
+                      </a:r>
+                      <a:r>
+                        <a:rPr lang="en-US" sz="1600" dirty="0" smtClean="0">
                           <a:solidFill>
                             <a:schemeClr val="dk1"/>
                           </a:solidFill>
@@ -8584,7 +13724,7 @@
                         <a:t>,</a:t>
                       </a:r>
                       <a:r>
-                        <a:rPr lang="en-US" sz="2100" baseline="0" dirty="0" smtClean="0">
+                        <a:rPr lang="en-US" sz="1600" baseline="0" dirty="0" smtClean="0">
                           <a:solidFill>
                             <a:schemeClr val="dk1"/>
                           </a:solidFill>
@@ -8593,10 +13733,22 @@
                           <a:cs typeface="Roboto"/>
                           <a:sym typeface="Roboto"/>
                         </a:rPr>
-                        <a:t> STP, DHCP, </a:t>
+                        <a:t> </a:t>
                       </a:r>
                       <a:r>
-                        <a:rPr lang="ru-RU" sz="2100" baseline="0" dirty="0" smtClean="0">
+                        <a:rPr lang="en-US" sz="1600" baseline="0" dirty="0" smtClean="0">
+                          <a:solidFill>
+                            <a:schemeClr val="dk1"/>
+                          </a:solidFill>
+                          <a:latin typeface="Roboto"/>
+                          <a:ea typeface="Roboto"/>
+                          <a:cs typeface="Roboto"/>
+                          <a:sym typeface="Roboto"/>
+                        </a:rPr>
+                        <a:t>STP, </a:t>
+                      </a:r>
+                      <a:r>
+                        <a:rPr lang="ru-RU" sz="1600" baseline="0" dirty="0" smtClean="0">
                           <a:solidFill>
                             <a:schemeClr val="dk1"/>
                           </a:solidFill>
@@ -8608,7 +13760,7 @@
                         <a:t>Избыточность </a:t>
                       </a:r>
                       <a:r>
-                        <a:rPr lang="ru-RU" sz="2100" baseline="0" dirty="0" err="1" smtClean="0">
+                        <a:rPr lang="ru-RU" sz="1600" baseline="0" dirty="0" smtClean="0">
                           <a:solidFill>
                             <a:schemeClr val="dk1"/>
                           </a:solidFill>
@@ -8620,7 +13772,7 @@
                         <a:t>линков</a:t>
                       </a:r>
                       <a:r>
-                        <a:rPr lang="en-US" sz="2100" baseline="0" dirty="0" smtClean="0">
+                        <a:rPr lang="en-US" sz="1600" baseline="0" dirty="0" smtClean="0">
                           <a:solidFill>
                             <a:schemeClr val="dk1"/>
                           </a:solidFill>
@@ -8629,10 +13781,10 @@
                           <a:cs typeface="Roboto"/>
                           <a:sym typeface="Roboto"/>
                         </a:rPr>
-                        <a:t> (</a:t>
+                        <a:t> (Port channel, HSRP), </a:t>
                       </a:r>
                       <a:r>
-                        <a:rPr lang="en-US" sz="2100" baseline="0" smtClean="0">
+                        <a:rPr lang="en-US" sz="1600" baseline="0" dirty="0" smtClean="0">
                           <a:solidFill>
                             <a:schemeClr val="dk1"/>
                           </a:solidFill>
@@ -8641,45 +13793,9 @@
                           <a:cs typeface="Roboto"/>
                           <a:sym typeface="Roboto"/>
                         </a:rPr>
-                        <a:t>Port channel, </a:t>
+                        <a:t>DHCP</a:t>
                       </a:r>
-                      <a:r>
-                        <a:rPr lang="en-US" sz="2100" baseline="0" dirty="0" smtClean="0">
-                          <a:solidFill>
-                            <a:schemeClr val="dk1"/>
-                          </a:solidFill>
-                          <a:latin typeface="Roboto"/>
-                          <a:ea typeface="Roboto"/>
-                          <a:cs typeface="Roboto"/>
-                          <a:sym typeface="Roboto"/>
-                        </a:rPr>
-                        <a:t>HSRP), </a:t>
-                      </a:r>
-                      <a:r>
-                        <a:rPr lang="ru-RU" sz="2100" baseline="0" dirty="0" err="1" smtClean="0">
-                          <a:solidFill>
-                            <a:schemeClr val="dk1"/>
-                          </a:solidFill>
-                          <a:latin typeface="Roboto"/>
-                          <a:ea typeface="Roboto"/>
-                          <a:cs typeface="Roboto"/>
-                          <a:sym typeface="Roboto"/>
-                        </a:rPr>
-                        <a:t>Тунелирование</a:t>
-                      </a:r>
-                      <a:r>
-                        <a:rPr lang="en-US" sz="2100" baseline="0" dirty="0" smtClean="0">
-                          <a:solidFill>
-                            <a:schemeClr val="dk1"/>
-                          </a:solidFill>
-                          <a:latin typeface="Roboto"/>
-                          <a:ea typeface="Roboto"/>
-                          <a:cs typeface="Roboto"/>
-                          <a:sym typeface="Roboto"/>
-                        </a:rPr>
-                        <a:t>, SSH </a:t>
-                      </a:r>
-                      <a:endParaRPr sz="2100" dirty="0">
+                      <a:endParaRPr sz="1600" dirty="0">
                         <a:solidFill>
                           <a:schemeClr val="dk1"/>
                         </a:solidFill>
@@ -8770,7 +13886,7 @@
                         </a:rPr>
                         <a:t>2.</a:t>
                       </a:r>
-                      <a:endParaRPr sz="2100" b="1">
+                      <a:endParaRPr sz="2100" b="1" dirty="0">
                         <a:solidFill>
                           <a:srgbClr val="3F299A"/>
                         </a:solidFill>
@@ -8846,7 +13962,7 @@
                         <a:buNone/>
                       </a:pPr>
                       <a:r>
-                        <a:rPr lang="ru-RU" sz="2100" dirty="0" smtClean="0">
+                        <a:rPr lang="ru-RU" sz="1600" dirty="0" smtClean="0">
                           <a:solidFill>
                             <a:schemeClr val="dk1"/>
                           </a:solidFill>
@@ -8858,7 +13974,7 @@
                         <a:t>Статическая</a:t>
                       </a:r>
                       <a:r>
-                        <a:rPr lang="ru-RU" sz="2100" baseline="0" dirty="0" smtClean="0">
+                        <a:rPr lang="ru-RU" sz="1600" baseline="0" dirty="0" smtClean="0">
                           <a:solidFill>
                             <a:schemeClr val="dk1"/>
                           </a:solidFill>
@@ -8869,7 +13985,7 @@
                         </a:rPr>
                         <a:t> и динамическая маршрутизация</a:t>
                       </a:r>
-                      <a:endParaRPr sz="2100" dirty="0">
+                      <a:endParaRPr sz="1600" dirty="0">
                         <a:solidFill>
                           <a:schemeClr val="dk1"/>
                         </a:solidFill>
@@ -8960,7 +14076,7 @@
                         </a:rPr>
                         <a:t>3.</a:t>
                       </a:r>
-                      <a:endParaRPr sz="2100" b="1">
+                      <a:endParaRPr sz="2100" b="1" dirty="0">
                         <a:solidFill>
                           <a:srgbClr val="3F299A"/>
                         </a:solidFill>
@@ -9036,7 +14152,7 @@
                         <a:buNone/>
                       </a:pPr>
                       <a:r>
-                        <a:rPr lang="en-US" sz="2100" dirty="0" smtClean="0">
+                        <a:rPr lang="en-US" sz="1600" dirty="0" smtClean="0">
                           <a:solidFill>
                             <a:schemeClr val="dk1"/>
                           </a:solidFill>
@@ -9048,7 +14164,7 @@
                         <a:t>ACL</a:t>
                       </a:r>
                       <a:r>
-                        <a:rPr lang="en-US" sz="2100" baseline="0" dirty="0" smtClean="0">
+                        <a:rPr lang="en-US" sz="1600" baseline="0" dirty="0" smtClean="0">
                           <a:solidFill>
                             <a:schemeClr val="dk1"/>
                           </a:solidFill>
@@ -9060,7 +14176,7 @@
                         <a:t> </a:t>
                       </a:r>
                       <a:r>
-                        <a:rPr lang="ru-RU" sz="2100" baseline="0" dirty="0" smtClean="0">
+                        <a:rPr lang="ru-RU" sz="1600" baseline="0" dirty="0" smtClean="0">
                           <a:solidFill>
                             <a:schemeClr val="dk1"/>
                           </a:solidFill>
@@ -9142,7 +14258,7 @@
                         <a:buNone/>
                       </a:pPr>
                       <a:r>
-                        <a:rPr lang="ru" sz="2100" b="1">
+                        <a:rPr lang="ru" sz="2100" b="1" dirty="0">
                           <a:solidFill>
                             <a:srgbClr val="3F299A"/>
                           </a:solidFill>
@@ -9153,7 +14269,7 @@
                         </a:rPr>
                         <a:t>4.</a:t>
                       </a:r>
-                      <a:endParaRPr sz="2100" b="1">
+                      <a:endParaRPr sz="2100" b="1" dirty="0">
                         <a:solidFill>
                           <a:srgbClr val="3F299A"/>
                         </a:solidFill>
@@ -9216,7 +14332,7 @@
                     <a:bodyPr/>
                     <a:lstStyle/>
                     <a:p>
-                      <a:pPr marL="0" lvl="0" indent="0" algn="l" rtl="0">
+                      <a:pPr marL="0" marR="0" lvl="0" indent="0" algn="l" defTabSz="914400" rtl="0" eaLnBrk="1" fontAlgn="auto" latinLnBrk="0" hangingPunct="1">
                         <a:lnSpc>
                           <a:spcPct val="115000"/>
                         </a:lnSpc>
@@ -9226,10 +14342,15 @@
                         <a:spcAft>
                           <a:spcPts val="0"/>
                         </a:spcAft>
+                        <a:buClrTx/>
+                        <a:buSzTx/>
+                        <a:buFontTx/>
                         <a:buNone/>
+                        <a:tabLst/>
+                        <a:defRPr/>
                       </a:pPr>
                       <a:r>
-                        <a:rPr lang="en-US" sz="2100" dirty="0" smtClean="0">
+                        <a:rPr lang="en-US" sz="1600" dirty="0" smtClean="0">
                           <a:solidFill>
                             <a:schemeClr val="dk1"/>
                           </a:solidFill>
@@ -9240,7 +14361,103 @@
                         </a:rPr>
                         <a:t>PAT</a:t>
                       </a:r>
-                      <a:endParaRPr sz="2100" dirty="0">
+                      <a:r>
+                        <a:rPr lang="ru-RU" sz="1600" dirty="0" smtClean="0">
+                          <a:solidFill>
+                            <a:schemeClr val="dk1"/>
+                          </a:solidFill>
+                          <a:latin typeface="Roboto"/>
+                          <a:ea typeface="Roboto"/>
+                          <a:cs typeface="Roboto"/>
+                          <a:sym typeface="Roboto"/>
+                        </a:rPr>
+                        <a:t>(</a:t>
+                      </a:r>
+                      <a:r>
+                        <a:rPr lang="en-US" sz="1600" baseline="0" dirty="0" smtClean="0">
+                          <a:solidFill>
+                            <a:schemeClr val="dk1"/>
+                          </a:solidFill>
+                          <a:latin typeface="Roboto"/>
+                          <a:ea typeface="Roboto"/>
+                          <a:cs typeface="Roboto"/>
+                          <a:sym typeface="Roboto"/>
+                        </a:rPr>
+                        <a:t>Nat </a:t>
+                      </a:r>
+                      <a:r>
+                        <a:rPr lang="ru-RU" sz="1600" baseline="0" dirty="0" smtClean="0">
+                          <a:solidFill>
+                            <a:schemeClr val="dk1"/>
+                          </a:solidFill>
+                          <a:latin typeface="Roboto"/>
+                          <a:ea typeface="Roboto"/>
+                          <a:cs typeface="Roboto"/>
+                          <a:sym typeface="Roboto"/>
+                        </a:rPr>
+                        <a:t>с перегрузкой</a:t>
+                      </a:r>
+                      <a:r>
+                        <a:rPr lang="ru-RU" sz="1600" dirty="0" smtClean="0">
+                          <a:solidFill>
+                            <a:schemeClr val="dk1"/>
+                          </a:solidFill>
+                          <a:latin typeface="Roboto"/>
+                          <a:ea typeface="Roboto"/>
+                          <a:cs typeface="Roboto"/>
+                          <a:sym typeface="Roboto"/>
+                        </a:rPr>
+                        <a:t>),</a:t>
+                      </a:r>
+                      <a:r>
+                        <a:rPr lang="en-US" sz="1600" dirty="0" smtClean="0">
+                          <a:solidFill>
+                            <a:schemeClr val="dk1"/>
+                          </a:solidFill>
+                          <a:latin typeface="Roboto"/>
+                          <a:ea typeface="Roboto"/>
+                          <a:cs typeface="Roboto"/>
+                          <a:sym typeface="Roboto"/>
+                        </a:rPr>
+                        <a:t> Nat(</a:t>
+                      </a:r>
+                      <a:r>
+                        <a:rPr lang="ru-RU" sz="1600" dirty="0" smtClean="0">
+                          <a:solidFill>
+                            <a:schemeClr val="dk1"/>
+                          </a:solidFill>
+                          <a:latin typeface="Roboto"/>
+                          <a:ea typeface="Roboto"/>
+                          <a:cs typeface="Roboto"/>
+                          <a:sym typeface="Roboto"/>
+                        </a:rPr>
+                        <a:t>порт</a:t>
+                      </a:r>
+                      <a:r>
+                        <a:rPr lang="ru-RU" sz="1600" baseline="0" dirty="0" smtClean="0">
+                          <a:solidFill>
+                            <a:schemeClr val="dk1"/>
+                          </a:solidFill>
+                          <a:latin typeface="Roboto"/>
+                          <a:ea typeface="Roboto"/>
+                          <a:cs typeface="Roboto"/>
+                          <a:sym typeface="Roboto"/>
+                        </a:rPr>
+                        <a:t> в порт</a:t>
+                      </a:r>
+                      <a:r>
+                        <a:rPr lang="en-US" sz="1600" dirty="0" smtClean="0">
+                          <a:solidFill>
+                            <a:schemeClr val="dk1"/>
+                          </a:solidFill>
+                          <a:latin typeface="Roboto"/>
+                          <a:ea typeface="Roboto"/>
+                          <a:cs typeface="Roboto"/>
+                          <a:sym typeface="Roboto"/>
+                        </a:rPr>
+                        <a:t>)</a:t>
+                      </a:r>
+                      <a:endParaRPr sz="1600" dirty="0">
                         <a:solidFill>
                           <a:schemeClr val="dk1"/>
                         </a:solidFill>
@@ -9319,7 +14536,7 @@
                         </a:spcAft>
                         <a:buNone/>
                       </a:pPr>
-                      <a:endParaRPr sz="2400"/>
+                      <a:endParaRPr sz="2400" dirty="0"/>
                     </a:p>
                   </a:txBody>
                   <a:tcPr marL="264000" marR="121900" marT="121900" marB="121900">
@@ -9464,6 +14681,13 @@
   <p:clrMapOvr>
     <a:masterClrMapping/>
   </p:clrMapOvr>
+  <p:timing>
+    <p:tnLst>
+      <p:par>
+        <p:cTn id="1" dur="indefinite" restart="never" nodeType="tmRoot"/>
+      </p:par>
+    </p:tnLst>
+  </p:timing>
 </p:sld>
 </file>
 
@@ -9472,7 +14696,7 @@
   <p:cSld>
     <p:spTree>
       <p:nvGrpSpPr>
-        <p:cNvPr id="1" name="Shape 203"/>
+        <p:cNvPr id="1" name=""/>
         <p:cNvGrpSpPr/>
         <p:nvPr/>
       </p:nvGrpSpPr>
@@ -9486,341 +14710,123 @@
       </p:grpSpPr>
       <p:sp>
         <p:nvSpPr>
-          <p:cNvPr id="204" name="Google Shape;204;p41"/>
-          <p:cNvSpPr txBox="1">
+          <p:cNvPr id="2" name="Заголовок 1"/>
+          <p:cNvSpPr>
             <a:spLocks noGrp="1"/>
           </p:cNvSpPr>
           <p:nvPr>
             <p:ph type="title"/>
           </p:nvPr>
         </p:nvSpPr>
+        <p:spPr/>
+        <p:txBody>
+          <a:bodyPr/>
+          <a:lstStyle/>
+          <a:p>
+            <a:r>
+              <a:rPr lang="ru-RU" sz="2800" b="1" dirty="0">
+                <a:solidFill>
+                  <a:srgbClr val="000000"/>
+                </a:solidFill>
+                <a:latin typeface="Roboto"/>
+                <a:ea typeface="Roboto"/>
+                <a:cs typeface="Roboto"/>
+              </a:rPr>
+              <a:t>Схема сети</a:t>
+            </a:r>
+            <a:endParaRPr lang="ru-RU" sz="2800" b="1" dirty="0">
+              <a:solidFill>
+                <a:srgbClr val="000000"/>
+              </a:solidFill>
+              <a:latin typeface="Roboto"/>
+              <a:ea typeface="Roboto"/>
+              <a:cs typeface="Roboto"/>
+            </a:endParaRPr>
+          </a:p>
+        </p:txBody>
+      </p:sp>
+      <p:sp>
+        <p:nvSpPr>
+          <p:cNvPr id="3" name="Текст 2"/>
+          <p:cNvSpPr>
+            <a:spLocks noGrp="1"/>
+          </p:cNvSpPr>
+          <p:nvPr>
+            <p:ph type="body" idx="1"/>
+          </p:nvPr>
+        </p:nvSpPr>
         <p:spPr>
           <a:xfrm>
-            <a:off x="667400" y="440965"/>
-            <a:ext cx="11360800" cy="1461200"/>
+            <a:off x="631889" y="1884203"/>
+            <a:ext cx="11331314" cy="4555200"/>
+          </a:xfrm>
+        </p:spPr>
+        <p:txBody>
+          <a:bodyPr/>
+          <a:lstStyle/>
+          <a:p>
+            <a:endParaRPr lang="ru-RU" dirty="0"/>
+          </a:p>
+        </p:txBody>
+      </p:sp>
+      <p:pic>
+        <p:nvPicPr>
+          <p:cNvPr id="1026" name="Picture 2" descr="Alt text"/>
+          <p:cNvPicPr>
+            <a:picLocks noChangeAspect="1" noChangeArrowheads="1"/>
+          </p:cNvPicPr>
+          <p:nvPr/>
+        </p:nvPicPr>
+        <p:blipFill>
+          <a:blip r:embed="rId2">
+            <a:extLst>
+              <a:ext uri="{28A0092B-C50C-407E-A947-70E740481C1C}">
+                <a14:useLocalDpi xmlns:a14="http://schemas.microsoft.com/office/drawing/2010/main" val="0"/>
+              </a:ext>
+            </a:extLst>
+          </a:blip>
+          <a:srcRect/>
+          <a:stretch>
+            <a:fillRect/>
+          </a:stretch>
+        </p:blipFill>
+        <p:spPr bwMode="auto">
+          <a:xfrm>
+            <a:off x="631889" y="1884203"/>
+            <a:ext cx="11331313" cy="4555200"/>
           </a:xfrm>
           <a:prstGeom prst="rect">
             <a:avLst/>
           </a:prstGeom>
+          <a:noFill/>
+          <a:extLst>
+            <a:ext uri="{909E8E84-426E-40DD-AFC4-6F175D3DCCD1}">
+              <a14:hiddenFill xmlns:a14="http://schemas.microsoft.com/office/drawing/2010/main">
+                <a:solidFill>
+                  <a:srgbClr val="FFFFFF"/>
+                </a:solidFill>
+              </a14:hiddenFill>
+            </a:ext>
+          </a:extLst>
         </p:spPr>
-        <p:txBody>
-          <a:bodyPr spcFirstLastPara="1" vert="horz" wrap="square" lIns="121900" tIns="121900" rIns="121900" bIns="121900" rtlCol="0" anchor="t" anchorCtr="0">
-            <a:noAutofit/>
-          </a:bodyPr>
-          <a:lstStyle/>
-          <a:p>
-            <a:r>
-              <a:rPr lang="ru" sz="4000"/>
-              <a:t>Что получилось</a:t>
-            </a:r>
-            <a:endParaRPr sz="4000"/>
-          </a:p>
-        </p:txBody>
-      </p:sp>
-      <p:grpSp>
-        <p:nvGrpSpPr>
-          <p:cNvPr id="205" name="Google Shape;205;p41"/>
-          <p:cNvGrpSpPr/>
-          <p:nvPr/>
-        </p:nvGrpSpPr>
-        <p:grpSpPr>
-          <a:xfrm>
-            <a:off x="4907527" y="1320937"/>
-            <a:ext cx="6868851" cy="2904943"/>
-            <a:chOff x="3450575" y="752750"/>
-            <a:chExt cx="5006451" cy="2031050"/>
-          </a:xfrm>
-        </p:grpSpPr>
-        <p:pic>
-          <p:nvPicPr>
-            <p:cNvPr id="206" name="Google Shape;206;p41"/>
-            <p:cNvPicPr preferRelativeResize="0"/>
-            <p:nvPr/>
-          </p:nvPicPr>
-          <p:blipFill>
-            <a:blip r:embed="rId3">
-              <a:alphaModFix/>
-            </a:blip>
-            <a:stretch>
-              <a:fillRect/>
-            </a:stretch>
-          </p:blipFill>
-          <p:spPr>
-            <a:xfrm>
-              <a:off x="3450575" y="752750"/>
-              <a:ext cx="5006451" cy="2031050"/>
-            </a:xfrm>
-            <a:prstGeom prst="rect">
-              <a:avLst/>
-            </a:prstGeom>
-            <a:noFill/>
-            <a:ln>
-              <a:noFill/>
-            </a:ln>
-            <a:effectLst>
-              <a:outerShdw blurRad="200025" dist="28575" dir="4200000" algn="bl" rotWithShape="0">
-                <a:srgbClr val="000000">
-                  <a:alpha val="30000"/>
-                </a:srgbClr>
-              </a:outerShdw>
-            </a:effectLst>
-          </p:spPr>
-        </p:pic>
-        <p:sp>
-          <p:nvSpPr>
-            <p:cNvPr id="207" name="Google Shape;207;p41"/>
-            <p:cNvSpPr txBox="1"/>
-            <p:nvPr/>
-          </p:nvSpPr>
-          <p:spPr>
-            <a:xfrm>
-              <a:off x="4199565" y="956335"/>
-              <a:ext cx="4065000" cy="1549327"/>
-            </a:xfrm>
-            <a:prstGeom prst="rect">
-              <a:avLst/>
-            </a:prstGeom>
-            <a:noFill/>
-            <a:ln>
-              <a:noFill/>
-            </a:ln>
-          </p:spPr>
-          <p:txBody>
-            <a:bodyPr spcFirstLastPara="1" wrap="square" lIns="121900" tIns="121900" rIns="121900" bIns="121900" anchor="t" anchorCtr="0">
-              <a:spAutoFit/>
-            </a:bodyPr>
-            <a:lstStyle/>
-            <a:p>
-              <a:r>
-                <a:rPr lang="ru" sz="1600" b="1">
-                  <a:latin typeface="Roboto"/>
-                  <a:ea typeface="Roboto"/>
-                  <a:cs typeface="Roboto"/>
-                  <a:sym typeface="Roboto"/>
-                </a:rPr>
-                <a:t>Разместите на слайде(-ах) </a:t>
-              </a:r>
-              <a:r>
-                <a:rPr lang="ru" sz="1600" b="1">
-                  <a:solidFill>
-                    <a:schemeClr val="dk1"/>
-                  </a:solidFill>
-                  <a:latin typeface="Roboto"/>
-                  <a:ea typeface="Roboto"/>
-                  <a:cs typeface="Roboto"/>
-                  <a:sym typeface="Roboto"/>
-                </a:rPr>
-                <a:t>артефакты проекта: </a:t>
-              </a:r>
-              <a:endParaRPr sz="1600" b="1">
-                <a:solidFill>
-                  <a:schemeClr val="dk1"/>
-                </a:solidFill>
-                <a:latin typeface="Roboto"/>
-                <a:ea typeface="Roboto"/>
-                <a:cs typeface="Roboto"/>
-                <a:sym typeface="Roboto"/>
-              </a:endParaRPr>
-            </a:p>
-            <a:p>
-              <a:pPr marL="609585" indent="-406390">
-                <a:buClr>
-                  <a:schemeClr val="dk1"/>
-                </a:buClr>
-                <a:buSzPts val="1200"/>
-                <a:buFont typeface="Roboto"/>
-                <a:buChar char="-"/>
-              </a:pPr>
-              <a:r>
-                <a:rPr lang="ru" sz="1600">
-                  <a:solidFill>
-                    <a:schemeClr val="dk1"/>
-                  </a:solidFill>
-                  <a:latin typeface="Roboto"/>
-                  <a:ea typeface="Roboto"/>
-                  <a:cs typeface="Roboto"/>
-                  <a:sym typeface="Roboto"/>
-                </a:rPr>
-                <a:t>код</a:t>
-              </a:r>
-              <a:endParaRPr sz="1600">
-                <a:solidFill>
-                  <a:schemeClr val="dk1"/>
-                </a:solidFill>
-                <a:latin typeface="Roboto"/>
-                <a:ea typeface="Roboto"/>
-                <a:cs typeface="Roboto"/>
-                <a:sym typeface="Roboto"/>
-              </a:endParaRPr>
-            </a:p>
-            <a:p>
-              <a:pPr marL="609585" indent="-406390">
-                <a:buClr>
-                  <a:schemeClr val="dk1"/>
-                </a:buClr>
-                <a:buSzPts val="1200"/>
-                <a:buFont typeface="Roboto"/>
-                <a:buChar char="-"/>
-              </a:pPr>
-              <a:r>
-                <a:rPr lang="ru" sz="1600">
-                  <a:solidFill>
-                    <a:schemeClr val="dk1"/>
-                  </a:solidFill>
-                  <a:latin typeface="Roboto"/>
-                  <a:ea typeface="Roboto"/>
-                  <a:cs typeface="Roboto"/>
-                  <a:sym typeface="Roboto"/>
-                </a:rPr>
-                <a:t>схемы (архитектура, БД)</a:t>
-              </a:r>
-              <a:endParaRPr sz="1600">
-                <a:solidFill>
-                  <a:schemeClr val="dk1"/>
-                </a:solidFill>
-                <a:latin typeface="Roboto"/>
-                <a:ea typeface="Roboto"/>
-                <a:cs typeface="Roboto"/>
-                <a:sym typeface="Roboto"/>
-              </a:endParaRPr>
-            </a:p>
-            <a:p>
-              <a:pPr marL="609585" indent="-406390">
-                <a:buClr>
-                  <a:schemeClr val="dk1"/>
-                </a:buClr>
-                <a:buSzPts val="1200"/>
-                <a:buFont typeface="Roboto"/>
-                <a:buChar char="-"/>
-              </a:pPr>
-              <a:r>
-                <a:rPr lang="ru" sz="1600">
-                  <a:solidFill>
-                    <a:schemeClr val="dk1"/>
-                  </a:solidFill>
-                  <a:latin typeface="Roboto"/>
-                  <a:ea typeface="Roboto"/>
-                  <a:cs typeface="Roboto"/>
-                  <a:sym typeface="Roboto"/>
-                </a:rPr>
-                <a:t>ссылки на файлы в репозитории</a:t>
-              </a:r>
-              <a:endParaRPr sz="1600">
-                <a:solidFill>
-                  <a:schemeClr val="dk1"/>
-                </a:solidFill>
-                <a:latin typeface="Roboto"/>
-                <a:ea typeface="Roboto"/>
-                <a:cs typeface="Roboto"/>
-                <a:sym typeface="Roboto"/>
-              </a:endParaRPr>
-            </a:p>
-            <a:p>
-              <a:pPr marL="609585" indent="-406390">
-                <a:buClr>
-                  <a:schemeClr val="dk1"/>
-                </a:buClr>
-                <a:buSzPts val="1200"/>
-                <a:buFont typeface="Roboto"/>
-                <a:buChar char="-"/>
-              </a:pPr>
-              <a:r>
-                <a:rPr lang="ru" sz="1600">
-                  <a:solidFill>
-                    <a:schemeClr val="dk1"/>
-                  </a:solidFill>
-                  <a:latin typeface="Roboto"/>
-                  <a:ea typeface="Roboto"/>
-                  <a:cs typeface="Roboto"/>
-                  <a:sym typeface="Roboto"/>
-                </a:rPr>
-                <a:t>скрины экранов приложения</a:t>
-              </a:r>
-              <a:endParaRPr sz="1600">
-                <a:solidFill>
-                  <a:schemeClr val="dk1"/>
-                </a:solidFill>
-                <a:latin typeface="Roboto"/>
-                <a:ea typeface="Roboto"/>
-                <a:cs typeface="Roboto"/>
-                <a:sym typeface="Roboto"/>
-              </a:endParaRPr>
-            </a:p>
-            <a:p>
-              <a:pPr marL="609585" indent="-406390">
-                <a:buClr>
-                  <a:schemeClr val="dk1"/>
-                </a:buClr>
-                <a:buSzPts val="1200"/>
-                <a:buFont typeface="Roboto"/>
-                <a:buChar char="-"/>
-              </a:pPr>
-              <a:r>
-                <a:rPr lang="ru" sz="1600">
-                  <a:solidFill>
-                    <a:schemeClr val="dk1"/>
-                  </a:solidFill>
-                  <a:latin typeface="Roboto"/>
-                  <a:ea typeface="Roboto"/>
-                  <a:cs typeface="Roboto"/>
-                  <a:sym typeface="Roboto"/>
-                </a:rPr>
-                <a:t>фото или видео</a:t>
-              </a:r>
-              <a:endParaRPr sz="1600">
-                <a:solidFill>
-                  <a:schemeClr val="dk1"/>
-                </a:solidFill>
-                <a:latin typeface="Roboto"/>
-                <a:ea typeface="Roboto"/>
-                <a:cs typeface="Roboto"/>
-                <a:sym typeface="Roboto"/>
-              </a:endParaRPr>
-            </a:p>
-            <a:p>
-              <a:endParaRPr sz="1600">
-                <a:solidFill>
-                  <a:schemeClr val="dk1"/>
-                </a:solidFill>
-                <a:latin typeface="Roboto"/>
-                <a:ea typeface="Roboto"/>
-                <a:cs typeface="Roboto"/>
-                <a:sym typeface="Roboto"/>
-              </a:endParaRPr>
-            </a:p>
-            <a:p>
-              <a:r>
-                <a:rPr lang="ru" sz="1600">
-                  <a:solidFill>
-                    <a:schemeClr val="dk1"/>
-                  </a:solidFill>
-                  <a:latin typeface="Roboto"/>
-                  <a:ea typeface="Roboto"/>
-                  <a:cs typeface="Roboto"/>
-                  <a:sym typeface="Roboto"/>
-                </a:rPr>
-                <a:t>Либо продемонстрируйте проект отдельно.</a:t>
-              </a:r>
-              <a:endParaRPr sz="1600">
-                <a:latin typeface="Roboto"/>
-                <a:ea typeface="Roboto"/>
-                <a:cs typeface="Roboto"/>
-                <a:sym typeface="Roboto"/>
-              </a:endParaRPr>
-            </a:p>
-          </p:txBody>
-        </p:sp>
-      </p:grpSp>
+      </p:pic>
     </p:spTree>
     <p:extLst>
       <p:ext uri="{BB962C8B-B14F-4D97-AF65-F5344CB8AC3E}">
-        <p14:creationId xmlns:p14="http://schemas.microsoft.com/office/powerpoint/2010/main" val="1794391752"/>
+        <p14:creationId xmlns:p14="http://schemas.microsoft.com/office/powerpoint/2010/main" val="3858636342"/>
       </p:ext>
     </p:extLst>
   </p:cSld>
   <p:clrMapOvr>
     <a:masterClrMapping/>
   </p:clrMapOvr>
+  <p:timing>
+    <p:tnLst>
+      <p:par>
+        <p:cTn id="1" dur="indefinite" restart="never" nodeType="tmRoot"/>
+      </p:par>
+    </p:tnLst>
+  </p:timing>
 </p:sld>
 </file>
 
@@ -9829,7 +14835,7 @@
   <p:cSld>
     <p:spTree>
       <p:nvGrpSpPr>
-        <p:cNvPr id="1" name="Shape 211"/>
+        <p:cNvPr id="1" name=""/>
         <p:cNvGrpSpPr/>
         <p:nvPr/>
       </p:nvGrpSpPr>
@@ -9843,1007 +14849,386 @@
       </p:grpSpPr>
       <p:sp>
         <p:nvSpPr>
-          <p:cNvPr id="212" name="Google Shape;212;p42"/>
-          <p:cNvSpPr txBox="1">
+          <p:cNvPr id="2" name="Заголовок 1"/>
+          <p:cNvSpPr>
             <a:spLocks noGrp="1"/>
           </p:cNvSpPr>
           <p:nvPr>
             <p:ph type="title"/>
           </p:nvPr>
         </p:nvSpPr>
-        <p:spPr>
-          <a:xfrm>
-            <a:off x="667400" y="440965"/>
-            <a:ext cx="11360800" cy="1461200"/>
-          </a:xfrm>
-          <a:prstGeom prst="rect">
-            <a:avLst/>
-          </a:prstGeom>
-        </p:spPr>
+        <p:spPr/>
         <p:txBody>
-          <a:bodyPr spcFirstLastPara="1" vert="horz" wrap="square" lIns="121900" tIns="121900" rIns="121900" bIns="121900" rtlCol="0" anchor="t" anchorCtr="0">
-            <a:noAutofit/>
+          <a:bodyPr/>
+          <a:lstStyle/>
+          <a:p>
+            <a:r>
+              <a:rPr lang="en-US" sz="2800" b="1" dirty="0" smtClean="0">
+                <a:latin typeface="Roboto" panose="020B0604020202020204"/>
+              </a:rPr>
+              <a:t>Vlan</a:t>
+            </a:r>
+            <a:endParaRPr lang="ru-RU" sz="2800" b="1" dirty="0"/>
+          </a:p>
+        </p:txBody>
+      </p:sp>
+      <p:sp>
+        <p:nvSpPr>
+          <p:cNvPr id="3" name="Текст 2"/>
+          <p:cNvSpPr>
+            <a:spLocks noGrp="1"/>
+          </p:cNvSpPr>
+          <p:nvPr>
+            <p:ph type="body" idx="1"/>
+          </p:nvPr>
+        </p:nvSpPr>
+        <p:spPr/>
+        <p:txBody>
+          <a:bodyPr>
+            <a:normAutofit/>
           </a:bodyPr>
           <a:lstStyle/>
           <a:p>
             <a:r>
-              <a:rPr lang="ru" sz="4533"/>
-              <a:t>Выводы</a:t>
-            </a:r>
-            <a:endParaRPr sz="4000"/>
-          </a:p>
-          <a:p>
-            <a:endParaRPr sz="4000"/>
-          </a:p>
-        </p:txBody>
-      </p:sp>
-      <p:graphicFrame>
-        <p:nvGraphicFramePr>
-          <p:cNvPr id="213" name="Google Shape;213;p42"/>
-          <p:cNvGraphicFramePr/>
-          <p:nvPr/>
-        </p:nvGraphicFramePr>
-        <p:xfrm>
-          <a:off x="1270000" y="2291200"/>
-          <a:ext cx="9652000" cy="2470752"/>
-        </p:xfrm>
-        <a:graphic>
-          <a:graphicData uri="http://schemas.openxmlformats.org/drawingml/2006/table">
-            <a:tbl>
-              <a:tblPr>
-                <a:noFill/>
-              </a:tblPr>
-              <a:tblGrid>
-                <a:gridCol w="652567">
-                  <a:extLst>
-                    <a:ext uri="{9D8B030D-6E8A-4147-A177-3AD203B41FA5}">
-                      <a16:colId xmlns:a16="http://schemas.microsoft.com/office/drawing/2014/main" val="20000"/>
-                    </a:ext>
-                  </a:extLst>
-                </a:gridCol>
-                <a:gridCol w="8999433">
-                  <a:extLst>
-                    <a:ext uri="{9D8B030D-6E8A-4147-A177-3AD203B41FA5}">
-                      <a16:colId xmlns:a16="http://schemas.microsoft.com/office/drawing/2014/main" val="20001"/>
-                    </a:ext>
-                  </a:extLst>
-                </a:gridCol>
-              </a:tblGrid>
-              <a:tr h="617688">
-                <a:tc>
-                  <a:txBody>
-                    <a:bodyPr/>
-                    <a:lstStyle/>
-                    <a:p>
-                      <a:pPr marL="0" lvl="0" indent="0" algn="l" rtl="0">
-                        <a:spcBef>
-                          <a:spcPts val="0"/>
-                        </a:spcBef>
-                        <a:spcAft>
-                          <a:spcPts val="0"/>
-                        </a:spcAft>
-                        <a:buNone/>
-                      </a:pPr>
-                      <a:r>
-                        <a:rPr lang="ru" sz="2100" b="1">
-                          <a:solidFill>
-                            <a:srgbClr val="3F299A"/>
-                          </a:solidFill>
-                          <a:latin typeface="Roboto"/>
-                          <a:ea typeface="Roboto"/>
-                          <a:cs typeface="Roboto"/>
-                          <a:sym typeface="Roboto"/>
-                        </a:rPr>
-                        <a:t>1.</a:t>
-                      </a:r>
-                      <a:endParaRPr sz="2100" b="1">
-                        <a:solidFill>
-                          <a:srgbClr val="3F299A"/>
-                        </a:solidFill>
-                        <a:latin typeface="Roboto"/>
-                        <a:ea typeface="Roboto"/>
-                        <a:cs typeface="Roboto"/>
-                        <a:sym typeface="Roboto"/>
-                      </a:endParaRPr>
-                    </a:p>
-                  </a:txBody>
-                  <a:tcPr marL="264000" marR="121900" marT="121900" marB="121900">
-                    <a:lnL w="9525" cap="flat" cmpd="sng">
-                      <a:solidFill>
-                        <a:srgbClr val="BFC1F0">
-                          <a:alpha val="0"/>
-                        </a:srgbClr>
-                      </a:solidFill>
-                      <a:prstDash val="solid"/>
-                      <a:round/>
-                      <a:headEnd type="none" w="sm" len="sm"/>
-                      <a:tailEnd type="none" w="sm" len="sm"/>
-                    </a:lnL>
-                    <a:lnR w="9525" cap="flat" cmpd="sng">
-                      <a:solidFill>
-                        <a:srgbClr val="FFFFFF">
-                          <a:alpha val="0"/>
-                        </a:srgbClr>
-                      </a:solidFill>
-                      <a:prstDash val="solid"/>
-                      <a:round/>
-                      <a:headEnd type="none" w="sm" len="sm"/>
-                      <a:tailEnd type="none" w="sm" len="sm"/>
-                    </a:lnR>
-                    <a:lnT w="9525" cap="flat" cmpd="sng">
-                      <a:solidFill>
-                        <a:srgbClr val="BFC1F0">
-                          <a:alpha val="0"/>
-                        </a:srgbClr>
-                      </a:solidFill>
-                      <a:prstDash val="solid"/>
-                      <a:round/>
-                      <a:headEnd type="none" w="sm" len="sm"/>
-                      <a:tailEnd type="none" w="sm" len="sm"/>
-                    </a:lnT>
-                    <a:lnB w="9525" cap="flat" cmpd="sng">
-                      <a:solidFill>
-                        <a:srgbClr val="BFC1F0">
-                          <a:alpha val="0"/>
-                        </a:srgbClr>
-                      </a:solidFill>
-                      <a:prstDash val="solid"/>
-                      <a:round/>
-                      <a:headEnd type="none" w="sm" len="sm"/>
-                      <a:tailEnd type="none" w="sm" len="sm"/>
-                    </a:lnB>
-                  </a:tcPr>
-                </a:tc>
-                <a:tc>
-                  <a:txBody>
-                    <a:bodyPr/>
-                    <a:lstStyle/>
-                    <a:p>
-                      <a:pPr marL="0" lvl="0" indent="0" algn="l" rtl="0">
-                        <a:lnSpc>
-                          <a:spcPct val="115000"/>
-                        </a:lnSpc>
-                        <a:spcBef>
-                          <a:spcPts val="0"/>
-                        </a:spcBef>
-                        <a:spcAft>
-                          <a:spcPts val="0"/>
-                        </a:spcAft>
-                        <a:buNone/>
-                      </a:pPr>
-                      <a:endParaRPr sz="2100">
-                        <a:solidFill>
-                          <a:srgbClr val="9857F3"/>
-                        </a:solidFill>
-                        <a:latin typeface="Roboto"/>
-                        <a:ea typeface="Roboto"/>
-                        <a:cs typeface="Roboto"/>
-                        <a:sym typeface="Roboto"/>
-                      </a:endParaRPr>
-                    </a:p>
-                  </a:txBody>
-                  <a:tcPr marL="264000" marR="121900" marT="121900" marB="121900">
-                    <a:lnL w="9525" cap="flat" cmpd="sng">
-                      <a:solidFill>
-                        <a:srgbClr val="FFFFFF">
-                          <a:alpha val="0"/>
-                        </a:srgbClr>
-                      </a:solidFill>
-                      <a:prstDash val="solid"/>
-                      <a:round/>
-                      <a:headEnd type="none" w="sm" len="sm"/>
-                      <a:tailEnd type="none" w="sm" len="sm"/>
-                    </a:lnL>
-                    <a:lnR w="9525" cap="flat" cmpd="sng">
-                      <a:solidFill>
-                        <a:srgbClr val="BFC1F0">
-                          <a:alpha val="0"/>
-                        </a:srgbClr>
-                      </a:solidFill>
-                      <a:prstDash val="solid"/>
-                      <a:round/>
-                      <a:headEnd type="none" w="sm" len="sm"/>
-                      <a:tailEnd type="none" w="sm" len="sm"/>
-                    </a:lnR>
-                    <a:lnT w="9525" cap="flat" cmpd="sng">
-                      <a:solidFill>
-                        <a:srgbClr val="BFC1F0">
-                          <a:alpha val="0"/>
-                        </a:srgbClr>
-                      </a:solidFill>
-                      <a:prstDash val="solid"/>
-                      <a:round/>
-                      <a:headEnd type="none" w="sm" len="sm"/>
-                      <a:tailEnd type="none" w="sm" len="sm"/>
-                    </a:lnT>
-                    <a:lnB w="9525" cap="flat" cmpd="sng">
-                      <a:solidFill>
-                        <a:srgbClr val="BFC1F0">
-                          <a:alpha val="0"/>
-                        </a:srgbClr>
-                      </a:solidFill>
-                      <a:prstDash val="solid"/>
-                      <a:round/>
-                      <a:headEnd type="none" w="sm" len="sm"/>
-                      <a:tailEnd type="none" w="sm" len="sm"/>
-                    </a:lnB>
-                  </a:tcPr>
-                </a:tc>
-                <a:extLst>
-                  <a:ext uri="{0D108BD9-81ED-4DB2-BD59-A6C34878D82A}">
-                    <a16:rowId xmlns:a16="http://schemas.microsoft.com/office/drawing/2014/main" val="10000"/>
-                  </a:ext>
-                </a:extLst>
-              </a:tr>
-              <a:tr h="617688">
-                <a:tc>
-                  <a:txBody>
-                    <a:bodyPr/>
-                    <a:lstStyle/>
-                    <a:p>
-                      <a:pPr marL="0" lvl="0" indent="0" algn="l" rtl="0">
-                        <a:spcBef>
-                          <a:spcPts val="0"/>
-                        </a:spcBef>
-                        <a:spcAft>
-                          <a:spcPts val="0"/>
-                        </a:spcAft>
-                        <a:buNone/>
-                      </a:pPr>
-                      <a:r>
-                        <a:rPr lang="ru" sz="2100" b="1">
-                          <a:solidFill>
-                            <a:srgbClr val="3F299A"/>
-                          </a:solidFill>
-                          <a:latin typeface="Roboto"/>
-                          <a:ea typeface="Roboto"/>
-                          <a:cs typeface="Roboto"/>
-                          <a:sym typeface="Roboto"/>
-                        </a:rPr>
-                        <a:t>2.</a:t>
-                      </a:r>
-                      <a:endParaRPr sz="2100" b="1">
-                        <a:solidFill>
-                          <a:srgbClr val="3F299A"/>
-                        </a:solidFill>
-                        <a:latin typeface="Roboto"/>
-                        <a:ea typeface="Roboto"/>
-                        <a:cs typeface="Roboto"/>
-                        <a:sym typeface="Roboto"/>
-                      </a:endParaRPr>
-                    </a:p>
-                  </a:txBody>
-                  <a:tcPr marL="264000" marR="121900" marT="121900" marB="121900">
-                    <a:lnL w="9525" cap="flat" cmpd="sng">
-                      <a:solidFill>
-                        <a:srgbClr val="BFC1F0">
-                          <a:alpha val="0"/>
-                        </a:srgbClr>
-                      </a:solidFill>
-                      <a:prstDash val="solid"/>
-                      <a:round/>
-                      <a:headEnd type="none" w="sm" len="sm"/>
-                      <a:tailEnd type="none" w="sm" len="sm"/>
-                    </a:lnL>
-                    <a:lnR w="9525" cap="flat" cmpd="sng">
-                      <a:solidFill>
-                        <a:srgbClr val="FFFFFF">
-                          <a:alpha val="0"/>
-                        </a:srgbClr>
-                      </a:solidFill>
-                      <a:prstDash val="solid"/>
-                      <a:round/>
-                      <a:headEnd type="none" w="sm" len="sm"/>
-                      <a:tailEnd type="none" w="sm" len="sm"/>
-                    </a:lnR>
-                    <a:lnT w="9525" cap="flat" cmpd="sng">
-                      <a:solidFill>
-                        <a:srgbClr val="BFC1F0">
-                          <a:alpha val="0"/>
-                        </a:srgbClr>
-                      </a:solidFill>
-                      <a:prstDash val="solid"/>
-                      <a:round/>
-                      <a:headEnd type="none" w="sm" len="sm"/>
-                      <a:tailEnd type="none" w="sm" len="sm"/>
-                    </a:lnT>
-                    <a:lnB w="9525" cap="flat" cmpd="sng">
-                      <a:solidFill>
-                        <a:srgbClr val="BFC1F0">
-                          <a:alpha val="0"/>
-                        </a:srgbClr>
-                      </a:solidFill>
-                      <a:prstDash val="solid"/>
-                      <a:round/>
-                      <a:headEnd type="none" w="sm" len="sm"/>
-                      <a:tailEnd type="none" w="sm" len="sm"/>
-                    </a:lnB>
-                  </a:tcPr>
-                </a:tc>
-                <a:tc>
-                  <a:txBody>
-                    <a:bodyPr/>
-                    <a:lstStyle/>
-                    <a:p>
-                      <a:pPr marL="0" lvl="0" indent="0" algn="l" rtl="0">
-                        <a:lnSpc>
-                          <a:spcPct val="115000"/>
-                        </a:lnSpc>
-                        <a:spcBef>
-                          <a:spcPts val="0"/>
-                        </a:spcBef>
-                        <a:spcAft>
-                          <a:spcPts val="0"/>
-                        </a:spcAft>
-                        <a:buNone/>
-                      </a:pPr>
-                      <a:endParaRPr sz="2100">
-                        <a:solidFill>
-                          <a:srgbClr val="9857F3"/>
-                        </a:solidFill>
-                        <a:latin typeface="Roboto"/>
-                        <a:ea typeface="Roboto"/>
-                        <a:cs typeface="Roboto"/>
-                        <a:sym typeface="Roboto"/>
-                      </a:endParaRPr>
-                    </a:p>
-                  </a:txBody>
-                  <a:tcPr marL="264000" marR="121900" marT="121900" marB="121900">
-                    <a:lnL w="9525" cap="flat" cmpd="sng">
-                      <a:solidFill>
-                        <a:srgbClr val="FFFFFF">
-                          <a:alpha val="0"/>
-                        </a:srgbClr>
-                      </a:solidFill>
-                      <a:prstDash val="solid"/>
-                      <a:round/>
-                      <a:headEnd type="none" w="sm" len="sm"/>
-                      <a:tailEnd type="none" w="sm" len="sm"/>
-                    </a:lnL>
-                    <a:lnR w="9525" cap="flat" cmpd="sng">
-                      <a:solidFill>
-                        <a:srgbClr val="BFC1F0">
-                          <a:alpha val="0"/>
-                        </a:srgbClr>
-                      </a:solidFill>
-                      <a:prstDash val="solid"/>
-                      <a:round/>
-                      <a:headEnd type="none" w="sm" len="sm"/>
-                      <a:tailEnd type="none" w="sm" len="sm"/>
-                    </a:lnR>
-                    <a:lnT w="9525" cap="flat" cmpd="sng">
-                      <a:solidFill>
-                        <a:srgbClr val="BFC1F0">
-                          <a:alpha val="0"/>
-                        </a:srgbClr>
-                      </a:solidFill>
-                      <a:prstDash val="solid"/>
-                      <a:round/>
-                      <a:headEnd type="none" w="sm" len="sm"/>
-                      <a:tailEnd type="none" w="sm" len="sm"/>
-                    </a:lnT>
-                    <a:lnB w="9525" cap="flat" cmpd="sng">
-                      <a:solidFill>
-                        <a:srgbClr val="BFC1F0">
-                          <a:alpha val="0"/>
-                        </a:srgbClr>
-                      </a:solidFill>
-                      <a:prstDash val="solid"/>
-                      <a:round/>
-                      <a:headEnd type="none" w="sm" len="sm"/>
-                      <a:tailEnd type="none" w="sm" len="sm"/>
-                    </a:lnB>
-                  </a:tcPr>
-                </a:tc>
-                <a:extLst>
-                  <a:ext uri="{0D108BD9-81ED-4DB2-BD59-A6C34878D82A}">
-                    <a16:rowId xmlns:a16="http://schemas.microsoft.com/office/drawing/2014/main" val="10001"/>
-                  </a:ext>
-                </a:extLst>
-              </a:tr>
-              <a:tr h="617688">
-                <a:tc>
-                  <a:txBody>
-                    <a:bodyPr/>
-                    <a:lstStyle/>
-                    <a:p>
-                      <a:pPr marL="0" lvl="0" indent="0" algn="l" rtl="0">
-                        <a:spcBef>
-                          <a:spcPts val="0"/>
-                        </a:spcBef>
-                        <a:spcAft>
-                          <a:spcPts val="0"/>
-                        </a:spcAft>
-                        <a:buNone/>
-                      </a:pPr>
-                      <a:r>
-                        <a:rPr lang="ru" sz="2100" b="1">
-                          <a:solidFill>
-                            <a:srgbClr val="3F299A"/>
-                          </a:solidFill>
-                          <a:latin typeface="Roboto"/>
-                          <a:ea typeface="Roboto"/>
-                          <a:cs typeface="Roboto"/>
-                          <a:sym typeface="Roboto"/>
-                        </a:rPr>
-                        <a:t>3.</a:t>
-                      </a:r>
-                      <a:endParaRPr sz="2100" b="1">
-                        <a:solidFill>
-                          <a:srgbClr val="3F299A"/>
-                        </a:solidFill>
-                        <a:latin typeface="Roboto"/>
-                        <a:ea typeface="Roboto"/>
-                        <a:cs typeface="Roboto"/>
-                        <a:sym typeface="Roboto"/>
-                      </a:endParaRPr>
-                    </a:p>
-                  </a:txBody>
-                  <a:tcPr marL="264000" marR="121900" marT="121900" marB="121900">
-                    <a:lnL w="9525" cap="flat" cmpd="sng">
-                      <a:solidFill>
-                        <a:srgbClr val="BFC1F0">
-                          <a:alpha val="0"/>
-                        </a:srgbClr>
-                      </a:solidFill>
-                      <a:prstDash val="solid"/>
-                      <a:round/>
-                      <a:headEnd type="none" w="sm" len="sm"/>
-                      <a:tailEnd type="none" w="sm" len="sm"/>
-                    </a:lnL>
-                    <a:lnR w="9525" cap="flat" cmpd="sng">
-                      <a:solidFill>
-                        <a:srgbClr val="FFFFFF">
-                          <a:alpha val="0"/>
-                        </a:srgbClr>
-                      </a:solidFill>
-                      <a:prstDash val="solid"/>
-                      <a:round/>
-                      <a:headEnd type="none" w="sm" len="sm"/>
-                      <a:tailEnd type="none" w="sm" len="sm"/>
-                    </a:lnR>
-                    <a:lnT w="9525" cap="flat" cmpd="sng">
-                      <a:solidFill>
-                        <a:srgbClr val="BFC1F0">
-                          <a:alpha val="0"/>
-                        </a:srgbClr>
-                      </a:solidFill>
-                      <a:prstDash val="solid"/>
-                      <a:round/>
-                      <a:headEnd type="none" w="sm" len="sm"/>
-                      <a:tailEnd type="none" w="sm" len="sm"/>
-                    </a:lnT>
-                    <a:lnB w="9525" cap="flat" cmpd="sng">
-                      <a:solidFill>
-                        <a:srgbClr val="BFC1F0">
-                          <a:alpha val="0"/>
-                        </a:srgbClr>
-                      </a:solidFill>
-                      <a:prstDash val="solid"/>
-                      <a:round/>
-                      <a:headEnd type="none" w="sm" len="sm"/>
-                      <a:tailEnd type="none" w="sm" len="sm"/>
-                    </a:lnB>
-                  </a:tcPr>
-                </a:tc>
-                <a:tc>
-                  <a:txBody>
-                    <a:bodyPr/>
-                    <a:lstStyle/>
-                    <a:p>
-                      <a:pPr marL="0" lvl="0" indent="0" algn="l" rtl="0">
-                        <a:lnSpc>
-                          <a:spcPct val="115000"/>
-                        </a:lnSpc>
-                        <a:spcBef>
-                          <a:spcPts val="0"/>
-                        </a:spcBef>
-                        <a:spcAft>
-                          <a:spcPts val="0"/>
-                        </a:spcAft>
-                        <a:buNone/>
-                      </a:pPr>
-                      <a:endParaRPr sz="2100">
-                        <a:solidFill>
-                          <a:srgbClr val="9857F3"/>
-                        </a:solidFill>
-                        <a:latin typeface="Roboto"/>
-                        <a:ea typeface="Roboto"/>
-                        <a:cs typeface="Roboto"/>
-                        <a:sym typeface="Roboto"/>
-                      </a:endParaRPr>
-                    </a:p>
-                  </a:txBody>
-                  <a:tcPr marL="264000" marR="121900" marT="121900" marB="121900">
-                    <a:lnL w="9525" cap="flat" cmpd="sng">
-                      <a:solidFill>
-                        <a:srgbClr val="FFFFFF">
-                          <a:alpha val="0"/>
-                        </a:srgbClr>
-                      </a:solidFill>
-                      <a:prstDash val="solid"/>
-                      <a:round/>
-                      <a:headEnd type="none" w="sm" len="sm"/>
-                      <a:tailEnd type="none" w="sm" len="sm"/>
-                    </a:lnL>
-                    <a:lnR w="9525" cap="flat" cmpd="sng">
-                      <a:solidFill>
-                        <a:srgbClr val="BFC1F0">
-                          <a:alpha val="0"/>
-                        </a:srgbClr>
-                      </a:solidFill>
-                      <a:prstDash val="solid"/>
-                      <a:round/>
-                      <a:headEnd type="none" w="sm" len="sm"/>
-                      <a:tailEnd type="none" w="sm" len="sm"/>
-                    </a:lnR>
-                    <a:lnT w="9525" cap="flat" cmpd="sng">
-                      <a:solidFill>
-                        <a:srgbClr val="BFC1F0">
-                          <a:alpha val="0"/>
-                        </a:srgbClr>
-                      </a:solidFill>
-                      <a:prstDash val="solid"/>
-                      <a:round/>
-                      <a:headEnd type="none" w="sm" len="sm"/>
-                      <a:tailEnd type="none" w="sm" len="sm"/>
-                    </a:lnT>
-                    <a:lnB w="9525" cap="flat" cmpd="sng">
-                      <a:solidFill>
-                        <a:srgbClr val="BFC1F0">
-                          <a:alpha val="0"/>
-                        </a:srgbClr>
-                      </a:solidFill>
-                      <a:prstDash val="solid"/>
-                      <a:round/>
-                      <a:headEnd type="none" w="sm" len="sm"/>
-                      <a:tailEnd type="none" w="sm" len="sm"/>
-                    </a:lnB>
-                  </a:tcPr>
-                </a:tc>
-                <a:extLst>
-                  <a:ext uri="{0D108BD9-81ED-4DB2-BD59-A6C34878D82A}">
-                    <a16:rowId xmlns:a16="http://schemas.microsoft.com/office/drawing/2014/main" val="10002"/>
-                  </a:ext>
-                </a:extLst>
-              </a:tr>
-              <a:tr h="617688">
-                <a:tc>
-                  <a:txBody>
-                    <a:bodyPr/>
-                    <a:lstStyle/>
-                    <a:p>
-                      <a:pPr marL="0" lvl="0" indent="0" algn="l" rtl="0">
-                        <a:spcBef>
-                          <a:spcPts val="0"/>
-                        </a:spcBef>
-                        <a:spcAft>
-                          <a:spcPts val="0"/>
-                        </a:spcAft>
-                        <a:buNone/>
-                      </a:pPr>
-                      <a:endParaRPr sz="2400"/>
-                    </a:p>
-                  </a:txBody>
-                  <a:tcPr marL="264000" marR="121900" marT="121900" marB="121900">
-                    <a:lnL w="9525" cap="flat" cmpd="sng">
-                      <a:solidFill>
-                        <a:srgbClr val="BFC1F0">
-                          <a:alpha val="0"/>
-                        </a:srgbClr>
-                      </a:solidFill>
-                      <a:prstDash val="solid"/>
-                      <a:round/>
-                      <a:headEnd type="none" w="sm" len="sm"/>
-                      <a:tailEnd type="none" w="sm" len="sm"/>
-                    </a:lnL>
-                    <a:lnR w="9525" cap="flat" cmpd="sng">
-                      <a:solidFill>
-                        <a:srgbClr val="FFFFFF">
-                          <a:alpha val="0"/>
-                        </a:srgbClr>
-                      </a:solidFill>
-                      <a:prstDash val="solid"/>
-                      <a:round/>
-                      <a:headEnd type="none" w="sm" len="sm"/>
-                      <a:tailEnd type="none" w="sm" len="sm"/>
-                    </a:lnR>
-                    <a:lnT w="9525" cap="flat" cmpd="sng">
-                      <a:solidFill>
-                        <a:srgbClr val="BFC1F0">
-                          <a:alpha val="0"/>
-                        </a:srgbClr>
-                      </a:solidFill>
-                      <a:prstDash val="solid"/>
-                      <a:round/>
-                      <a:headEnd type="none" w="sm" len="sm"/>
-                      <a:tailEnd type="none" w="sm" len="sm"/>
-                    </a:lnT>
-                    <a:lnB w="9525" cap="flat" cmpd="sng">
-                      <a:solidFill>
-                        <a:srgbClr val="BFC1F0">
-                          <a:alpha val="0"/>
-                        </a:srgbClr>
-                      </a:solidFill>
-                      <a:prstDash val="solid"/>
-                      <a:round/>
-                      <a:headEnd type="none" w="sm" len="sm"/>
-                      <a:tailEnd type="none" w="sm" len="sm"/>
-                    </a:lnB>
-                  </a:tcPr>
-                </a:tc>
-                <a:tc>
-                  <a:txBody>
-                    <a:bodyPr/>
-                    <a:lstStyle/>
-                    <a:p>
-                      <a:pPr marL="0" lvl="0" indent="0" algn="l" rtl="0">
-                        <a:lnSpc>
-                          <a:spcPct val="115000"/>
-                        </a:lnSpc>
-                        <a:spcBef>
-                          <a:spcPts val="0"/>
-                        </a:spcBef>
-                        <a:spcAft>
-                          <a:spcPts val="0"/>
-                        </a:spcAft>
-                        <a:buNone/>
-                      </a:pPr>
-                      <a:endParaRPr sz="2100">
-                        <a:solidFill>
-                          <a:srgbClr val="9857F3"/>
-                        </a:solidFill>
-                        <a:latin typeface="Roboto"/>
-                        <a:ea typeface="Roboto"/>
-                        <a:cs typeface="Roboto"/>
-                        <a:sym typeface="Roboto"/>
-                      </a:endParaRPr>
-                    </a:p>
-                  </a:txBody>
-                  <a:tcPr marL="264000" marR="121900" marT="121900" marB="121900">
-                    <a:lnL w="9525" cap="flat" cmpd="sng">
-                      <a:solidFill>
-                        <a:srgbClr val="FFFFFF">
-                          <a:alpha val="0"/>
-                        </a:srgbClr>
-                      </a:solidFill>
-                      <a:prstDash val="solid"/>
-                      <a:round/>
-                      <a:headEnd type="none" w="sm" len="sm"/>
-                      <a:tailEnd type="none" w="sm" len="sm"/>
-                    </a:lnL>
-                    <a:lnR w="9525" cap="flat" cmpd="sng">
-                      <a:solidFill>
-                        <a:srgbClr val="BFC1F0">
-                          <a:alpha val="0"/>
-                        </a:srgbClr>
-                      </a:solidFill>
-                      <a:prstDash val="solid"/>
-                      <a:round/>
-                      <a:headEnd type="none" w="sm" len="sm"/>
-                      <a:tailEnd type="none" w="sm" len="sm"/>
-                    </a:lnR>
-                    <a:lnT w="9525" cap="flat" cmpd="sng">
-                      <a:solidFill>
-                        <a:srgbClr val="BFC1F0">
-                          <a:alpha val="0"/>
-                        </a:srgbClr>
-                      </a:solidFill>
-                      <a:prstDash val="solid"/>
-                      <a:round/>
-                      <a:headEnd type="none" w="sm" len="sm"/>
-                      <a:tailEnd type="none" w="sm" len="sm"/>
-                    </a:lnT>
-                    <a:lnB w="9525" cap="flat" cmpd="sng">
-                      <a:solidFill>
-                        <a:srgbClr val="BFC1F0">
-                          <a:alpha val="0"/>
-                        </a:srgbClr>
-                      </a:solidFill>
-                      <a:prstDash val="solid"/>
-                      <a:round/>
-                      <a:headEnd type="none" w="sm" len="sm"/>
-                      <a:tailEnd type="none" w="sm" len="sm"/>
-                    </a:lnB>
-                  </a:tcPr>
-                </a:tc>
-                <a:extLst>
-                  <a:ext uri="{0D108BD9-81ED-4DB2-BD59-A6C34878D82A}">
-                    <a16:rowId xmlns:a16="http://schemas.microsoft.com/office/drawing/2014/main" val="10003"/>
-                  </a:ext>
-                </a:extLst>
-              </a:tr>
-            </a:tbl>
-          </a:graphicData>
-        </a:graphic>
-      </p:graphicFrame>
-      <p:grpSp>
-        <p:nvGrpSpPr>
-          <p:cNvPr id="214" name="Google Shape;214;p42"/>
-          <p:cNvGrpSpPr/>
-          <p:nvPr/>
-        </p:nvGrpSpPr>
-        <p:grpSpPr>
-          <a:xfrm>
-            <a:off x="4844345" y="1665291"/>
-            <a:ext cx="7379552" cy="3114005"/>
-            <a:chOff x="4729635" y="887067"/>
-            <a:chExt cx="3375207" cy="1399343"/>
-          </a:xfrm>
-        </p:grpSpPr>
-        <p:pic>
-          <p:nvPicPr>
-            <p:cNvPr id="215" name="Google Shape;215;p42"/>
-            <p:cNvPicPr preferRelativeResize="0"/>
-            <p:nvPr/>
-          </p:nvPicPr>
-          <p:blipFill>
-            <a:blip r:embed="rId3">
-              <a:alphaModFix/>
-            </a:blip>
-            <a:stretch>
-              <a:fillRect/>
-            </a:stretch>
-          </p:blipFill>
-          <p:spPr>
-            <a:xfrm>
-              <a:off x="4729635" y="887067"/>
-              <a:ext cx="3375207" cy="1399343"/>
-            </a:xfrm>
-            <a:prstGeom prst="rect">
-              <a:avLst/>
-            </a:prstGeom>
-            <a:noFill/>
-            <a:ln>
-              <a:noFill/>
-            </a:ln>
-            <a:effectLst>
-              <a:outerShdw blurRad="200025" dist="28575" dir="4200000" algn="bl" rotWithShape="0">
-                <a:srgbClr val="000000">
-                  <a:alpha val="30000"/>
-                </a:srgbClr>
-              </a:outerShdw>
-            </a:effectLst>
-          </p:spPr>
-        </p:pic>
-        <p:sp>
-          <p:nvSpPr>
-            <p:cNvPr id="216" name="Google Shape;216;p42"/>
-            <p:cNvSpPr txBox="1"/>
-            <p:nvPr/>
-          </p:nvSpPr>
-          <p:spPr>
-            <a:xfrm>
-              <a:off x="5208319" y="1064138"/>
-              <a:ext cx="2869500" cy="1023704"/>
-            </a:xfrm>
-            <a:prstGeom prst="rect">
-              <a:avLst/>
-            </a:prstGeom>
-            <a:noFill/>
-            <a:ln>
-              <a:noFill/>
-            </a:ln>
-          </p:spPr>
-          <p:txBody>
-            <a:bodyPr spcFirstLastPara="1" wrap="square" lIns="121900" tIns="121900" rIns="121900" bIns="121900" anchor="t" anchorCtr="0">
-              <a:spAutoFit/>
-            </a:bodyPr>
-            <a:lstStyle/>
-            <a:p>
-              <a:pPr>
-                <a:buClr>
-                  <a:schemeClr val="dk1"/>
-                </a:buClr>
-                <a:buSzPts val="1100"/>
-              </a:pPr>
-              <a:r>
-                <a:rPr lang="ru" sz="1467" b="1">
-                  <a:solidFill>
-                    <a:schemeClr val="dk1"/>
-                  </a:solidFill>
-                </a:rPr>
-                <a:t>Оцените работу над проектом и ответьте на вопросы:</a:t>
-              </a:r>
-              <a:endParaRPr sz="1467" b="1">
+              <a:rPr lang="en-US" sz="2100" b="1" dirty="0">
                 <a:solidFill>
-                  <a:schemeClr val="dk1"/>
-                </a:solidFill>
-              </a:endParaRPr>
-            </a:p>
-            <a:p>
-              <a:pPr marL="609585" indent="-397923">
-                <a:buClr>
-                  <a:schemeClr val="dk1"/>
-                </a:buClr>
-                <a:buSzPts val="1100"/>
-                <a:buAutoNum type="arabicPeriod"/>
-              </a:pPr>
-              <a:r>
-                <a:rPr lang="ru" sz="1467">
-                  <a:solidFill>
-                    <a:schemeClr val="dk1"/>
-                  </a:solidFill>
-                </a:rPr>
-                <a:t>У вас получилось достичь цели и выполнить все задачи?</a:t>
-              </a:r>
-              <a:endParaRPr sz="1467">
-                <a:solidFill>
-                  <a:schemeClr val="dk1"/>
-                </a:solidFill>
-              </a:endParaRPr>
-            </a:p>
-            <a:p>
-              <a:pPr marL="609585" indent="-397923">
-                <a:buClr>
-                  <a:schemeClr val="dk1"/>
-                </a:buClr>
-                <a:buSzPts val="1100"/>
-                <a:buAutoNum type="arabicPeriod"/>
-              </a:pPr>
-              <a:r>
-                <a:rPr lang="ru" sz="1467">
-                  <a:solidFill>
-                    <a:schemeClr val="dk1"/>
-                  </a:solidFill>
-                </a:rPr>
-                <a:t>Что далось легко, а с чем возникли трудности?</a:t>
-              </a:r>
-              <a:endParaRPr sz="1467">
-                <a:solidFill>
-                  <a:schemeClr val="dk1"/>
-                </a:solidFill>
-              </a:endParaRPr>
-            </a:p>
-            <a:p>
-              <a:pPr marL="609585" indent="-397923">
-                <a:buClr>
-                  <a:schemeClr val="dk1"/>
-                </a:buClr>
-                <a:buSzPts val="1100"/>
-                <a:buAutoNum type="arabicPeriod"/>
-              </a:pPr>
-              <a:r>
-                <a:rPr lang="ru" sz="1467">
-                  <a:solidFill>
-                    <a:schemeClr val="dk1"/>
-                  </a:solidFill>
-                </a:rPr>
-                <a:t>Сколько времени занял проект?</a:t>
-              </a:r>
-              <a:endParaRPr sz="1467">
-                <a:solidFill>
-                  <a:schemeClr val="dk1"/>
-                </a:solidFill>
-              </a:endParaRPr>
-            </a:p>
-            <a:p>
-              <a:pPr marL="609585" indent="-397923">
-                <a:buClr>
-                  <a:schemeClr val="dk1"/>
-                </a:buClr>
-                <a:buSzPts val="1100"/>
-                <a:buAutoNum type="arabicPeriod"/>
-              </a:pPr>
-              <a:r>
-                <a:rPr lang="ru" sz="1467">
-                  <a:solidFill>
-                    <a:schemeClr val="dk1"/>
-                  </a:solidFill>
-                </a:rPr>
-                <a:t>Насколько полезным оказался для вас проект от 1 до 10?</a:t>
-              </a:r>
-              <a:endParaRPr sz="1467">
-                <a:solidFill>
-                  <a:schemeClr val="dk1"/>
-                </a:solidFill>
-              </a:endParaRPr>
-            </a:p>
-            <a:p>
-              <a:pPr marL="1219170" lvl="1" indent="-397923">
-                <a:buClr>
-                  <a:schemeClr val="dk1"/>
-                </a:buClr>
-                <a:buSzPts val="1100"/>
-                <a:buAutoNum type="alphaLcPeriod"/>
-              </a:pPr>
-              <a:r>
-                <a:rPr lang="ru" sz="1467">
-                  <a:solidFill>
-                    <a:schemeClr val="dk1"/>
-                  </a:solidFill>
-                </a:rPr>
-                <a:t>1 = я не научился ничему новому</a:t>
-              </a:r>
-              <a:endParaRPr sz="1467">
-                <a:solidFill>
-                  <a:schemeClr val="dk1"/>
-                </a:solidFill>
-              </a:endParaRPr>
-            </a:p>
-            <a:p>
-              <a:pPr marL="1219170" lvl="1" indent="-397923">
-                <a:buClr>
-                  <a:schemeClr val="dk1"/>
-                </a:buClr>
-                <a:buSzPts val="1100"/>
-                <a:buAutoNum type="alphaLcPeriod"/>
-              </a:pPr>
-              <a:r>
-                <a:rPr lang="ru" sz="1467">
-                  <a:solidFill>
-                    <a:schemeClr val="dk1"/>
-                  </a:solidFill>
-                </a:rPr>
-                <a:t>10 = очень полезно, я получил новый опыт</a:t>
-              </a:r>
-              <a:endParaRPr sz="1467">
-                <a:solidFill>
-                  <a:schemeClr val="dk1"/>
-                </a:solidFill>
-              </a:endParaRPr>
-            </a:p>
-            <a:p>
-              <a:pPr marL="609585" indent="-397923">
-                <a:buClr>
-                  <a:schemeClr val="dk1"/>
-                </a:buClr>
-                <a:buSzPts val="1100"/>
-                <a:buAutoNum type="arabicPeriod"/>
-              </a:pPr>
-              <a:r>
-                <a:rPr lang="ru" sz="1467">
-                  <a:solidFill>
-                    <a:schemeClr val="dk1"/>
-                  </a:solidFill>
-                </a:rPr>
-                <a:t>Остались ли у вас вопросы по проекту?</a:t>
-              </a:r>
-              <a:endParaRPr sz="1467">
-                <a:solidFill>
-                  <a:schemeClr val="dk1"/>
-                </a:solidFill>
-              </a:endParaRPr>
-            </a:p>
-            <a:p>
-              <a:pPr marL="609585" indent="-397923">
-                <a:buClr>
-                  <a:schemeClr val="dk1"/>
-                </a:buClr>
-                <a:buSzPts val="1100"/>
-                <a:buAutoNum type="arabicPeriod"/>
-              </a:pPr>
-              <a:r>
-                <a:rPr lang="ru" sz="1467">
-                  <a:solidFill>
-                    <a:schemeClr val="dk1"/>
-                  </a:solidFill>
-                </a:rPr>
-                <a:t>Как вы планируете развиваться дальше?</a:t>
-              </a:r>
-              <a:endParaRPr sz="1600">
-                <a:solidFill>
-                  <a:schemeClr val="dk1"/>
+                  <a:srgbClr val="3F299A"/>
                 </a:solidFill>
                 <a:latin typeface="Roboto"/>
                 <a:ea typeface="Roboto"/>
                 <a:cs typeface="Roboto"/>
-                <a:sym typeface="Roboto"/>
-              </a:endParaRPr>
-            </a:p>
-          </p:txBody>
-        </p:sp>
-      </p:grpSp>
+              </a:rPr>
+              <a:t>1. </a:t>
+            </a:r>
+            <a:r>
+              <a:rPr lang="ru-RU" sz="1800" dirty="0">
+                <a:latin typeface="Roboto" panose="020B0604020202020204"/>
+              </a:rPr>
+              <a:t>Изоляция широковещательных запросов (и их меньший размер)</a:t>
+            </a:r>
+          </a:p>
+          <a:p>
+            <a:r>
+              <a:rPr lang="ru-RU" sz="2100" b="1" dirty="0">
+                <a:solidFill>
+                  <a:srgbClr val="3F299A"/>
+                </a:solidFill>
+                <a:latin typeface="Roboto"/>
+                <a:ea typeface="Roboto"/>
+                <a:cs typeface="Roboto"/>
+              </a:rPr>
+              <a:t>2. </a:t>
+            </a:r>
+            <a:r>
+              <a:rPr lang="ru-RU" sz="1800" dirty="0">
+                <a:latin typeface="Roboto" panose="020B0604020202020204"/>
+              </a:rPr>
+              <a:t>Повышенный уровень безопасности</a:t>
+            </a:r>
+          </a:p>
+          <a:p>
+            <a:r>
+              <a:rPr lang="ru-RU" sz="2100" b="1" dirty="0">
+                <a:solidFill>
+                  <a:srgbClr val="3F299A"/>
+                </a:solidFill>
+                <a:latin typeface="Roboto"/>
+                <a:ea typeface="Roboto"/>
+                <a:cs typeface="Roboto"/>
+              </a:rPr>
+              <a:t>3. </a:t>
+            </a:r>
+            <a:r>
+              <a:rPr lang="ru-RU" sz="1800" dirty="0">
+                <a:latin typeface="Roboto" panose="020B0604020202020204"/>
+              </a:rPr>
+              <a:t>Повышение производительности</a:t>
+            </a:r>
+          </a:p>
+          <a:p>
+            <a:r>
+              <a:rPr lang="ru-RU" sz="2100" b="1" dirty="0">
+                <a:solidFill>
+                  <a:srgbClr val="3F299A"/>
+                </a:solidFill>
+                <a:latin typeface="Roboto"/>
+                <a:ea typeface="Roboto"/>
+                <a:cs typeface="Roboto"/>
+              </a:rPr>
+              <a:t>4. </a:t>
+            </a:r>
+            <a:r>
+              <a:rPr lang="ru-RU" sz="1800" dirty="0">
+                <a:latin typeface="Roboto" panose="020B0604020202020204"/>
+              </a:rPr>
+              <a:t>Разграничение доступа</a:t>
+            </a:r>
+            <a:endParaRPr lang="ru-RU" sz="1800" dirty="0">
+              <a:latin typeface="Roboto" panose="020B0604020202020204"/>
+            </a:endParaRPr>
+          </a:p>
+        </p:txBody>
+      </p:sp>
     </p:spTree>
     <p:extLst>
       <p:ext uri="{BB962C8B-B14F-4D97-AF65-F5344CB8AC3E}">
-        <p14:creationId xmlns:p14="http://schemas.microsoft.com/office/powerpoint/2010/main" val="3402901008"/>
+        <p14:creationId xmlns:p14="http://schemas.microsoft.com/office/powerpoint/2010/main" val="2878152160"/>
       </p:ext>
     </p:extLst>
   </p:cSld>
   <p:clrMapOvr>
     <a:masterClrMapping/>
   </p:clrMapOvr>
+  <p:timing>
+    <p:tnLst>
+      <p:par>
+        <p:cTn id="1" dur="indefinite" restart="never" nodeType="tmRoot"/>
+      </p:par>
+    </p:tnLst>
+  </p:timing>
+</p:sld>
+</file>
+
+<file path=ppt/slides/slide9.xml><?xml version="1.0" encoding="utf-8"?>
+<p:sld xmlns:a="http://schemas.openxmlformats.org/drawingml/2006/main" xmlns:r="http://schemas.openxmlformats.org/officeDocument/2006/relationships" xmlns:p="http://schemas.openxmlformats.org/presentationml/2006/main">
+  <p:cSld>
+    <p:spTree>
+      <p:nvGrpSpPr>
+        <p:cNvPr id="1" name=""/>
+        <p:cNvGrpSpPr/>
+        <p:nvPr/>
+      </p:nvGrpSpPr>
+      <p:grpSpPr>
+        <a:xfrm>
+          <a:off x="0" y="0"/>
+          <a:ext cx="0" cy="0"/>
+          <a:chOff x="0" y="0"/>
+          <a:chExt cx="0" cy="0"/>
+        </a:xfrm>
+      </p:grpSpPr>
+      <p:sp>
+        <p:nvSpPr>
+          <p:cNvPr id="2" name="Заголовок 1"/>
+          <p:cNvSpPr>
+            <a:spLocks noGrp="1"/>
+          </p:cNvSpPr>
+          <p:nvPr>
+            <p:ph type="title"/>
+          </p:nvPr>
+        </p:nvSpPr>
+        <p:spPr/>
+        <p:txBody>
+          <a:bodyPr/>
+          <a:lstStyle/>
+          <a:p>
+            <a:r>
+              <a:rPr lang="en-US" sz="2800" b="1" dirty="0" err="1" smtClean="0">
+                <a:latin typeface="Roboto" panose="020B0604020202020204"/>
+              </a:rPr>
+              <a:t>Vlan</a:t>
+            </a:r>
+            <a:r>
+              <a:rPr lang="ru-RU" sz="2800" b="1" dirty="0" smtClean="0">
+                <a:latin typeface="Roboto" panose="020B0604020202020204"/>
+              </a:rPr>
+              <a:t> -</a:t>
+            </a:r>
+            <a:r>
+              <a:rPr lang="en-US" sz="2800" b="1" dirty="0" smtClean="0">
+                <a:latin typeface="Roboto" panose="020B0604020202020204"/>
+              </a:rPr>
+              <a:t> </a:t>
+            </a:r>
+            <a:r>
+              <a:rPr lang="ru-RU" sz="2800" b="1" dirty="0" smtClean="0">
+                <a:latin typeface="Roboto" panose="020B0604020202020204"/>
+              </a:rPr>
+              <a:t>реализация</a:t>
+            </a:r>
+            <a:endParaRPr lang="ru-RU" sz="2800" b="1" dirty="0"/>
+          </a:p>
+        </p:txBody>
+      </p:sp>
+      <p:pic>
+        <p:nvPicPr>
+          <p:cNvPr id="5" name="Рисунок 4"/>
+          <p:cNvPicPr>
+            <a:picLocks noChangeAspect="1"/>
+          </p:cNvPicPr>
+          <p:nvPr/>
+        </p:nvPicPr>
+        <p:blipFill>
+          <a:blip r:embed="rId2"/>
+          <a:stretch>
+            <a:fillRect/>
+          </a:stretch>
+        </p:blipFill>
+        <p:spPr>
+          <a:xfrm>
+            <a:off x="667401" y="1901959"/>
+            <a:ext cx="4856068" cy="3131595"/>
+          </a:xfrm>
+          <a:prstGeom prst="rect">
+            <a:avLst/>
+          </a:prstGeom>
+        </p:spPr>
+      </p:pic>
+      <p:sp>
+        <p:nvSpPr>
+          <p:cNvPr id="3" name="Текст 2"/>
+          <p:cNvSpPr>
+            <a:spLocks noGrp="1"/>
+          </p:cNvSpPr>
+          <p:nvPr>
+            <p:ph type="body" idx="1"/>
+          </p:nvPr>
+        </p:nvSpPr>
+        <p:spPr/>
+        <p:txBody>
+          <a:bodyPr/>
+          <a:lstStyle/>
+          <a:p>
+            <a:endParaRPr lang="en-US" dirty="0" smtClean="0"/>
+          </a:p>
+          <a:p>
+            <a:endParaRPr lang="en-US" dirty="0"/>
+          </a:p>
+          <a:p>
+            <a:endParaRPr lang="en-US" dirty="0" smtClean="0"/>
+          </a:p>
+          <a:p>
+            <a:endParaRPr lang="en-US" dirty="0"/>
+          </a:p>
+          <a:p>
+            <a:endParaRPr lang="en-US" dirty="0" smtClean="0"/>
+          </a:p>
+          <a:p>
+            <a:endParaRPr lang="en-US" dirty="0"/>
+          </a:p>
+          <a:p>
+            <a:endParaRPr lang="en-US" dirty="0" smtClean="0"/>
+          </a:p>
+          <a:p>
+            <a:endParaRPr lang="ru-RU" sz="1400" dirty="0" smtClean="0"/>
+          </a:p>
+          <a:p>
+            <a:r>
+              <a:rPr lang="ru-RU" sz="1400" dirty="0">
+                <a:latin typeface="Roboto" panose="020B0604020202020204"/>
+              </a:rPr>
+              <a:t>1. 2 типа портов (</a:t>
+            </a:r>
+            <a:r>
+              <a:rPr lang="en-US" sz="1400" dirty="0">
+                <a:latin typeface="Roboto" panose="020B0604020202020204"/>
+              </a:rPr>
+              <a:t>access, vlan</a:t>
+            </a:r>
+            <a:r>
+              <a:rPr lang="ru-RU" sz="1400" dirty="0">
+                <a:latin typeface="Roboto" panose="020B0604020202020204"/>
+              </a:rPr>
+              <a:t>)</a:t>
+            </a:r>
+            <a:endParaRPr lang="en-US" sz="1400" dirty="0">
+              <a:latin typeface="Roboto" panose="020B0604020202020204"/>
+            </a:endParaRPr>
+          </a:p>
+          <a:p>
+            <a:r>
+              <a:rPr lang="en-US" sz="1400" dirty="0">
+                <a:latin typeface="Roboto" panose="020B0604020202020204"/>
+              </a:rPr>
+              <a:t>2</a:t>
+            </a:r>
+            <a:r>
+              <a:rPr lang="ru-RU" sz="1400" dirty="0">
+                <a:latin typeface="Roboto" panose="020B0604020202020204"/>
+              </a:rPr>
+              <a:t>. </a:t>
+            </a:r>
+            <a:r>
+              <a:rPr lang="en-US" sz="1400" dirty="0">
+                <a:latin typeface="Roboto" panose="020B0604020202020204"/>
+              </a:rPr>
+              <a:t>PortFast </a:t>
+            </a:r>
+            <a:r>
+              <a:rPr lang="ru-RU" sz="1400" dirty="0">
+                <a:latin typeface="Roboto" panose="020B0604020202020204"/>
+              </a:rPr>
+              <a:t>и </a:t>
+            </a:r>
+            <a:r>
+              <a:rPr lang="en-US" sz="1400" dirty="0">
+                <a:latin typeface="Roboto" panose="020B0604020202020204"/>
+              </a:rPr>
+              <a:t>Bpduguard </a:t>
+            </a:r>
+            <a:r>
+              <a:rPr lang="ru-RU" sz="1400" dirty="0">
+                <a:latin typeface="Roboto" panose="020B0604020202020204"/>
+              </a:rPr>
+              <a:t>в сторону конечных устройств </a:t>
+            </a:r>
+          </a:p>
+          <a:p>
+            <a:r>
+              <a:rPr lang="ru-RU" sz="1400" dirty="0">
+                <a:latin typeface="Roboto" panose="020B0604020202020204"/>
+              </a:rPr>
+              <a:t>3. </a:t>
+            </a:r>
+            <a:r>
+              <a:rPr lang="en-US" sz="1400" dirty="0">
+                <a:latin typeface="Roboto" panose="020B0604020202020204"/>
+              </a:rPr>
+              <a:t>Native vlan </a:t>
+            </a:r>
+            <a:r>
+              <a:rPr lang="ru-RU" sz="1400" dirty="0">
+                <a:latin typeface="Roboto" panose="020B0604020202020204"/>
+              </a:rPr>
+              <a:t>изменен на 1000 (+ </a:t>
+            </a:r>
+            <a:r>
+              <a:rPr lang="en-US" sz="1400" dirty="0">
+                <a:latin typeface="Roboto" panose="020B0604020202020204"/>
+              </a:rPr>
+              <a:t>vlan 999 </a:t>
+            </a:r>
+            <a:r>
+              <a:rPr lang="ru-RU" sz="1400" dirty="0">
+                <a:latin typeface="Roboto" panose="020B0604020202020204"/>
+              </a:rPr>
+              <a:t>для выключенных портов)</a:t>
+            </a:r>
+            <a:endParaRPr lang="en-US" sz="1400" dirty="0">
+              <a:latin typeface="Roboto" panose="020B0604020202020204"/>
+            </a:endParaRPr>
+          </a:p>
+          <a:p>
+            <a:endParaRPr lang="ru-RU" dirty="0"/>
+          </a:p>
+        </p:txBody>
+      </p:sp>
+    </p:spTree>
+    <p:extLst>
+      <p:ext uri="{BB962C8B-B14F-4D97-AF65-F5344CB8AC3E}">
+        <p14:creationId xmlns:p14="http://schemas.microsoft.com/office/powerpoint/2010/main" val="2226587442"/>
+      </p:ext>
+    </p:extLst>
+  </p:cSld>
+  <p:clrMapOvr>
+    <a:masterClrMapping/>
+  </p:clrMapOvr>
+  <p:timing>
+    <p:tnLst>
+      <p:par>
+        <p:cTn id="1" dur="indefinite" restart="never" nodeType="tmRoot"/>
+      </p:par>
+    </p:tnLst>
+  </p:timing>
 </p:sld>
 </file>
 
